--- a/slides/modules/m09-trusted-supply-chain.pptx
+++ b/slides/modules/m09-trusted-supply-chain.pptx
@@ -14,6 +14,8 @@
     <p:sldId id="262" r:id="rId14"/>
     <p:sldId id="263" r:id="rId15"/>
     <p:sldId id="264" r:id="rId16"/>
+    <p:sldId id="265" r:id="rId17"/>
+    <p:sldId id="266" r:id="rId18"/>
   </p:sldIdLst>
   <p:sldSz cx="12191695" cy="6858000" type="screen4x3"/>
   <p:notesSz cx="6858000" cy="9144000"/>
@@ -535,6 +537,76 @@
 </p:notes>
 </file>
 
+<file path=ppt/notesSlides/notesSlide10.xml><?xml version="1.0" encoding="utf-8"?>
+<p:notes xmlns:a="http://schemas.openxmlformats.org/drawingml/2006/main" xmlns:p="http://schemas.openxmlformats.org/presentationml/2006/main" xmlns:r="http://schemas.openxmlformats.org/officeDocument/2006/relationships">
+  <p:cSld>
+    <p:spTree>
+      <p:nvGrpSpPr>
+        <p:cNvPr id="1" name=""/>
+        <p:cNvGrpSpPr/>
+        <p:nvPr/>
+      </p:nvGrpSpPr>
+      <p:grpSpPr>
+        <a:xfrm>
+          <a:off x="0" y="0"/>
+          <a:ext cx="0" cy="0"/>
+          <a:chOff x="0" y="0"/>
+          <a:chExt cx="0" cy="0"/>
+        </a:xfrm>
+      </p:grpSpPr>
+      <p:sp>
+        <p:nvSpPr>
+          <p:cNvPr id="2" name="Slide Image Placeholder 1"/>
+          <p:cNvSpPr>
+            <a:spLocks noGrp="1"/>
+          </p:cNvSpPr>
+          <p:nvPr>
+            <p:ph type="sldImg" idx="2"/>
+          </p:nvPr>
+        </p:nvSpPr>
+        <p:spPr/>
+      </p:sp>
+      <p:sp>
+        <p:nvSpPr>
+          <p:cNvPr id="3" name="Notes Placeholder 2"/>
+          <p:cNvSpPr>
+            <a:spLocks noGrp="1"/>
+          </p:cNvSpPr>
+          <p:nvPr>
+            <p:ph type="body" idx="3" sz="quarter"/>
+          </p:nvPr>
+        </p:nvSpPr>
+        <p:spPr/>
+        <p:txBody>
+          <a:bodyPr/>
+          <a:lstStyle/>
+          <a:p>
+            <a:r>
+              <a:t>Concept diagram: What you built.</a:t>
+            </a:r>
+          </a:p>
+        </p:txBody>
+      </p:sp>
+      <p:sp>
+        <p:nvSpPr>
+          <p:cNvPr id="4" name="Slide Number Placeholder 3"/>
+          <p:cNvSpPr>
+            <a:spLocks noGrp="1"/>
+          </p:cNvSpPr>
+          <p:nvPr>
+            <p:ph type="sldNum" idx="5" sz="quarter"/>
+          </p:nvPr>
+        </p:nvSpPr>
+        <p:spPr/>
+      </p:sp>
+    </p:spTree>
+  </p:cSld>
+  <p:clrMapOvr>
+    <a:masterClrMapping/>
+  </p:clrMapOvr>
+</p:notes>
+</file>
+
 <file path=ppt/notesSlides/notesSlide2.xml><?xml version="1.0" encoding="utf-8"?>
 <p:notes xmlns:a="http://schemas.openxmlformats.org/drawingml/2006/main" xmlns:p="http://schemas.openxmlformats.org/presentationml/2006/main" xmlns:r="http://schemas.openxmlformats.org/officeDocument/2006/relationships">
   <p:cSld>
@@ -1001,6 +1073,76 @@
           <a:p>
             <a:r>
               <a:t>Land the transfer and stay honest. Discussion prompts: when the next Log4Shell lands, how fast can you answer "are we affected" — a stored-SBOM query, or a team grepping build files by hand; whether your org signs images today and, if so, where the signature is actually enforced (admission on every cluster, or nowhere); and where the gate should live for a service that matters — pipeline, admission, or both — and which one is missing today. Then the credibility close on restraint: don't gate on non-deterministic policy in a place people can't act (route the noisy "any CVE" policy to a report, not a hard failure); don't sign images you never verify (signing without enforcement is overhead); keyless is powerful but not free (OIDC + log retention); and an SBOM is a snapshot, not a subscription — it's only as useful as the process that keeps and re-scans it.</a:t>
+            </a:r>
+          </a:p>
+        </p:txBody>
+      </p:sp>
+      <p:sp>
+        <p:nvSpPr>
+          <p:cNvPr id="4" name="Slide Number Placeholder 3"/>
+          <p:cNvSpPr>
+            <a:spLocks noGrp="1"/>
+          </p:cNvSpPr>
+          <p:nvPr>
+            <p:ph type="sldNum" idx="5" sz="quarter"/>
+          </p:nvPr>
+        </p:nvSpPr>
+        <p:spPr/>
+      </p:sp>
+    </p:spTree>
+  </p:cSld>
+  <p:clrMapOvr>
+    <a:masterClrMapping/>
+  </p:clrMapOvr>
+</p:notes>
+</file>
+
+<file path=ppt/notesSlides/notesSlide9.xml><?xml version="1.0" encoding="utf-8"?>
+<p:notes xmlns:a="http://schemas.openxmlformats.org/drawingml/2006/main" xmlns:p="http://schemas.openxmlformats.org/presentationml/2006/main" xmlns:r="http://schemas.openxmlformats.org/officeDocument/2006/relationships">
+  <p:cSld>
+    <p:spTree>
+      <p:nvGrpSpPr>
+        <p:cNvPr id="1" name=""/>
+        <p:cNvGrpSpPr/>
+        <p:nvPr/>
+      </p:nvGrpSpPr>
+      <p:grpSpPr>
+        <a:xfrm>
+          <a:off x="0" y="0"/>
+          <a:ext cx="0" cy="0"/>
+          <a:chOff x="0" y="0"/>
+          <a:chExt cx="0" cy="0"/>
+        </a:xfrm>
+      </p:grpSpPr>
+      <p:sp>
+        <p:nvSpPr>
+          <p:cNvPr id="2" name="Slide Image Placeholder 1"/>
+          <p:cNvSpPr>
+            <a:spLocks noGrp="1"/>
+          </p:cNvSpPr>
+          <p:nvPr>
+            <p:ph type="sldImg" idx="2"/>
+          </p:nvPr>
+        </p:nvSpPr>
+        <p:spPr/>
+      </p:sp>
+      <p:sp>
+        <p:nvSpPr>
+          <p:cNvPr id="3" name="Notes Placeholder 2"/>
+          <p:cNvSpPr>
+            <a:spLocks noGrp="1"/>
+          </p:cNvSpPr>
+          <p:nvPr>
+            <p:ph type="body" idx="3" sz="quarter"/>
+          </p:nvPr>
+        </p:nvSpPr>
+        <p:spPr/>
+        <p:txBody>
+          <a:bodyPr/>
+          <a:lstStyle/>
+          <a:p>
+            <a:r>
+              <a:t>Concept diagram: Trust triangle.</a:t>
             </a:r>
           </a:p>
         </p:txBody>
@@ -4209,6 +4351,738 @@
 </p:sld>
 </file>
 
+<file path=ppt/slides/slide10.xml><?xml version="1.0" encoding="utf-8"?>
+<p:sld xmlns:a="http://schemas.openxmlformats.org/drawingml/2006/main" xmlns:p="http://schemas.openxmlformats.org/presentationml/2006/main" xmlns:r="http://schemas.openxmlformats.org/officeDocument/2006/relationships">
+  <p:cSld>
+    <p:spTree>
+      <p:nvGrpSpPr>
+        <p:cNvPr id="1" name=""/>
+        <p:cNvGrpSpPr/>
+        <p:nvPr/>
+      </p:nvGrpSpPr>
+      <p:grpSpPr/>
+      <p:pic>
+        <p:nvPicPr>
+          <p:cNvPr id="2" name="Picture 1" descr="redhat_logo.jpg"/>
+          <p:cNvPicPr>
+            <a:picLocks noChangeAspect="1"/>
+          </p:cNvPicPr>
+          <p:nvPr/>
+        </p:nvPicPr>
+        <p:blipFill>
+          <a:blip r:embed="rId2"/>
+          <a:stretch>
+            <a:fillRect/>
+          </a:stretch>
+        </p:blipFill>
+        <p:spPr>
+          <a:xfrm>
+            <a:off x="10326319" y="475488"/>
+            <a:ext cx="1024128" cy="242248"/>
+          </a:xfrm>
+          <a:prstGeom prst="rect">
+            <a:avLst/>
+          </a:prstGeom>
+        </p:spPr>
+      </p:pic>
+      <p:sp>
+        <p:nvSpPr>
+          <p:cNvPr id="3" name="TextBox 2"/>
+          <p:cNvSpPr txBox="1"/>
+          <p:nvPr/>
+        </p:nvSpPr>
+        <p:spPr>
+          <a:xfrm>
+            <a:off x="841248" y="548640"/>
+            <a:ext cx="8595360" cy="274320"/>
+          </a:xfrm>
+          <a:prstGeom prst="rect">
+            <a:avLst/>
+          </a:prstGeom>
+          <a:noFill/>
+        </p:spPr>
+        <p:txBody>
+          <a:bodyPr wrap="square" anchor="t" lIns="0" rIns="0" tIns="0" bIns="0">
+            <a:spAutoFit/>
+          </a:bodyPr>
+          <a:lstStyle/>
+          <a:p>
+            <a:pPr algn="l">
+              <a:lnSpc>
+                <a:spcPct val="106000"/>
+              </a:lnSpc>
+              <a:spcBef>
+                <a:spcPts val="0"/>
+              </a:spcBef>
+              <a:spcAft>
+                <a:spcPts val="0"/>
+              </a:spcAft>
+            </a:pPr>
+            <a:r>
+              <a:rPr sz="1250" b="1" spc="220">
+                <a:solidFill>
+                  <a:srgbClr val="EE0000"/>
+                </a:solidFill>
+                <a:latin typeface="Red Hat Display"/>
+              </a:rPr>
+              <a:t>M09 · TRUSTED SOFTWARE SUPPLY CHAIN</a:t>
+            </a:r>
+          </a:p>
+        </p:txBody>
+      </p:sp>
+      <p:sp>
+        <p:nvSpPr>
+          <p:cNvPr id="4" name="TextBox 3"/>
+          <p:cNvSpPr txBox="1"/>
+          <p:nvPr/>
+        </p:nvSpPr>
+        <p:spPr>
+          <a:xfrm>
+            <a:off x="841248" y="877824"/>
+            <a:ext cx="10515600" cy="548640"/>
+          </a:xfrm>
+          <a:prstGeom prst="rect">
+            <a:avLst/>
+          </a:prstGeom>
+          <a:noFill/>
+        </p:spPr>
+        <p:txBody>
+          <a:bodyPr wrap="none" anchor="t" lIns="0" rIns="0" tIns="0" bIns="0">
+            <a:spAutoFit/>
+          </a:bodyPr>
+          <a:lstStyle/>
+          <a:p>
+            <a:pPr algn="l">
+              <a:lnSpc>
+                <a:spcPct val="100000"/>
+              </a:lnSpc>
+              <a:spcBef>
+                <a:spcPts val="0"/>
+              </a:spcBef>
+              <a:spcAft>
+                <a:spcPts val="0"/>
+              </a:spcAft>
+            </a:pPr>
+            <a:r>
+              <a:rPr sz="2500" b="1">
+                <a:solidFill>
+                  <a:srgbClr val="1A1A1A"/>
+                </a:solidFill>
+                <a:latin typeface="Red Hat Display"/>
+              </a:rPr>
+              <a:t>Trust triangle</a:t>
+            </a:r>
+          </a:p>
+        </p:txBody>
+      </p:sp>
+      <p:cxnSp>
+        <p:nvCxnSpPr>
+          <p:cNvPr id="5" name="Connector 4"/>
+          <p:cNvCxnSpPr/>
+          <p:nvPr/>
+        </p:nvCxnSpPr>
+        <p:spPr>
+          <a:xfrm>
+            <a:off x="841248" y="1554480"/>
+            <a:ext cx="1371600" cy="0"/>
+          </a:xfrm>
+          <a:prstGeom prst="bentConnector3">
+            <a:avLst/>
+          </a:prstGeom>
+          <a:ln w="31750">
+            <a:solidFill>
+              <a:srgbClr val="EE0000"/>
+            </a:solidFill>
+          </a:ln>
+          <a:effectLst/>
+        </p:spPr>
+        <p:style>
+          <a:lnRef idx="2">
+            <a:schemeClr val="accent1"/>
+          </a:lnRef>
+          <a:fillRef idx="0">
+            <a:schemeClr val="accent1"/>
+          </a:fillRef>
+          <a:effectRef idx="1">
+            <a:schemeClr val="accent1"/>
+          </a:effectRef>
+          <a:fontRef idx="minor">
+            <a:schemeClr val="tx1"/>
+          </a:fontRef>
+        </p:style>
+      </p:cxnSp>
+      <p:sp>
+        <p:nvSpPr>
+          <p:cNvPr id="6" name="Rounded Rectangle 5"/>
+          <p:cNvSpPr/>
+          <p:nvPr/>
+        </p:nvSpPr>
+        <p:spPr>
+          <a:xfrm>
+            <a:off x="841248" y="2331720"/>
+            <a:ext cx="10509199" cy="3794760"/>
+          </a:xfrm>
+          <a:prstGeom prst="roundRect">
+            <a:avLst>
+              <a:gd name="adj" fmla="val 4000"/>
+            </a:avLst>
+          </a:prstGeom>
+          <a:solidFill>
+            <a:srgbClr val="FFFFFF"/>
+          </a:solidFill>
+          <a:ln w="15240">
+            <a:solidFill>
+              <a:srgbClr val="DDE1E6"/>
+            </a:solidFill>
+          </a:ln>
+          <a:effectLst/>
+        </p:spPr>
+        <p:style>
+          <a:lnRef idx="1">
+            <a:schemeClr val="accent1"/>
+          </a:lnRef>
+          <a:fillRef idx="3">
+            <a:schemeClr val="accent1"/>
+          </a:fillRef>
+          <a:effectRef idx="2">
+            <a:schemeClr val="accent1"/>
+          </a:effectRef>
+          <a:fontRef idx="minor">
+            <a:schemeClr val="lt1"/>
+          </a:fontRef>
+        </p:style>
+        <p:txBody>
+          <a:bodyPr rtlCol="0" anchor="ctr"/>
+          <a:lstStyle/>
+          <a:p>
+            <a:pPr algn="ctr"/>
+          </a:p>
+        </p:txBody>
+      </p:sp>
+      <p:pic>
+        <p:nvPicPr>
+          <p:cNvPr id="7" name="Picture 6" descr="01-trust-triangle.png"/>
+          <p:cNvPicPr>
+            <a:picLocks noChangeAspect="1"/>
+          </p:cNvPicPr>
+          <p:nvPr/>
+        </p:nvPicPr>
+        <p:blipFill>
+          <a:blip r:embed="rId3"/>
+          <a:stretch>
+            <a:fillRect/>
+          </a:stretch>
+        </p:blipFill>
+        <p:spPr>
+          <a:xfrm>
+            <a:off x="1042416" y="2678328"/>
+            <a:ext cx="10106863" cy="3101543"/>
+          </a:xfrm>
+          <a:prstGeom prst="rect">
+            <a:avLst/>
+          </a:prstGeom>
+        </p:spPr>
+      </p:pic>
+      <p:cxnSp>
+        <p:nvCxnSpPr>
+          <p:cNvPr id="8" name="Connector 7"/>
+          <p:cNvCxnSpPr/>
+          <p:nvPr/>
+        </p:nvCxnSpPr>
+        <p:spPr>
+          <a:xfrm>
+            <a:off x="841248" y="6437376"/>
+            <a:ext cx="10509199" cy="0"/>
+          </a:xfrm>
+          <a:prstGeom prst="bentConnector3">
+            <a:avLst/>
+          </a:prstGeom>
+          <a:ln w="12700">
+            <a:solidFill>
+              <a:srgbClr val="DDE1E6"/>
+            </a:solidFill>
+          </a:ln>
+          <a:effectLst/>
+        </p:spPr>
+        <p:style>
+          <a:lnRef idx="2">
+            <a:schemeClr val="accent1"/>
+          </a:lnRef>
+          <a:fillRef idx="0">
+            <a:schemeClr val="accent1"/>
+          </a:fillRef>
+          <a:effectRef idx="1">
+            <a:schemeClr val="accent1"/>
+          </a:effectRef>
+          <a:fontRef idx="minor">
+            <a:schemeClr val="tx1"/>
+          </a:fontRef>
+        </p:style>
+      </p:cxnSp>
+      <p:sp>
+        <p:nvSpPr>
+          <p:cNvPr id="9" name="TextBox 8"/>
+          <p:cNvSpPr txBox="1"/>
+          <p:nvPr/>
+        </p:nvSpPr>
+        <p:spPr>
+          <a:xfrm>
+            <a:off x="841248" y="6473952"/>
+            <a:ext cx="7315200" cy="274320"/>
+          </a:xfrm>
+          <a:prstGeom prst="rect">
+            <a:avLst/>
+          </a:prstGeom>
+          <a:noFill/>
+        </p:spPr>
+        <p:txBody>
+          <a:bodyPr wrap="square" anchor="t" lIns="0" rIns="0" tIns="0" bIns="0">
+            <a:spAutoFit/>
+          </a:bodyPr>
+          <a:lstStyle/>
+          <a:p>
+            <a:pPr algn="l">
+              <a:lnSpc>
+                <a:spcPct val="106000"/>
+              </a:lnSpc>
+              <a:spcBef>
+                <a:spcPts val="0"/>
+              </a:spcBef>
+              <a:spcAft>
+                <a:spcPts val="0"/>
+              </a:spcAft>
+            </a:pPr>
+            <a:r>
+              <a:rPr sz="950" b="0">
+                <a:solidFill>
+                  <a:srgbClr val="8A9099"/>
+                </a:solidFill>
+                <a:latin typeface="Red Hat Text"/>
+              </a:rPr>
+              <a:t>CONFIDENTIAL</a:t>
+            </a:r>
+          </a:p>
+        </p:txBody>
+      </p:sp>
+      <p:sp>
+        <p:nvSpPr>
+          <p:cNvPr id="10" name="TextBox 9"/>
+          <p:cNvSpPr txBox="1"/>
+          <p:nvPr/>
+        </p:nvSpPr>
+        <p:spPr>
+          <a:xfrm>
+            <a:off x="10801807" y="6473952"/>
+            <a:ext cx="548640" cy="274320"/>
+          </a:xfrm>
+          <a:prstGeom prst="rect">
+            <a:avLst/>
+          </a:prstGeom>
+          <a:noFill/>
+        </p:spPr>
+        <p:txBody>
+          <a:bodyPr wrap="square" anchor="t" lIns="0" rIns="0" tIns="0" bIns="0">
+            <a:spAutoFit/>
+          </a:bodyPr>
+          <a:lstStyle/>
+          <a:p>
+            <a:pPr algn="r">
+              <a:lnSpc>
+                <a:spcPct val="106000"/>
+              </a:lnSpc>
+              <a:spcBef>
+                <a:spcPts val="0"/>
+              </a:spcBef>
+              <a:spcAft>
+                <a:spcPts val="0"/>
+              </a:spcAft>
+            </a:pPr>
+            <a:r>
+              <a:rPr sz="950" b="0">
+                <a:solidFill>
+                  <a:srgbClr val="8A9099"/>
+                </a:solidFill>
+                <a:latin typeface="Red Hat Text"/>
+              </a:rPr>
+              <a:t>9</a:t>
+            </a:r>
+          </a:p>
+        </p:txBody>
+      </p:sp>
+    </p:spTree>
+  </p:cSld>
+  <p:clrMapOvr>
+    <a:masterClrMapping/>
+  </p:clrMapOvr>
+</p:sld>
+</file>
+
+<file path=ppt/slides/slide11.xml><?xml version="1.0" encoding="utf-8"?>
+<p:sld xmlns:a="http://schemas.openxmlformats.org/drawingml/2006/main" xmlns:p="http://schemas.openxmlformats.org/presentationml/2006/main" xmlns:r="http://schemas.openxmlformats.org/officeDocument/2006/relationships">
+  <p:cSld>
+    <p:spTree>
+      <p:nvGrpSpPr>
+        <p:cNvPr id="1" name=""/>
+        <p:cNvGrpSpPr/>
+        <p:nvPr/>
+      </p:nvGrpSpPr>
+      <p:grpSpPr/>
+      <p:pic>
+        <p:nvPicPr>
+          <p:cNvPr id="2" name="Picture 1" descr="redhat_logo.jpg"/>
+          <p:cNvPicPr>
+            <a:picLocks noChangeAspect="1"/>
+          </p:cNvPicPr>
+          <p:nvPr/>
+        </p:nvPicPr>
+        <p:blipFill>
+          <a:blip r:embed="rId2"/>
+          <a:stretch>
+            <a:fillRect/>
+          </a:stretch>
+        </p:blipFill>
+        <p:spPr>
+          <a:xfrm>
+            <a:off x="10326319" y="475488"/>
+            <a:ext cx="1024128" cy="242248"/>
+          </a:xfrm>
+          <a:prstGeom prst="rect">
+            <a:avLst/>
+          </a:prstGeom>
+        </p:spPr>
+      </p:pic>
+      <p:sp>
+        <p:nvSpPr>
+          <p:cNvPr id="3" name="TextBox 2"/>
+          <p:cNvSpPr txBox="1"/>
+          <p:nvPr/>
+        </p:nvSpPr>
+        <p:spPr>
+          <a:xfrm>
+            <a:off x="841248" y="548640"/>
+            <a:ext cx="8595360" cy="274320"/>
+          </a:xfrm>
+          <a:prstGeom prst="rect">
+            <a:avLst/>
+          </a:prstGeom>
+          <a:noFill/>
+        </p:spPr>
+        <p:txBody>
+          <a:bodyPr wrap="square" anchor="t" lIns="0" rIns="0" tIns="0" bIns="0">
+            <a:spAutoFit/>
+          </a:bodyPr>
+          <a:lstStyle/>
+          <a:p>
+            <a:pPr algn="l">
+              <a:lnSpc>
+                <a:spcPct val="106000"/>
+              </a:lnSpc>
+              <a:spcBef>
+                <a:spcPts val="0"/>
+              </a:spcBef>
+              <a:spcAft>
+                <a:spcPts val="0"/>
+              </a:spcAft>
+            </a:pPr>
+            <a:r>
+              <a:rPr sz="1250" b="1" spc="220">
+                <a:solidFill>
+                  <a:srgbClr val="EE0000"/>
+                </a:solidFill>
+                <a:latin typeface="Red Hat Display"/>
+              </a:rPr>
+              <a:t>M09 · TRUSTED SOFTWARE SUPPLY CHAIN</a:t>
+            </a:r>
+          </a:p>
+        </p:txBody>
+      </p:sp>
+      <p:sp>
+        <p:nvSpPr>
+          <p:cNvPr id="4" name="TextBox 3"/>
+          <p:cNvSpPr txBox="1"/>
+          <p:nvPr/>
+        </p:nvSpPr>
+        <p:spPr>
+          <a:xfrm>
+            <a:off x="841248" y="877824"/>
+            <a:ext cx="10515600" cy="548640"/>
+          </a:xfrm>
+          <a:prstGeom prst="rect">
+            <a:avLst/>
+          </a:prstGeom>
+          <a:noFill/>
+        </p:spPr>
+        <p:txBody>
+          <a:bodyPr wrap="none" anchor="t" lIns="0" rIns="0" tIns="0" bIns="0">
+            <a:spAutoFit/>
+          </a:bodyPr>
+          <a:lstStyle/>
+          <a:p>
+            <a:pPr algn="l">
+              <a:lnSpc>
+                <a:spcPct val="100000"/>
+              </a:lnSpc>
+              <a:spcBef>
+                <a:spcPts val="0"/>
+              </a:spcBef>
+              <a:spcAft>
+                <a:spcPts val="0"/>
+              </a:spcAft>
+            </a:pPr>
+            <a:r>
+              <a:rPr sz="2500" b="1">
+                <a:solidFill>
+                  <a:srgbClr val="1A1A1A"/>
+                </a:solidFill>
+                <a:latin typeface="Red Hat Display"/>
+              </a:rPr>
+              <a:t>What you built</a:t>
+            </a:r>
+          </a:p>
+        </p:txBody>
+      </p:sp>
+      <p:cxnSp>
+        <p:nvCxnSpPr>
+          <p:cNvPr id="5" name="Connector 4"/>
+          <p:cNvCxnSpPr/>
+          <p:nvPr/>
+        </p:nvCxnSpPr>
+        <p:spPr>
+          <a:xfrm>
+            <a:off x="841248" y="1554480"/>
+            <a:ext cx="1371600" cy="0"/>
+          </a:xfrm>
+          <a:prstGeom prst="bentConnector3">
+            <a:avLst/>
+          </a:prstGeom>
+          <a:ln w="31750">
+            <a:solidFill>
+              <a:srgbClr val="EE0000"/>
+            </a:solidFill>
+          </a:ln>
+          <a:effectLst/>
+        </p:spPr>
+        <p:style>
+          <a:lnRef idx="2">
+            <a:schemeClr val="accent1"/>
+          </a:lnRef>
+          <a:fillRef idx="0">
+            <a:schemeClr val="accent1"/>
+          </a:fillRef>
+          <a:effectRef idx="1">
+            <a:schemeClr val="accent1"/>
+          </a:effectRef>
+          <a:fontRef idx="minor">
+            <a:schemeClr val="tx1"/>
+          </a:fontRef>
+        </p:style>
+      </p:cxnSp>
+      <p:sp>
+        <p:nvSpPr>
+          <p:cNvPr id="6" name="Rounded Rectangle 5"/>
+          <p:cNvSpPr/>
+          <p:nvPr/>
+        </p:nvSpPr>
+        <p:spPr>
+          <a:xfrm>
+            <a:off x="841248" y="2331720"/>
+            <a:ext cx="10509199" cy="3794760"/>
+          </a:xfrm>
+          <a:prstGeom prst="roundRect">
+            <a:avLst>
+              <a:gd name="adj" fmla="val 4000"/>
+            </a:avLst>
+          </a:prstGeom>
+          <a:solidFill>
+            <a:srgbClr val="FFFFFF"/>
+          </a:solidFill>
+          <a:ln w="15240">
+            <a:solidFill>
+              <a:srgbClr val="DDE1E6"/>
+            </a:solidFill>
+          </a:ln>
+          <a:effectLst/>
+        </p:spPr>
+        <p:style>
+          <a:lnRef idx="1">
+            <a:schemeClr val="accent1"/>
+          </a:lnRef>
+          <a:fillRef idx="3">
+            <a:schemeClr val="accent1"/>
+          </a:fillRef>
+          <a:effectRef idx="2">
+            <a:schemeClr val="accent1"/>
+          </a:effectRef>
+          <a:fontRef idx="minor">
+            <a:schemeClr val="lt1"/>
+          </a:fontRef>
+        </p:style>
+        <p:txBody>
+          <a:bodyPr rtlCol="0" anchor="ctr"/>
+          <a:lstStyle/>
+          <a:p>
+            <a:pPr algn="ctr"/>
+          </a:p>
+        </p:txBody>
+      </p:sp>
+      <p:pic>
+        <p:nvPicPr>
+          <p:cNvPr id="7" name="Picture 6" descr="03-what-you-built.png"/>
+          <p:cNvPicPr>
+            <a:picLocks noChangeAspect="1"/>
+          </p:cNvPicPr>
+          <p:nvPr/>
+        </p:nvPicPr>
+        <p:blipFill>
+          <a:blip r:embed="rId3"/>
+          <a:stretch>
+            <a:fillRect/>
+          </a:stretch>
+        </p:blipFill>
+        <p:spPr>
+          <a:xfrm>
+            <a:off x="1042416" y="3237364"/>
+            <a:ext cx="10106863" cy="1983471"/>
+          </a:xfrm>
+          <a:prstGeom prst="rect">
+            <a:avLst/>
+          </a:prstGeom>
+        </p:spPr>
+      </p:pic>
+      <p:cxnSp>
+        <p:nvCxnSpPr>
+          <p:cNvPr id="8" name="Connector 7"/>
+          <p:cNvCxnSpPr/>
+          <p:nvPr/>
+        </p:nvCxnSpPr>
+        <p:spPr>
+          <a:xfrm>
+            <a:off x="841248" y="6437376"/>
+            <a:ext cx="10509199" cy="0"/>
+          </a:xfrm>
+          <a:prstGeom prst="bentConnector3">
+            <a:avLst/>
+          </a:prstGeom>
+          <a:ln w="12700">
+            <a:solidFill>
+              <a:srgbClr val="DDE1E6"/>
+            </a:solidFill>
+          </a:ln>
+          <a:effectLst/>
+        </p:spPr>
+        <p:style>
+          <a:lnRef idx="2">
+            <a:schemeClr val="accent1"/>
+          </a:lnRef>
+          <a:fillRef idx="0">
+            <a:schemeClr val="accent1"/>
+          </a:fillRef>
+          <a:effectRef idx="1">
+            <a:schemeClr val="accent1"/>
+          </a:effectRef>
+          <a:fontRef idx="minor">
+            <a:schemeClr val="tx1"/>
+          </a:fontRef>
+        </p:style>
+      </p:cxnSp>
+      <p:sp>
+        <p:nvSpPr>
+          <p:cNvPr id="9" name="TextBox 8"/>
+          <p:cNvSpPr txBox="1"/>
+          <p:nvPr/>
+        </p:nvSpPr>
+        <p:spPr>
+          <a:xfrm>
+            <a:off x="841248" y="6473952"/>
+            <a:ext cx="7315200" cy="274320"/>
+          </a:xfrm>
+          <a:prstGeom prst="rect">
+            <a:avLst/>
+          </a:prstGeom>
+          <a:noFill/>
+        </p:spPr>
+        <p:txBody>
+          <a:bodyPr wrap="square" anchor="t" lIns="0" rIns="0" tIns="0" bIns="0">
+            <a:spAutoFit/>
+          </a:bodyPr>
+          <a:lstStyle/>
+          <a:p>
+            <a:pPr algn="l">
+              <a:lnSpc>
+                <a:spcPct val="106000"/>
+              </a:lnSpc>
+              <a:spcBef>
+                <a:spcPts val="0"/>
+              </a:spcBef>
+              <a:spcAft>
+                <a:spcPts val="0"/>
+              </a:spcAft>
+            </a:pPr>
+            <a:r>
+              <a:rPr sz="950" b="0">
+                <a:solidFill>
+                  <a:srgbClr val="8A9099"/>
+                </a:solidFill>
+                <a:latin typeface="Red Hat Text"/>
+              </a:rPr>
+              <a:t>CONFIDENTIAL</a:t>
+            </a:r>
+          </a:p>
+        </p:txBody>
+      </p:sp>
+      <p:sp>
+        <p:nvSpPr>
+          <p:cNvPr id="10" name="TextBox 9"/>
+          <p:cNvSpPr txBox="1"/>
+          <p:nvPr/>
+        </p:nvSpPr>
+        <p:spPr>
+          <a:xfrm>
+            <a:off x="10801807" y="6473952"/>
+            <a:ext cx="548640" cy="274320"/>
+          </a:xfrm>
+          <a:prstGeom prst="rect">
+            <a:avLst/>
+          </a:prstGeom>
+          <a:noFill/>
+        </p:spPr>
+        <p:txBody>
+          <a:bodyPr wrap="square" anchor="t" lIns="0" rIns="0" tIns="0" bIns="0">
+            <a:spAutoFit/>
+          </a:bodyPr>
+          <a:lstStyle/>
+          <a:p>
+            <a:pPr algn="r">
+              <a:lnSpc>
+                <a:spcPct val="106000"/>
+              </a:lnSpc>
+              <a:spcBef>
+                <a:spcPts val="0"/>
+              </a:spcBef>
+              <a:spcAft>
+                <a:spcPts val="0"/>
+              </a:spcAft>
+            </a:pPr>
+            <a:r>
+              <a:rPr sz="950" b="0">
+                <a:solidFill>
+                  <a:srgbClr val="8A9099"/>
+                </a:solidFill>
+                <a:latin typeface="Red Hat Text"/>
+              </a:rPr>
+              <a:t>10</a:t>
+            </a:r>
+          </a:p>
+        </p:txBody>
+      </p:sp>
+    </p:spTree>
+  </p:cSld>
+  <p:clrMapOvr>
+    <a:masterClrMapping/>
+  </p:clrMapOvr>
+</p:sld>
+</file>
+
 <file path=ppt/slides/slide2.xml><?xml version="1.0" encoding="utf-8"?>
 <p:sld xmlns:a="http://schemas.openxmlformats.org/drawingml/2006/main" xmlns:p="http://schemas.openxmlformats.org/presentationml/2006/main" xmlns:r="http://schemas.openxmlformats.org/officeDocument/2006/relationships">
   <p:cSld>
@@ -4378,11 +5252,11 @@
         <p:spPr>
           <a:xfrm>
             <a:off x="841248" y="2395728"/>
-            <a:ext cx="5715000" cy="530352"/>
+            <a:ext cx="5138928" cy="786384"/>
           </a:xfrm>
           <a:prstGeom prst="roundRect">
             <a:avLst>
-              <a:gd name="adj" fmla="val 6000"/>
+              <a:gd name="adj" fmla="val 7000"/>
             </a:avLst>
           </a:prstGeom>
           <a:solidFill>
@@ -4417,9 +5291,55 @@
           </a:p>
         </p:txBody>
       </p:sp>
+      <p:sp>
+        <p:nvSpPr>
+          <p:cNvPr id="7" name="Rounded Rectangle 6"/>
+          <p:cNvSpPr/>
+          <p:nvPr/>
+        </p:nvSpPr>
+        <p:spPr>
+          <a:xfrm>
+            <a:off x="987552" y="2532888"/>
+            <a:ext cx="512064" cy="512064"/>
+          </a:xfrm>
+          <a:prstGeom prst="roundRect">
+            <a:avLst>
+              <a:gd name="adj" fmla="val 26000"/>
+            </a:avLst>
+          </a:prstGeom>
+          <a:solidFill>
+            <a:srgbClr val="EE0000"/>
+          </a:solidFill>
+          <a:ln>
+            <a:noFill/>
+          </a:ln>
+          <a:effectLst/>
+        </p:spPr>
+        <p:style>
+          <a:lnRef idx="1">
+            <a:schemeClr val="accent1"/>
+          </a:lnRef>
+          <a:fillRef idx="3">
+            <a:schemeClr val="accent1"/>
+          </a:fillRef>
+          <a:effectRef idx="2">
+            <a:schemeClr val="accent1"/>
+          </a:effectRef>
+          <a:fontRef idx="minor">
+            <a:schemeClr val="lt1"/>
+          </a:fontRef>
+        </p:style>
+        <p:txBody>
+          <a:bodyPr rtlCol="0" anchor="ctr"/>
+          <a:lstStyle/>
+          <a:p>
+            <a:pPr algn="ctr"/>
+          </a:p>
+        </p:txBody>
+      </p:sp>
       <p:pic>
         <p:nvPicPr>
-          <p:cNvPr id="7" name="Picture 6" descr="check_steel.png"/>
+          <p:cNvPr id="8" name="Picture 7" descr="check_white.png"/>
           <p:cNvPicPr>
             <a:picLocks noChangeAspect="1"/>
           </p:cNvPicPr>
@@ -4433,8 +5353,8 @@
         </p:blipFill>
         <p:spPr>
           <a:xfrm>
-            <a:off x="987552" y="2542032"/>
-            <a:ext cx="237744" cy="237744"/>
+            <a:off x="1110447" y="2655783"/>
+            <a:ext cx="266273" cy="266273"/>
           </a:xfrm>
           <a:prstGeom prst="rect">
             <a:avLst/>
@@ -4443,14 +5363,14 @@
       </p:pic>
       <p:sp>
         <p:nvSpPr>
-          <p:cNvPr id="8" name="TextBox 7"/>
+          <p:cNvPr id="9" name="TextBox 8"/>
           <p:cNvSpPr txBox="1"/>
           <p:nvPr/>
         </p:nvSpPr>
         <p:spPr>
           <a:xfrm>
-            <a:off x="1353312" y="2395728"/>
-            <a:ext cx="5029200" cy="530352"/>
+            <a:off x="1627632" y="2395728"/>
+            <a:ext cx="4206240" cy="786384"/>
           </a:xfrm>
           <a:prstGeom prst="rect">
             <a:avLst/>
@@ -4475,7 +5395,7 @@
               </a:spcAft>
             </a:pPr>
             <a:r>
-              <a:rPr sz="1200" b="0">
+              <a:rPr sz="1150" b="0">
                 <a:solidFill>
                   <a:srgbClr val="1A1A1A"/>
                 </a:solidFill>
@@ -4488,18 +5408,18 @@
       </p:sp>
       <p:sp>
         <p:nvSpPr>
-          <p:cNvPr id="9" name="Rounded Rectangle 8"/>
+          <p:cNvPr id="10" name="Rounded Rectangle 9"/>
           <p:cNvSpPr/>
           <p:nvPr/>
         </p:nvSpPr>
         <p:spPr>
           <a:xfrm>
-            <a:off x="841248" y="2999232"/>
-            <a:ext cx="5715000" cy="530352"/>
+            <a:off x="6254496" y="2395728"/>
+            <a:ext cx="5138928" cy="786384"/>
           </a:xfrm>
           <a:prstGeom prst="roundRect">
             <a:avLst>
-              <a:gd name="adj" fmla="val 6000"/>
+              <a:gd name="adj" fmla="val 7000"/>
             </a:avLst>
           </a:prstGeom>
           <a:solidFill>
@@ -4534,9 +5454,55 @@
           </a:p>
         </p:txBody>
       </p:sp>
+      <p:sp>
+        <p:nvSpPr>
+          <p:cNvPr id="11" name="Rounded Rectangle 10"/>
+          <p:cNvSpPr/>
+          <p:nvPr/>
+        </p:nvSpPr>
+        <p:spPr>
+          <a:xfrm>
+            <a:off x="6400800" y="2532888"/>
+            <a:ext cx="512064" cy="512064"/>
+          </a:xfrm>
+          <a:prstGeom prst="roundRect">
+            <a:avLst>
+              <a:gd name="adj" fmla="val 26000"/>
+            </a:avLst>
+          </a:prstGeom>
+          <a:solidFill>
+            <a:srgbClr val="EE0000"/>
+          </a:solidFill>
+          <a:ln>
+            <a:noFill/>
+          </a:ln>
+          <a:effectLst/>
+        </p:spPr>
+        <p:style>
+          <a:lnRef idx="1">
+            <a:schemeClr val="accent1"/>
+          </a:lnRef>
+          <a:fillRef idx="3">
+            <a:schemeClr val="accent1"/>
+          </a:fillRef>
+          <a:effectRef idx="2">
+            <a:schemeClr val="accent1"/>
+          </a:effectRef>
+          <a:fontRef idx="minor">
+            <a:schemeClr val="lt1"/>
+          </a:fontRef>
+        </p:style>
+        <p:txBody>
+          <a:bodyPr rtlCol="0" anchor="ctr"/>
+          <a:lstStyle/>
+          <a:p>
+            <a:pPr algn="ctr"/>
+          </a:p>
+        </p:txBody>
+      </p:sp>
       <p:pic>
         <p:nvPicPr>
-          <p:cNvPr id="10" name="Picture 9" descr="check_steel.png"/>
+          <p:cNvPr id="12" name="Picture 11" descr="check_white.png"/>
           <p:cNvPicPr>
             <a:picLocks noChangeAspect="1"/>
           </p:cNvPicPr>
@@ -4550,8 +5516,8 @@
         </p:blipFill>
         <p:spPr>
           <a:xfrm>
-            <a:off x="987552" y="3145536"/>
-            <a:ext cx="237744" cy="237744"/>
+            <a:off x="6523695" y="2655783"/>
+            <a:ext cx="266273" cy="266273"/>
           </a:xfrm>
           <a:prstGeom prst="rect">
             <a:avLst/>
@@ -4560,14 +5526,14 @@
       </p:pic>
       <p:sp>
         <p:nvSpPr>
-          <p:cNvPr id="11" name="TextBox 10"/>
+          <p:cNvPr id="13" name="TextBox 12"/>
           <p:cNvSpPr txBox="1"/>
           <p:nvPr/>
         </p:nvSpPr>
         <p:spPr>
           <a:xfrm>
-            <a:off x="1353312" y="2999232"/>
-            <a:ext cx="5029200" cy="530352"/>
+            <a:off x="7040880" y="2395728"/>
+            <a:ext cx="4206240" cy="786384"/>
           </a:xfrm>
           <a:prstGeom prst="rect">
             <a:avLst/>
@@ -4592,7 +5558,7 @@
               </a:spcAft>
             </a:pPr>
             <a:r>
-              <a:rPr sz="1200" b="0">
+              <a:rPr sz="1150" b="0">
                 <a:solidFill>
                   <a:srgbClr val="1A1A1A"/>
                 </a:solidFill>
@@ -4605,18 +5571,18 @@
       </p:sp>
       <p:sp>
         <p:nvSpPr>
-          <p:cNvPr id="12" name="Rounded Rectangle 11"/>
+          <p:cNvPr id="14" name="Rounded Rectangle 13"/>
           <p:cNvSpPr/>
           <p:nvPr/>
         </p:nvSpPr>
         <p:spPr>
           <a:xfrm>
-            <a:off x="841248" y="3602736"/>
-            <a:ext cx="5715000" cy="530352"/>
+            <a:off x="841248" y="3328416"/>
+            <a:ext cx="5138928" cy="786384"/>
           </a:xfrm>
           <a:prstGeom prst="roundRect">
             <a:avLst>
-              <a:gd name="adj" fmla="val 6000"/>
+              <a:gd name="adj" fmla="val 7000"/>
             </a:avLst>
           </a:prstGeom>
           <a:solidFill>
@@ -4651,9 +5617,55 @@
           </a:p>
         </p:txBody>
       </p:sp>
+      <p:sp>
+        <p:nvSpPr>
+          <p:cNvPr id="15" name="Rounded Rectangle 14"/>
+          <p:cNvSpPr/>
+          <p:nvPr/>
+        </p:nvSpPr>
+        <p:spPr>
+          <a:xfrm>
+            <a:off x="987552" y="3465576"/>
+            <a:ext cx="512064" cy="512064"/>
+          </a:xfrm>
+          <a:prstGeom prst="roundRect">
+            <a:avLst>
+              <a:gd name="adj" fmla="val 26000"/>
+            </a:avLst>
+          </a:prstGeom>
+          <a:solidFill>
+            <a:srgbClr val="EE0000"/>
+          </a:solidFill>
+          <a:ln>
+            <a:noFill/>
+          </a:ln>
+          <a:effectLst/>
+        </p:spPr>
+        <p:style>
+          <a:lnRef idx="1">
+            <a:schemeClr val="accent1"/>
+          </a:lnRef>
+          <a:fillRef idx="3">
+            <a:schemeClr val="accent1"/>
+          </a:fillRef>
+          <a:effectRef idx="2">
+            <a:schemeClr val="accent1"/>
+          </a:effectRef>
+          <a:fontRef idx="minor">
+            <a:schemeClr val="lt1"/>
+          </a:fontRef>
+        </p:style>
+        <p:txBody>
+          <a:bodyPr rtlCol="0" anchor="ctr"/>
+          <a:lstStyle/>
+          <a:p>
+            <a:pPr algn="ctr"/>
+          </a:p>
+        </p:txBody>
+      </p:sp>
       <p:pic>
         <p:nvPicPr>
-          <p:cNvPr id="13" name="Picture 12" descr="check_steel.png"/>
+          <p:cNvPr id="16" name="Picture 15" descr="check_white.png"/>
           <p:cNvPicPr>
             <a:picLocks noChangeAspect="1"/>
           </p:cNvPicPr>
@@ -4667,8 +5679,8 @@
         </p:blipFill>
         <p:spPr>
           <a:xfrm>
-            <a:off x="987552" y="3749040"/>
-            <a:ext cx="237744" cy="237744"/>
+            <a:off x="1110447" y="3588471"/>
+            <a:ext cx="266273" cy="266273"/>
           </a:xfrm>
           <a:prstGeom prst="rect">
             <a:avLst/>
@@ -4677,14 +5689,14 @@
       </p:pic>
       <p:sp>
         <p:nvSpPr>
-          <p:cNvPr id="14" name="TextBox 13"/>
+          <p:cNvPr id="17" name="TextBox 16"/>
           <p:cNvSpPr txBox="1"/>
           <p:nvPr/>
         </p:nvSpPr>
         <p:spPr>
           <a:xfrm>
-            <a:off x="1353312" y="3602736"/>
-            <a:ext cx="5029200" cy="530352"/>
+            <a:off x="1627632" y="3328416"/>
+            <a:ext cx="4206240" cy="786384"/>
           </a:xfrm>
           <a:prstGeom prst="rect">
             <a:avLst/>
@@ -4709,7 +5721,7 @@
               </a:spcAft>
             </a:pPr>
             <a:r>
-              <a:rPr sz="1200" b="0">
+              <a:rPr sz="1150" b="0">
                 <a:solidFill>
                   <a:srgbClr val="1A1A1A"/>
                 </a:solidFill>
@@ -4722,18 +5734,18 @@
       </p:sp>
       <p:sp>
         <p:nvSpPr>
-          <p:cNvPr id="15" name="Rounded Rectangle 14"/>
+          <p:cNvPr id="18" name="Rounded Rectangle 17"/>
           <p:cNvSpPr/>
           <p:nvPr/>
         </p:nvSpPr>
         <p:spPr>
           <a:xfrm>
-            <a:off x="841248" y="4206240"/>
-            <a:ext cx="5715000" cy="530352"/>
+            <a:off x="6254496" y="3328416"/>
+            <a:ext cx="5138928" cy="786384"/>
           </a:xfrm>
           <a:prstGeom prst="roundRect">
             <a:avLst>
-              <a:gd name="adj" fmla="val 6000"/>
+              <a:gd name="adj" fmla="val 7000"/>
             </a:avLst>
           </a:prstGeom>
           <a:solidFill>
@@ -4768,9 +5780,55 @@
           </a:p>
         </p:txBody>
       </p:sp>
+      <p:sp>
+        <p:nvSpPr>
+          <p:cNvPr id="19" name="Rounded Rectangle 18"/>
+          <p:cNvSpPr/>
+          <p:nvPr/>
+        </p:nvSpPr>
+        <p:spPr>
+          <a:xfrm>
+            <a:off x="6400800" y="3465576"/>
+            <a:ext cx="512064" cy="512064"/>
+          </a:xfrm>
+          <a:prstGeom prst="roundRect">
+            <a:avLst>
+              <a:gd name="adj" fmla="val 26000"/>
+            </a:avLst>
+          </a:prstGeom>
+          <a:solidFill>
+            <a:srgbClr val="EE0000"/>
+          </a:solidFill>
+          <a:ln>
+            <a:noFill/>
+          </a:ln>
+          <a:effectLst/>
+        </p:spPr>
+        <p:style>
+          <a:lnRef idx="1">
+            <a:schemeClr val="accent1"/>
+          </a:lnRef>
+          <a:fillRef idx="3">
+            <a:schemeClr val="accent1"/>
+          </a:fillRef>
+          <a:effectRef idx="2">
+            <a:schemeClr val="accent1"/>
+          </a:effectRef>
+          <a:fontRef idx="minor">
+            <a:schemeClr val="lt1"/>
+          </a:fontRef>
+        </p:style>
+        <p:txBody>
+          <a:bodyPr rtlCol="0" anchor="ctr"/>
+          <a:lstStyle/>
+          <a:p>
+            <a:pPr algn="ctr"/>
+          </a:p>
+        </p:txBody>
+      </p:sp>
       <p:pic>
         <p:nvPicPr>
-          <p:cNvPr id="16" name="Picture 15" descr="check_steel.png"/>
+          <p:cNvPr id="20" name="Picture 19" descr="check_white.png"/>
           <p:cNvPicPr>
             <a:picLocks noChangeAspect="1"/>
           </p:cNvPicPr>
@@ -4784,8 +5842,8 @@
         </p:blipFill>
         <p:spPr>
           <a:xfrm>
-            <a:off x="987552" y="4352544"/>
-            <a:ext cx="237744" cy="237744"/>
+            <a:off x="6523695" y="3588471"/>
+            <a:ext cx="266273" cy="266273"/>
           </a:xfrm>
           <a:prstGeom prst="rect">
             <a:avLst/>
@@ -4794,14 +5852,14 @@
       </p:pic>
       <p:sp>
         <p:nvSpPr>
-          <p:cNvPr id="17" name="TextBox 16"/>
+          <p:cNvPr id="21" name="TextBox 20"/>
           <p:cNvSpPr txBox="1"/>
           <p:nvPr/>
         </p:nvSpPr>
         <p:spPr>
           <a:xfrm>
-            <a:off x="1353312" y="4206240"/>
-            <a:ext cx="5029200" cy="530352"/>
+            <a:off x="7040880" y="3328416"/>
+            <a:ext cx="4206240" cy="786384"/>
           </a:xfrm>
           <a:prstGeom prst="rect">
             <a:avLst/>
@@ -4826,7 +5884,7 @@
               </a:spcAft>
             </a:pPr>
             <a:r>
-              <a:rPr sz="1200" b="0">
+              <a:rPr sz="1150" b="0">
                 <a:solidFill>
                   <a:srgbClr val="1A1A1A"/>
                 </a:solidFill>
@@ -4839,18 +5897,18 @@
       </p:sp>
       <p:sp>
         <p:nvSpPr>
-          <p:cNvPr id="18" name="Rounded Rectangle 17"/>
+          <p:cNvPr id="22" name="Rounded Rectangle 21"/>
           <p:cNvSpPr/>
           <p:nvPr/>
         </p:nvSpPr>
         <p:spPr>
           <a:xfrm>
-            <a:off x="841248" y="4809744"/>
-            <a:ext cx="5715000" cy="530352"/>
+            <a:off x="841248" y="4261104"/>
+            <a:ext cx="5138928" cy="786384"/>
           </a:xfrm>
           <a:prstGeom prst="roundRect">
             <a:avLst>
-              <a:gd name="adj" fmla="val 6000"/>
+              <a:gd name="adj" fmla="val 7000"/>
             </a:avLst>
           </a:prstGeom>
           <a:solidFill>
@@ -4885,9 +5943,55 @@
           </a:p>
         </p:txBody>
       </p:sp>
+      <p:sp>
+        <p:nvSpPr>
+          <p:cNvPr id="23" name="Rounded Rectangle 22"/>
+          <p:cNvSpPr/>
+          <p:nvPr/>
+        </p:nvSpPr>
+        <p:spPr>
+          <a:xfrm>
+            <a:off x="987552" y="4398264"/>
+            <a:ext cx="512064" cy="512064"/>
+          </a:xfrm>
+          <a:prstGeom prst="roundRect">
+            <a:avLst>
+              <a:gd name="adj" fmla="val 26000"/>
+            </a:avLst>
+          </a:prstGeom>
+          <a:solidFill>
+            <a:srgbClr val="EE0000"/>
+          </a:solidFill>
+          <a:ln>
+            <a:noFill/>
+          </a:ln>
+          <a:effectLst/>
+        </p:spPr>
+        <p:style>
+          <a:lnRef idx="1">
+            <a:schemeClr val="accent1"/>
+          </a:lnRef>
+          <a:fillRef idx="3">
+            <a:schemeClr val="accent1"/>
+          </a:fillRef>
+          <a:effectRef idx="2">
+            <a:schemeClr val="accent1"/>
+          </a:effectRef>
+          <a:fontRef idx="minor">
+            <a:schemeClr val="lt1"/>
+          </a:fontRef>
+        </p:style>
+        <p:txBody>
+          <a:bodyPr rtlCol="0" anchor="ctr"/>
+          <a:lstStyle/>
+          <a:p>
+            <a:pPr algn="ctr"/>
+          </a:p>
+        </p:txBody>
+      </p:sp>
       <p:pic>
         <p:nvPicPr>
-          <p:cNvPr id="19" name="Picture 18" descr="check_steel.png"/>
+          <p:cNvPr id="24" name="Picture 23" descr="check_white.png"/>
           <p:cNvPicPr>
             <a:picLocks noChangeAspect="1"/>
           </p:cNvPicPr>
@@ -4901,8 +6005,8 @@
         </p:blipFill>
         <p:spPr>
           <a:xfrm>
-            <a:off x="987552" y="4956048"/>
-            <a:ext cx="237744" cy="237744"/>
+            <a:off x="1110447" y="4521159"/>
+            <a:ext cx="266273" cy="266273"/>
           </a:xfrm>
           <a:prstGeom prst="rect">
             <a:avLst/>
@@ -4911,14 +6015,14 @@
       </p:pic>
       <p:sp>
         <p:nvSpPr>
-          <p:cNvPr id="20" name="TextBox 19"/>
+          <p:cNvPr id="25" name="TextBox 24"/>
           <p:cNvSpPr txBox="1"/>
           <p:nvPr/>
         </p:nvSpPr>
         <p:spPr>
           <a:xfrm>
-            <a:off x="1353312" y="4809744"/>
-            <a:ext cx="5029200" cy="530352"/>
+            <a:off x="1627632" y="4261104"/>
+            <a:ext cx="4206240" cy="786384"/>
           </a:xfrm>
           <a:prstGeom prst="rect">
             <a:avLst/>
@@ -4943,221 +6047,13 @@
               </a:spcAft>
             </a:pPr>
             <a:r>
-              <a:rPr sz="1200" b="0">
+              <a:rPr sz="1150" b="0">
                 <a:solidFill>
                   <a:srgbClr val="1A1A1A"/>
                 </a:solidFill>
                 <a:latin typeface="Red Hat Text"/>
               </a:rPr>
               <a:t>Three controls answer all three questions</a:t>
-            </a:r>
-          </a:p>
-        </p:txBody>
-      </p:sp>
-      <p:sp>
-        <p:nvSpPr>
-          <p:cNvPr id="21" name="Rounded Rectangle 20"/>
-          <p:cNvSpPr/>
-          <p:nvPr/>
-        </p:nvSpPr>
-        <p:spPr>
-          <a:xfrm>
-            <a:off x="6812280" y="2395728"/>
-            <a:ext cx="4538167" cy="2944368"/>
-          </a:xfrm>
-          <a:prstGeom prst="roundRect">
-            <a:avLst>
-              <a:gd name="adj" fmla="val 4000"/>
-            </a:avLst>
-          </a:prstGeom>
-          <a:solidFill>
-            <a:srgbClr val="FFFFFF"/>
-          </a:solidFill>
-          <a:ln w="15240">
-            <a:solidFill>
-              <a:srgbClr val="DDE1E6"/>
-            </a:solidFill>
-          </a:ln>
-          <a:effectLst/>
-        </p:spPr>
-        <p:style>
-          <a:lnRef idx="1">
-            <a:schemeClr val="accent1"/>
-          </a:lnRef>
-          <a:fillRef idx="3">
-            <a:schemeClr val="accent1"/>
-          </a:fillRef>
-          <a:effectRef idx="2">
-            <a:schemeClr val="accent1"/>
-          </a:effectRef>
-          <a:fontRef idx="minor">
-            <a:schemeClr val="lt1"/>
-          </a:fontRef>
-        </p:style>
-        <p:txBody>
-          <a:bodyPr rtlCol="0" anchor="ctr"/>
-          <a:lstStyle/>
-          <a:p>
-            <a:pPr algn="ctr"/>
-          </a:p>
-        </p:txBody>
-      </p:sp>
-      <p:sp>
-        <p:nvSpPr>
-          <p:cNvPr id="22" name="Rounded Rectangle 21"/>
-          <p:cNvSpPr/>
-          <p:nvPr/>
-        </p:nvSpPr>
-        <p:spPr>
-          <a:xfrm>
-            <a:off x="7013448" y="2596896"/>
-            <a:ext cx="1298448" cy="310896"/>
-          </a:xfrm>
-          <a:prstGeom prst="roundRect">
-            <a:avLst>
-              <a:gd name="adj" fmla="val 50000"/>
-            </a:avLst>
-          </a:prstGeom>
-          <a:solidFill>
-            <a:srgbClr val="FCECEC"/>
-          </a:solidFill>
-          <a:ln>
-            <a:noFill/>
-          </a:ln>
-          <a:effectLst/>
-        </p:spPr>
-        <p:style>
-          <a:lnRef idx="1">
-            <a:schemeClr val="accent1"/>
-          </a:lnRef>
-          <a:fillRef idx="3">
-            <a:schemeClr val="accent1"/>
-          </a:fillRef>
-          <a:effectRef idx="2">
-            <a:schemeClr val="accent1"/>
-          </a:effectRef>
-          <a:fontRef idx="minor">
-            <a:schemeClr val="lt1"/>
-          </a:fontRef>
-        </p:style>
-        <p:txBody>
-          <a:bodyPr rtlCol="0" anchor="ctr"/>
-          <a:lstStyle/>
-          <a:p>
-            <a:pPr algn="ctr"/>
-          </a:p>
-        </p:txBody>
-      </p:sp>
-      <p:sp>
-        <p:nvSpPr>
-          <p:cNvPr id="23" name="TextBox 22"/>
-          <p:cNvSpPr txBox="1"/>
-          <p:nvPr/>
-        </p:nvSpPr>
-        <p:spPr>
-          <a:xfrm>
-            <a:off x="7013448" y="2596896"/>
-            <a:ext cx="1298448" cy="310896"/>
-          </a:xfrm>
-          <a:prstGeom prst="rect">
-            <a:avLst/>
-          </a:prstGeom>
-          <a:noFill/>
-        </p:spPr>
-        <p:txBody>
-          <a:bodyPr wrap="none" anchor="ctr" lIns="0" rIns="0" tIns="0" bIns="0">
-            <a:spAutoFit/>
-          </a:bodyPr>
-          <a:lstStyle/>
-          <a:p>
-            <a:pPr algn="ctr">
-              <a:lnSpc>
-                <a:spcPct val="106000"/>
-              </a:lnSpc>
-              <a:spcBef>
-                <a:spcPts val="0"/>
-              </a:spcBef>
-              <a:spcAft>
-                <a:spcPts val="0"/>
-              </a:spcAft>
-            </a:pPr>
-            <a:r>
-              <a:rPr sz="850" b="1">
-                <a:solidFill>
-                  <a:srgbClr val="B80000"/>
-                </a:solidFill>
-                <a:latin typeface="Red Hat Display"/>
-              </a:rPr>
-              <a:t>MEDIA PASS</a:t>
-            </a:r>
-          </a:p>
-        </p:txBody>
-      </p:sp>
-      <p:pic>
-        <p:nvPicPr>
-          <p:cNvPr id="24" name="Picture 23" descr="eye_slate.png"/>
-          <p:cNvPicPr>
-            <a:picLocks noChangeAspect="1"/>
-          </p:cNvPicPr>
-          <p:nvPr/>
-        </p:nvPicPr>
-        <p:blipFill>
-          <a:blip r:embed="rId4"/>
-          <a:stretch>
-            <a:fillRect/>
-          </a:stretch>
-        </p:blipFill>
-        <p:spPr>
-          <a:xfrm>
-            <a:off x="8843619" y="3108960"/>
-            <a:ext cx="475488" cy="475488"/>
-          </a:xfrm>
-          <a:prstGeom prst="rect">
-            <a:avLst/>
-          </a:prstGeom>
-        </p:spPr>
-      </p:pic>
-      <p:sp>
-        <p:nvSpPr>
-          <p:cNvPr id="25" name="TextBox 24"/>
-          <p:cNvSpPr txBox="1"/>
-          <p:nvPr/>
-        </p:nvSpPr>
-        <p:spPr>
-          <a:xfrm>
-            <a:off x="7050024" y="3721608"/>
-            <a:ext cx="4062679" cy="1481328"/>
-          </a:xfrm>
-          <a:prstGeom prst="rect">
-            <a:avLst/>
-          </a:prstGeom>
-          <a:noFill/>
-        </p:spPr>
-        <p:txBody>
-          <a:bodyPr wrap="square" anchor="t" lIns="0" rIns="0" tIns="0" bIns="0">
-            <a:spAutoFit/>
-          </a:bodyPr>
-          <a:lstStyle/>
-          <a:p>
-            <a:pPr algn="l">
-              <a:lnSpc>
-                <a:spcPct val="120000"/>
-              </a:lnSpc>
-              <a:spcBef>
-                <a:spcPts val="0"/>
-              </a:spcBef>
-              <a:spcAft>
-                <a:spcPts val="0"/>
-              </a:spcAft>
-            </a:pPr>
-            <a:r>
-              <a:rPr sz="950" b="0">
-                <a:solidFill>
-                  <a:srgbClr val="8A9099"/>
-                </a:solidFill>
-                <a:latin typeface="Red Hat Text"/>
-              </a:rPr>
-              <a:t>A "PASSED build" box on the left with three red question marks (what's inside? / who built it? / prove it), an arrow to a "TRUSTWORTHY artifact" box on the right.</a:t>
             </a:r>
           </a:p>
         </p:txBody>
@@ -5465,11 +6361,11 @@
         <p:spPr>
           <a:xfrm>
             <a:off x="841248" y="2395728"/>
-            <a:ext cx="5715000" cy="530352"/>
+            <a:ext cx="5138928" cy="786384"/>
           </a:xfrm>
           <a:prstGeom prst="roundRect">
             <a:avLst>
-              <a:gd name="adj" fmla="val 6000"/>
+              <a:gd name="adj" fmla="val 7000"/>
             </a:avLst>
           </a:prstGeom>
           <a:solidFill>
@@ -5504,9 +6400,55 @@
           </a:p>
         </p:txBody>
       </p:sp>
+      <p:sp>
+        <p:nvSpPr>
+          <p:cNvPr id="7" name="Rounded Rectangle 6"/>
+          <p:cNvSpPr/>
+          <p:nvPr/>
+        </p:nvSpPr>
+        <p:spPr>
+          <a:xfrm>
+            <a:off x="987552" y="2532888"/>
+            <a:ext cx="512064" cy="512064"/>
+          </a:xfrm>
+          <a:prstGeom prst="roundRect">
+            <a:avLst>
+              <a:gd name="adj" fmla="val 26000"/>
+            </a:avLst>
+          </a:prstGeom>
+          <a:solidFill>
+            <a:srgbClr val="EE0000"/>
+          </a:solidFill>
+          <a:ln>
+            <a:noFill/>
+          </a:ln>
+          <a:effectLst/>
+        </p:spPr>
+        <p:style>
+          <a:lnRef idx="1">
+            <a:schemeClr val="accent1"/>
+          </a:lnRef>
+          <a:fillRef idx="3">
+            <a:schemeClr val="accent1"/>
+          </a:fillRef>
+          <a:effectRef idx="2">
+            <a:schemeClr val="accent1"/>
+          </a:effectRef>
+          <a:fontRef idx="minor">
+            <a:schemeClr val="lt1"/>
+          </a:fontRef>
+        </p:style>
+        <p:txBody>
+          <a:bodyPr rtlCol="0" anchor="ctr"/>
+          <a:lstStyle/>
+          <a:p>
+            <a:pPr algn="ctr"/>
+          </a:p>
+        </p:txBody>
+      </p:sp>
       <p:pic>
         <p:nvPicPr>
-          <p:cNvPr id="7" name="Picture 6" descr="check_steel.png"/>
+          <p:cNvPr id="8" name="Picture 7" descr="check_white.png"/>
           <p:cNvPicPr>
             <a:picLocks noChangeAspect="1"/>
           </p:cNvPicPr>
@@ -5520,8 +6462,8 @@
         </p:blipFill>
         <p:spPr>
           <a:xfrm>
-            <a:off x="987552" y="2542032"/>
-            <a:ext cx="237744" cy="237744"/>
+            <a:off x="1110447" y="2655783"/>
+            <a:ext cx="266273" cy="266273"/>
           </a:xfrm>
           <a:prstGeom prst="rect">
             <a:avLst/>
@@ -5530,14 +6472,14 @@
       </p:pic>
       <p:sp>
         <p:nvSpPr>
-          <p:cNvPr id="8" name="TextBox 7"/>
+          <p:cNvPr id="9" name="TextBox 8"/>
           <p:cNvSpPr txBox="1"/>
           <p:nvPr/>
         </p:nvSpPr>
         <p:spPr>
           <a:xfrm>
-            <a:off x="1353312" y="2395728"/>
-            <a:ext cx="5029200" cy="530352"/>
+            <a:off x="1627632" y="2395728"/>
+            <a:ext cx="4206240" cy="786384"/>
           </a:xfrm>
           <a:prstGeom prst="rect">
             <a:avLst/>
@@ -5562,7 +6504,7 @@
               </a:spcAft>
             </a:pPr>
             <a:r>
-              <a:rPr sz="1200" b="0">
+              <a:rPr sz="1150" b="0">
                 <a:solidFill>
                   <a:srgbClr val="1A1A1A"/>
                 </a:solidFill>
@@ -5575,18 +6517,18 @@
       </p:sp>
       <p:sp>
         <p:nvSpPr>
-          <p:cNvPr id="9" name="Rounded Rectangle 8"/>
+          <p:cNvPr id="10" name="Rounded Rectangle 9"/>
           <p:cNvSpPr/>
           <p:nvPr/>
         </p:nvSpPr>
         <p:spPr>
           <a:xfrm>
-            <a:off x="841248" y="2999232"/>
-            <a:ext cx="5715000" cy="530352"/>
+            <a:off x="6254496" y="2395728"/>
+            <a:ext cx="5138928" cy="786384"/>
           </a:xfrm>
           <a:prstGeom prst="roundRect">
             <a:avLst>
-              <a:gd name="adj" fmla="val 6000"/>
+              <a:gd name="adj" fmla="val 7000"/>
             </a:avLst>
           </a:prstGeom>
           <a:solidFill>
@@ -5621,9 +6563,55 @@
           </a:p>
         </p:txBody>
       </p:sp>
+      <p:sp>
+        <p:nvSpPr>
+          <p:cNvPr id="11" name="Rounded Rectangle 10"/>
+          <p:cNvSpPr/>
+          <p:nvPr/>
+        </p:nvSpPr>
+        <p:spPr>
+          <a:xfrm>
+            <a:off x="6400800" y="2532888"/>
+            <a:ext cx="512064" cy="512064"/>
+          </a:xfrm>
+          <a:prstGeom prst="roundRect">
+            <a:avLst>
+              <a:gd name="adj" fmla="val 26000"/>
+            </a:avLst>
+          </a:prstGeom>
+          <a:solidFill>
+            <a:srgbClr val="EE0000"/>
+          </a:solidFill>
+          <a:ln>
+            <a:noFill/>
+          </a:ln>
+          <a:effectLst/>
+        </p:spPr>
+        <p:style>
+          <a:lnRef idx="1">
+            <a:schemeClr val="accent1"/>
+          </a:lnRef>
+          <a:fillRef idx="3">
+            <a:schemeClr val="accent1"/>
+          </a:fillRef>
+          <a:effectRef idx="2">
+            <a:schemeClr val="accent1"/>
+          </a:effectRef>
+          <a:fontRef idx="minor">
+            <a:schemeClr val="lt1"/>
+          </a:fontRef>
+        </p:style>
+        <p:txBody>
+          <a:bodyPr rtlCol="0" anchor="ctr"/>
+          <a:lstStyle/>
+          <a:p>
+            <a:pPr algn="ctr"/>
+          </a:p>
+        </p:txBody>
+      </p:sp>
       <p:pic>
         <p:nvPicPr>
-          <p:cNvPr id="10" name="Picture 9" descr="check_steel.png"/>
+          <p:cNvPr id="12" name="Picture 11" descr="check_white.png"/>
           <p:cNvPicPr>
             <a:picLocks noChangeAspect="1"/>
           </p:cNvPicPr>
@@ -5637,8 +6625,8 @@
         </p:blipFill>
         <p:spPr>
           <a:xfrm>
-            <a:off x="987552" y="3145536"/>
-            <a:ext cx="237744" cy="237744"/>
+            <a:off x="6523695" y="2655783"/>
+            <a:ext cx="266273" cy="266273"/>
           </a:xfrm>
           <a:prstGeom prst="rect">
             <a:avLst/>
@@ -5647,14 +6635,14 @@
       </p:pic>
       <p:sp>
         <p:nvSpPr>
-          <p:cNvPr id="11" name="TextBox 10"/>
+          <p:cNvPr id="13" name="TextBox 12"/>
           <p:cNvSpPr txBox="1"/>
           <p:nvPr/>
         </p:nvSpPr>
         <p:spPr>
           <a:xfrm>
-            <a:off x="1353312" y="2999232"/>
-            <a:ext cx="5029200" cy="530352"/>
+            <a:off x="7040880" y="2395728"/>
+            <a:ext cx="4206240" cy="786384"/>
           </a:xfrm>
           <a:prstGeom prst="rect">
             <a:avLst/>
@@ -5679,7 +6667,7 @@
               </a:spcAft>
             </a:pPr>
             <a:r>
-              <a:rPr sz="1200" b="0">
+              <a:rPr sz="1150" b="0">
                 <a:solidFill>
                   <a:srgbClr val="1A1A1A"/>
                 </a:solidFill>
@@ -5692,18 +6680,18 @@
       </p:sp>
       <p:sp>
         <p:nvSpPr>
-          <p:cNvPr id="12" name="Rounded Rectangle 11"/>
+          <p:cNvPr id="14" name="Rounded Rectangle 13"/>
           <p:cNvSpPr/>
           <p:nvPr/>
         </p:nvSpPr>
         <p:spPr>
           <a:xfrm>
-            <a:off x="841248" y="3602736"/>
-            <a:ext cx="5715000" cy="530352"/>
+            <a:off x="841248" y="3328416"/>
+            <a:ext cx="5138928" cy="786384"/>
           </a:xfrm>
           <a:prstGeom prst="roundRect">
             <a:avLst>
-              <a:gd name="adj" fmla="val 6000"/>
+              <a:gd name="adj" fmla="val 7000"/>
             </a:avLst>
           </a:prstGeom>
           <a:solidFill>
@@ -5738,9 +6726,55 @@
           </a:p>
         </p:txBody>
       </p:sp>
+      <p:sp>
+        <p:nvSpPr>
+          <p:cNvPr id="15" name="Rounded Rectangle 14"/>
+          <p:cNvSpPr/>
+          <p:nvPr/>
+        </p:nvSpPr>
+        <p:spPr>
+          <a:xfrm>
+            <a:off x="987552" y="3465576"/>
+            <a:ext cx="512064" cy="512064"/>
+          </a:xfrm>
+          <a:prstGeom prst="roundRect">
+            <a:avLst>
+              <a:gd name="adj" fmla="val 26000"/>
+            </a:avLst>
+          </a:prstGeom>
+          <a:solidFill>
+            <a:srgbClr val="EE0000"/>
+          </a:solidFill>
+          <a:ln>
+            <a:noFill/>
+          </a:ln>
+          <a:effectLst/>
+        </p:spPr>
+        <p:style>
+          <a:lnRef idx="1">
+            <a:schemeClr val="accent1"/>
+          </a:lnRef>
+          <a:fillRef idx="3">
+            <a:schemeClr val="accent1"/>
+          </a:fillRef>
+          <a:effectRef idx="2">
+            <a:schemeClr val="accent1"/>
+          </a:effectRef>
+          <a:fontRef idx="minor">
+            <a:schemeClr val="lt1"/>
+          </a:fontRef>
+        </p:style>
+        <p:txBody>
+          <a:bodyPr rtlCol="0" anchor="ctr"/>
+          <a:lstStyle/>
+          <a:p>
+            <a:pPr algn="ctr"/>
+          </a:p>
+        </p:txBody>
+      </p:sp>
       <p:pic>
         <p:nvPicPr>
-          <p:cNvPr id="13" name="Picture 12" descr="check_steel.png"/>
+          <p:cNvPr id="16" name="Picture 15" descr="check_white.png"/>
           <p:cNvPicPr>
             <a:picLocks noChangeAspect="1"/>
           </p:cNvPicPr>
@@ -5754,8 +6788,8 @@
         </p:blipFill>
         <p:spPr>
           <a:xfrm>
-            <a:off x="987552" y="3749040"/>
-            <a:ext cx="237744" cy="237744"/>
+            <a:off x="1110447" y="3588471"/>
+            <a:ext cx="266273" cy="266273"/>
           </a:xfrm>
           <a:prstGeom prst="rect">
             <a:avLst/>
@@ -5764,14 +6798,14 @@
       </p:pic>
       <p:sp>
         <p:nvSpPr>
-          <p:cNvPr id="14" name="TextBox 13"/>
+          <p:cNvPr id="17" name="TextBox 16"/>
           <p:cNvSpPr txBox="1"/>
           <p:nvPr/>
         </p:nvSpPr>
         <p:spPr>
           <a:xfrm>
-            <a:off x="1353312" y="3602736"/>
-            <a:ext cx="5029200" cy="530352"/>
+            <a:off x="1627632" y="3328416"/>
+            <a:ext cx="4206240" cy="786384"/>
           </a:xfrm>
           <a:prstGeom prst="rect">
             <a:avLst/>
@@ -5796,7 +6830,7 @@
               </a:spcAft>
             </a:pPr>
             <a:r>
-              <a:rPr sz="1200" b="0">
+              <a:rPr sz="1150" b="0">
                 <a:solidFill>
                   <a:srgbClr val="1A1A1A"/>
                 </a:solidFill>
@@ -5809,18 +6843,18 @@
       </p:sp>
       <p:sp>
         <p:nvSpPr>
-          <p:cNvPr id="15" name="Rounded Rectangle 14"/>
+          <p:cNvPr id="18" name="Rounded Rectangle 17"/>
           <p:cNvSpPr/>
           <p:nvPr/>
         </p:nvSpPr>
         <p:spPr>
           <a:xfrm>
-            <a:off x="841248" y="4206240"/>
-            <a:ext cx="5715000" cy="530352"/>
+            <a:off x="6254496" y="3328416"/>
+            <a:ext cx="5138928" cy="786384"/>
           </a:xfrm>
           <a:prstGeom prst="roundRect">
             <a:avLst>
-              <a:gd name="adj" fmla="val 6000"/>
+              <a:gd name="adj" fmla="val 7000"/>
             </a:avLst>
           </a:prstGeom>
           <a:solidFill>
@@ -5855,9 +6889,55 @@
           </a:p>
         </p:txBody>
       </p:sp>
+      <p:sp>
+        <p:nvSpPr>
+          <p:cNvPr id="19" name="Rounded Rectangle 18"/>
+          <p:cNvSpPr/>
+          <p:nvPr/>
+        </p:nvSpPr>
+        <p:spPr>
+          <a:xfrm>
+            <a:off x="6400800" y="3465576"/>
+            <a:ext cx="512064" cy="512064"/>
+          </a:xfrm>
+          <a:prstGeom prst="roundRect">
+            <a:avLst>
+              <a:gd name="adj" fmla="val 26000"/>
+            </a:avLst>
+          </a:prstGeom>
+          <a:solidFill>
+            <a:srgbClr val="EE0000"/>
+          </a:solidFill>
+          <a:ln>
+            <a:noFill/>
+          </a:ln>
+          <a:effectLst/>
+        </p:spPr>
+        <p:style>
+          <a:lnRef idx="1">
+            <a:schemeClr val="accent1"/>
+          </a:lnRef>
+          <a:fillRef idx="3">
+            <a:schemeClr val="accent1"/>
+          </a:fillRef>
+          <a:effectRef idx="2">
+            <a:schemeClr val="accent1"/>
+          </a:effectRef>
+          <a:fontRef idx="minor">
+            <a:schemeClr val="lt1"/>
+          </a:fontRef>
+        </p:style>
+        <p:txBody>
+          <a:bodyPr rtlCol="0" anchor="ctr"/>
+          <a:lstStyle/>
+          <a:p>
+            <a:pPr algn="ctr"/>
+          </a:p>
+        </p:txBody>
+      </p:sp>
       <p:pic>
         <p:nvPicPr>
-          <p:cNvPr id="16" name="Picture 15" descr="check_steel.png"/>
+          <p:cNvPr id="20" name="Picture 19" descr="check_white.png"/>
           <p:cNvPicPr>
             <a:picLocks noChangeAspect="1"/>
           </p:cNvPicPr>
@@ -5871,8 +6951,8 @@
         </p:blipFill>
         <p:spPr>
           <a:xfrm>
-            <a:off x="987552" y="4352544"/>
-            <a:ext cx="237744" cy="237744"/>
+            <a:off x="6523695" y="3588471"/>
+            <a:ext cx="266273" cy="266273"/>
           </a:xfrm>
           <a:prstGeom prst="rect">
             <a:avLst/>
@@ -5881,14 +6961,14 @@
       </p:pic>
       <p:sp>
         <p:nvSpPr>
-          <p:cNvPr id="17" name="TextBox 16"/>
+          <p:cNvPr id="21" name="TextBox 20"/>
           <p:cNvSpPr txBox="1"/>
           <p:nvPr/>
         </p:nvSpPr>
         <p:spPr>
           <a:xfrm>
-            <a:off x="1353312" y="4206240"/>
-            <a:ext cx="5029200" cy="530352"/>
+            <a:off x="7040880" y="3328416"/>
+            <a:ext cx="4206240" cy="786384"/>
           </a:xfrm>
           <a:prstGeom prst="rect">
             <a:avLst/>
@@ -5913,7 +6993,7 @@
               </a:spcAft>
             </a:pPr>
             <a:r>
-              <a:rPr sz="1200" b="0">
+              <a:rPr sz="1150" b="0">
                 <a:solidFill>
                   <a:srgbClr val="1A1A1A"/>
                 </a:solidFill>
@@ -5926,18 +7006,18 @@
       </p:sp>
       <p:sp>
         <p:nvSpPr>
-          <p:cNvPr id="18" name="Rounded Rectangle 17"/>
+          <p:cNvPr id="22" name="Rounded Rectangle 21"/>
           <p:cNvSpPr/>
           <p:nvPr/>
         </p:nvSpPr>
         <p:spPr>
           <a:xfrm>
-            <a:off x="841248" y="4809744"/>
-            <a:ext cx="5715000" cy="530352"/>
+            <a:off x="841248" y="4261104"/>
+            <a:ext cx="5138928" cy="786384"/>
           </a:xfrm>
           <a:prstGeom prst="roundRect">
             <a:avLst>
-              <a:gd name="adj" fmla="val 6000"/>
+              <a:gd name="adj" fmla="val 7000"/>
             </a:avLst>
           </a:prstGeom>
           <a:solidFill>
@@ -5972,9 +7052,55 @@
           </a:p>
         </p:txBody>
       </p:sp>
+      <p:sp>
+        <p:nvSpPr>
+          <p:cNvPr id="23" name="Rounded Rectangle 22"/>
+          <p:cNvSpPr/>
+          <p:nvPr/>
+        </p:nvSpPr>
+        <p:spPr>
+          <a:xfrm>
+            <a:off x="987552" y="4398264"/>
+            <a:ext cx="512064" cy="512064"/>
+          </a:xfrm>
+          <a:prstGeom prst="roundRect">
+            <a:avLst>
+              <a:gd name="adj" fmla="val 26000"/>
+            </a:avLst>
+          </a:prstGeom>
+          <a:solidFill>
+            <a:srgbClr val="EE0000"/>
+          </a:solidFill>
+          <a:ln>
+            <a:noFill/>
+          </a:ln>
+          <a:effectLst/>
+        </p:spPr>
+        <p:style>
+          <a:lnRef idx="1">
+            <a:schemeClr val="accent1"/>
+          </a:lnRef>
+          <a:fillRef idx="3">
+            <a:schemeClr val="accent1"/>
+          </a:fillRef>
+          <a:effectRef idx="2">
+            <a:schemeClr val="accent1"/>
+          </a:effectRef>
+          <a:fontRef idx="minor">
+            <a:schemeClr val="lt1"/>
+          </a:fontRef>
+        </p:style>
+        <p:txBody>
+          <a:bodyPr rtlCol="0" anchor="ctr"/>
+          <a:lstStyle/>
+          <a:p>
+            <a:pPr algn="ctr"/>
+          </a:p>
+        </p:txBody>
+      </p:sp>
       <p:pic>
         <p:nvPicPr>
-          <p:cNvPr id="19" name="Picture 18" descr="check_steel.png"/>
+          <p:cNvPr id="24" name="Picture 23" descr="check_white.png"/>
           <p:cNvPicPr>
             <a:picLocks noChangeAspect="1"/>
           </p:cNvPicPr>
@@ -5988,8 +7114,8 @@
         </p:blipFill>
         <p:spPr>
           <a:xfrm>
-            <a:off x="987552" y="4956048"/>
-            <a:ext cx="237744" cy="237744"/>
+            <a:off x="1110447" y="4521159"/>
+            <a:ext cx="266273" cy="266273"/>
           </a:xfrm>
           <a:prstGeom prst="rect">
             <a:avLst/>
@@ -5998,14 +7124,14 @@
       </p:pic>
       <p:sp>
         <p:nvSpPr>
-          <p:cNvPr id="20" name="TextBox 19"/>
+          <p:cNvPr id="25" name="TextBox 24"/>
           <p:cNvSpPr txBox="1"/>
           <p:nvPr/>
         </p:nvSpPr>
         <p:spPr>
           <a:xfrm>
-            <a:off x="1353312" y="4809744"/>
-            <a:ext cx="5029200" cy="530352"/>
+            <a:off x="1627632" y="4261104"/>
+            <a:ext cx="4206240" cy="786384"/>
           </a:xfrm>
           <a:prstGeom prst="rect">
             <a:avLst/>
@@ -6030,221 +7156,13 @@
               </a:spcAft>
             </a:pPr>
             <a:r>
-              <a:rPr sz="1200" b="0">
+              <a:rPr sz="1150" b="0">
                 <a:solidFill>
                   <a:srgbClr val="1A1A1A"/>
                 </a:solidFill>
                 <a:latin typeface="Red Hat Text"/>
               </a:rPr>
               <a:t>SLSA grades your build process, not your code</a:t>
-            </a:r>
-          </a:p>
-        </p:txBody>
-      </p:sp>
-      <p:sp>
-        <p:nvSpPr>
-          <p:cNvPr id="21" name="Rounded Rectangle 20"/>
-          <p:cNvSpPr/>
-          <p:nvPr/>
-        </p:nvSpPr>
-        <p:spPr>
-          <a:xfrm>
-            <a:off x="6812280" y="2395728"/>
-            <a:ext cx="4538167" cy="2944368"/>
-          </a:xfrm>
-          <a:prstGeom prst="roundRect">
-            <a:avLst>
-              <a:gd name="adj" fmla="val 4000"/>
-            </a:avLst>
-          </a:prstGeom>
-          <a:solidFill>
-            <a:srgbClr val="FFFFFF"/>
-          </a:solidFill>
-          <a:ln w="15240">
-            <a:solidFill>
-              <a:srgbClr val="DDE1E6"/>
-            </a:solidFill>
-          </a:ln>
-          <a:effectLst/>
-        </p:spPr>
-        <p:style>
-          <a:lnRef idx="1">
-            <a:schemeClr val="accent1"/>
-          </a:lnRef>
-          <a:fillRef idx="3">
-            <a:schemeClr val="accent1"/>
-          </a:fillRef>
-          <a:effectRef idx="2">
-            <a:schemeClr val="accent1"/>
-          </a:effectRef>
-          <a:fontRef idx="minor">
-            <a:schemeClr val="lt1"/>
-          </a:fontRef>
-        </p:style>
-        <p:txBody>
-          <a:bodyPr rtlCol="0" anchor="ctr"/>
-          <a:lstStyle/>
-          <a:p>
-            <a:pPr algn="ctr"/>
-          </a:p>
-        </p:txBody>
-      </p:sp>
-      <p:sp>
-        <p:nvSpPr>
-          <p:cNvPr id="22" name="Rounded Rectangle 21"/>
-          <p:cNvSpPr/>
-          <p:nvPr/>
-        </p:nvSpPr>
-        <p:spPr>
-          <a:xfrm>
-            <a:off x="7013448" y="2596896"/>
-            <a:ext cx="1298448" cy="310896"/>
-          </a:xfrm>
-          <a:prstGeom prst="roundRect">
-            <a:avLst>
-              <a:gd name="adj" fmla="val 50000"/>
-            </a:avLst>
-          </a:prstGeom>
-          <a:solidFill>
-            <a:srgbClr val="FCECEC"/>
-          </a:solidFill>
-          <a:ln>
-            <a:noFill/>
-          </a:ln>
-          <a:effectLst/>
-        </p:spPr>
-        <p:style>
-          <a:lnRef idx="1">
-            <a:schemeClr val="accent1"/>
-          </a:lnRef>
-          <a:fillRef idx="3">
-            <a:schemeClr val="accent1"/>
-          </a:fillRef>
-          <a:effectRef idx="2">
-            <a:schemeClr val="accent1"/>
-          </a:effectRef>
-          <a:fontRef idx="minor">
-            <a:schemeClr val="lt1"/>
-          </a:fontRef>
-        </p:style>
-        <p:txBody>
-          <a:bodyPr rtlCol="0" anchor="ctr"/>
-          <a:lstStyle/>
-          <a:p>
-            <a:pPr algn="ctr"/>
-          </a:p>
-        </p:txBody>
-      </p:sp>
-      <p:sp>
-        <p:nvSpPr>
-          <p:cNvPr id="23" name="TextBox 22"/>
-          <p:cNvSpPr txBox="1"/>
-          <p:nvPr/>
-        </p:nvSpPr>
-        <p:spPr>
-          <a:xfrm>
-            <a:off x="7013448" y="2596896"/>
-            <a:ext cx="1298448" cy="310896"/>
-          </a:xfrm>
-          <a:prstGeom prst="rect">
-            <a:avLst/>
-          </a:prstGeom>
-          <a:noFill/>
-        </p:spPr>
-        <p:txBody>
-          <a:bodyPr wrap="none" anchor="ctr" lIns="0" rIns="0" tIns="0" bIns="0">
-            <a:spAutoFit/>
-          </a:bodyPr>
-          <a:lstStyle/>
-          <a:p>
-            <a:pPr algn="ctr">
-              <a:lnSpc>
-                <a:spcPct val="106000"/>
-              </a:lnSpc>
-              <a:spcBef>
-                <a:spcPts val="0"/>
-              </a:spcBef>
-              <a:spcAft>
-                <a:spcPts val="0"/>
-              </a:spcAft>
-            </a:pPr>
-            <a:r>
-              <a:rPr sz="850" b="1">
-                <a:solidFill>
-                  <a:srgbClr val="B80000"/>
-                </a:solidFill>
-                <a:latin typeface="Red Hat Display"/>
-              </a:rPr>
-              <a:t>MEDIA PASS</a:t>
-            </a:r>
-          </a:p>
-        </p:txBody>
-      </p:sp>
-      <p:pic>
-        <p:nvPicPr>
-          <p:cNvPr id="24" name="Picture 23" descr="eye_slate.png"/>
-          <p:cNvPicPr>
-            <a:picLocks noChangeAspect="1"/>
-          </p:cNvPicPr>
-          <p:nvPr/>
-        </p:nvPicPr>
-        <p:blipFill>
-          <a:blip r:embed="rId4"/>
-          <a:stretch>
-            <a:fillRect/>
-          </a:stretch>
-        </p:blipFill>
-        <p:spPr>
-          <a:xfrm>
-            <a:off x="8843619" y="3108960"/>
-            <a:ext cx="475488" cy="475488"/>
-          </a:xfrm>
-          <a:prstGeom prst="rect">
-            <a:avLst/>
-          </a:prstGeom>
-        </p:spPr>
-      </p:pic>
-      <p:sp>
-        <p:nvSpPr>
-          <p:cNvPr id="25" name="TextBox 24"/>
-          <p:cNvSpPr txBox="1"/>
-          <p:nvPr/>
-        </p:nvSpPr>
-        <p:spPr>
-          <a:xfrm>
-            <a:off x="7050024" y="3721608"/>
-            <a:ext cx="4062679" cy="1481328"/>
-          </a:xfrm>
-          <a:prstGeom prst="rect">
-            <a:avLst/>
-          </a:prstGeom>
-          <a:noFill/>
-        </p:spPr>
-        <p:txBody>
-          <a:bodyPr wrap="square" anchor="t" lIns="0" rIns="0" tIns="0" bIns="0">
-            <a:spAutoFit/>
-          </a:bodyPr>
-          <a:lstStyle/>
-          <a:p>
-            <a:pPr algn="l">
-              <a:lnSpc>
-                <a:spcPct val="120000"/>
-              </a:lnSpc>
-              <a:spcBef>
-                <a:spcPts val="0"/>
-              </a:spcBef>
-              <a:spcAft>
-                <a:spcPts val="0"/>
-              </a:spcAft>
-            </a:pPr>
-            <a:r>
-              <a:rPr sz="950" b="0">
-                <a:solidFill>
-                  <a:srgbClr val="8A9099"/>
-                </a:solidFill>
-                <a:latin typeface="Red Hat Text"/>
-              </a:rPr>
-              <a:t>A container image drawn as an iceberg — a thin "your code" sliver above the waterline, a large "dependencies + base OS" mass below.</a:t>
             </a:r>
           </a:p>
         </p:txBody>
@@ -6552,11 +7470,11 @@
         <p:spPr>
           <a:xfrm>
             <a:off x="841248" y="2395728"/>
-            <a:ext cx="5715000" cy="530352"/>
+            <a:ext cx="5138928" cy="786384"/>
           </a:xfrm>
           <a:prstGeom prst="roundRect">
             <a:avLst>
-              <a:gd name="adj" fmla="val 6000"/>
+              <a:gd name="adj" fmla="val 7000"/>
             </a:avLst>
           </a:prstGeom>
           <a:solidFill>
@@ -6591,9 +7509,55 @@
           </a:p>
         </p:txBody>
       </p:sp>
+      <p:sp>
+        <p:nvSpPr>
+          <p:cNvPr id="7" name="Rounded Rectangle 6"/>
+          <p:cNvSpPr/>
+          <p:nvPr/>
+        </p:nvSpPr>
+        <p:spPr>
+          <a:xfrm>
+            <a:off x="987552" y="2532888"/>
+            <a:ext cx="512064" cy="512064"/>
+          </a:xfrm>
+          <a:prstGeom prst="roundRect">
+            <a:avLst>
+              <a:gd name="adj" fmla="val 26000"/>
+            </a:avLst>
+          </a:prstGeom>
+          <a:solidFill>
+            <a:srgbClr val="EE0000"/>
+          </a:solidFill>
+          <a:ln>
+            <a:noFill/>
+          </a:ln>
+          <a:effectLst/>
+        </p:spPr>
+        <p:style>
+          <a:lnRef idx="1">
+            <a:schemeClr val="accent1"/>
+          </a:lnRef>
+          <a:fillRef idx="3">
+            <a:schemeClr val="accent1"/>
+          </a:fillRef>
+          <a:effectRef idx="2">
+            <a:schemeClr val="accent1"/>
+          </a:effectRef>
+          <a:fontRef idx="minor">
+            <a:schemeClr val="lt1"/>
+          </a:fontRef>
+        </p:style>
+        <p:txBody>
+          <a:bodyPr rtlCol="0" anchor="ctr"/>
+          <a:lstStyle/>
+          <a:p>
+            <a:pPr algn="ctr"/>
+          </a:p>
+        </p:txBody>
+      </p:sp>
       <p:pic>
         <p:nvPicPr>
-          <p:cNvPr id="7" name="Picture 6" descr="check_steel.png"/>
+          <p:cNvPr id="8" name="Picture 7" descr="check_white.png"/>
           <p:cNvPicPr>
             <a:picLocks noChangeAspect="1"/>
           </p:cNvPicPr>
@@ -6607,8 +7571,8 @@
         </p:blipFill>
         <p:spPr>
           <a:xfrm>
-            <a:off x="987552" y="2542032"/>
-            <a:ext cx="237744" cy="237744"/>
+            <a:off x="1110447" y="2655783"/>
+            <a:ext cx="266273" cy="266273"/>
           </a:xfrm>
           <a:prstGeom prst="rect">
             <a:avLst/>
@@ -6617,14 +7581,14 @@
       </p:pic>
       <p:sp>
         <p:nvSpPr>
-          <p:cNvPr id="8" name="TextBox 7"/>
+          <p:cNvPr id="9" name="TextBox 8"/>
           <p:cNvSpPr txBox="1"/>
           <p:nvPr/>
         </p:nvSpPr>
         <p:spPr>
           <a:xfrm>
-            <a:off x="1353312" y="2395728"/>
-            <a:ext cx="5029200" cy="530352"/>
+            <a:off x="1627632" y="2395728"/>
+            <a:ext cx="4206240" cy="786384"/>
           </a:xfrm>
           <a:prstGeom prst="rect">
             <a:avLst/>
@@ -6649,7 +7613,7 @@
               </a:spcAft>
             </a:pPr>
             <a:r>
-              <a:rPr sz="1200" b="0">
+              <a:rPr sz="1150" b="0">
                 <a:solidFill>
                   <a:srgbClr val="1A1A1A"/>
                 </a:solidFill>
@@ -6662,18 +7626,18 @@
       </p:sp>
       <p:sp>
         <p:nvSpPr>
-          <p:cNvPr id="9" name="Rounded Rectangle 8"/>
+          <p:cNvPr id="10" name="Rounded Rectangle 9"/>
           <p:cNvSpPr/>
           <p:nvPr/>
         </p:nvSpPr>
         <p:spPr>
           <a:xfrm>
-            <a:off x="841248" y="2999232"/>
-            <a:ext cx="5715000" cy="530352"/>
+            <a:off x="6254496" y="2395728"/>
+            <a:ext cx="5138928" cy="786384"/>
           </a:xfrm>
           <a:prstGeom prst="roundRect">
             <a:avLst>
-              <a:gd name="adj" fmla="val 6000"/>
+              <a:gd name="adj" fmla="val 7000"/>
             </a:avLst>
           </a:prstGeom>
           <a:solidFill>
@@ -6708,9 +7672,55 @@
           </a:p>
         </p:txBody>
       </p:sp>
+      <p:sp>
+        <p:nvSpPr>
+          <p:cNvPr id="11" name="Rounded Rectangle 10"/>
+          <p:cNvSpPr/>
+          <p:nvPr/>
+        </p:nvSpPr>
+        <p:spPr>
+          <a:xfrm>
+            <a:off x="6400800" y="2532888"/>
+            <a:ext cx="512064" cy="512064"/>
+          </a:xfrm>
+          <a:prstGeom prst="roundRect">
+            <a:avLst>
+              <a:gd name="adj" fmla="val 26000"/>
+            </a:avLst>
+          </a:prstGeom>
+          <a:solidFill>
+            <a:srgbClr val="EE0000"/>
+          </a:solidFill>
+          <a:ln>
+            <a:noFill/>
+          </a:ln>
+          <a:effectLst/>
+        </p:spPr>
+        <p:style>
+          <a:lnRef idx="1">
+            <a:schemeClr val="accent1"/>
+          </a:lnRef>
+          <a:fillRef idx="3">
+            <a:schemeClr val="accent1"/>
+          </a:fillRef>
+          <a:effectRef idx="2">
+            <a:schemeClr val="accent1"/>
+          </a:effectRef>
+          <a:fontRef idx="minor">
+            <a:schemeClr val="lt1"/>
+          </a:fontRef>
+        </p:style>
+        <p:txBody>
+          <a:bodyPr rtlCol="0" anchor="ctr"/>
+          <a:lstStyle/>
+          <a:p>
+            <a:pPr algn="ctr"/>
+          </a:p>
+        </p:txBody>
+      </p:sp>
       <p:pic>
         <p:nvPicPr>
-          <p:cNvPr id="10" name="Picture 9" descr="check_steel.png"/>
+          <p:cNvPr id="12" name="Picture 11" descr="check_white.png"/>
           <p:cNvPicPr>
             <a:picLocks noChangeAspect="1"/>
           </p:cNvPicPr>
@@ -6724,8 +7734,8 @@
         </p:blipFill>
         <p:spPr>
           <a:xfrm>
-            <a:off x="987552" y="3145536"/>
-            <a:ext cx="237744" cy="237744"/>
+            <a:off x="6523695" y="2655783"/>
+            <a:ext cx="266273" cy="266273"/>
           </a:xfrm>
           <a:prstGeom prst="rect">
             <a:avLst/>
@@ -6734,14 +7744,14 @@
       </p:pic>
       <p:sp>
         <p:nvSpPr>
-          <p:cNvPr id="11" name="TextBox 10"/>
+          <p:cNvPr id="13" name="TextBox 12"/>
           <p:cNvSpPr txBox="1"/>
           <p:nvPr/>
         </p:nvSpPr>
         <p:spPr>
           <a:xfrm>
-            <a:off x="1353312" y="2999232"/>
-            <a:ext cx="5029200" cy="530352"/>
+            <a:off x="7040880" y="2395728"/>
+            <a:ext cx="4206240" cy="786384"/>
           </a:xfrm>
           <a:prstGeom prst="rect">
             <a:avLst/>
@@ -6766,7 +7776,7 @@
               </a:spcAft>
             </a:pPr>
             <a:r>
-              <a:rPr sz="1200" b="0">
+              <a:rPr sz="1150" b="0">
                 <a:solidFill>
                   <a:srgbClr val="1A1A1A"/>
                 </a:solidFill>
@@ -6779,18 +7789,18 @@
       </p:sp>
       <p:sp>
         <p:nvSpPr>
-          <p:cNvPr id="12" name="Rounded Rectangle 11"/>
+          <p:cNvPr id="14" name="Rounded Rectangle 13"/>
           <p:cNvSpPr/>
           <p:nvPr/>
         </p:nvSpPr>
         <p:spPr>
           <a:xfrm>
-            <a:off x="841248" y="3602736"/>
-            <a:ext cx="5715000" cy="530352"/>
+            <a:off x="841248" y="3328416"/>
+            <a:ext cx="5138928" cy="786384"/>
           </a:xfrm>
           <a:prstGeom prst="roundRect">
             <a:avLst>
-              <a:gd name="adj" fmla="val 6000"/>
+              <a:gd name="adj" fmla="val 7000"/>
             </a:avLst>
           </a:prstGeom>
           <a:solidFill>
@@ -6825,9 +7835,55 @@
           </a:p>
         </p:txBody>
       </p:sp>
+      <p:sp>
+        <p:nvSpPr>
+          <p:cNvPr id="15" name="Rounded Rectangle 14"/>
+          <p:cNvSpPr/>
+          <p:nvPr/>
+        </p:nvSpPr>
+        <p:spPr>
+          <a:xfrm>
+            <a:off x="987552" y="3465576"/>
+            <a:ext cx="512064" cy="512064"/>
+          </a:xfrm>
+          <a:prstGeom prst="roundRect">
+            <a:avLst>
+              <a:gd name="adj" fmla="val 26000"/>
+            </a:avLst>
+          </a:prstGeom>
+          <a:solidFill>
+            <a:srgbClr val="EE0000"/>
+          </a:solidFill>
+          <a:ln>
+            <a:noFill/>
+          </a:ln>
+          <a:effectLst/>
+        </p:spPr>
+        <p:style>
+          <a:lnRef idx="1">
+            <a:schemeClr val="accent1"/>
+          </a:lnRef>
+          <a:fillRef idx="3">
+            <a:schemeClr val="accent1"/>
+          </a:fillRef>
+          <a:effectRef idx="2">
+            <a:schemeClr val="accent1"/>
+          </a:effectRef>
+          <a:fontRef idx="minor">
+            <a:schemeClr val="lt1"/>
+          </a:fontRef>
+        </p:style>
+        <p:txBody>
+          <a:bodyPr rtlCol="0" anchor="ctr"/>
+          <a:lstStyle/>
+          <a:p>
+            <a:pPr algn="ctr"/>
+          </a:p>
+        </p:txBody>
+      </p:sp>
       <p:pic>
         <p:nvPicPr>
-          <p:cNvPr id="13" name="Picture 12" descr="check_steel.png"/>
+          <p:cNvPr id="16" name="Picture 15" descr="check_white.png"/>
           <p:cNvPicPr>
             <a:picLocks noChangeAspect="1"/>
           </p:cNvPicPr>
@@ -6841,8 +7897,8 @@
         </p:blipFill>
         <p:spPr>
           <a:xfrm>
-            <a:off x="987552" y="3749040"/>
-            <a:ext cx="237744" cy="237744"/>
+            <a:off x="1110447" y="3588471"/>
+            <a:ext cx="266273" cy="266273"/>
           </a:xfrm>
           <a:prstGeom prst="rect">
             <a:avLst/>
@@ -6851,14 +7907,14 @@
       </p:pic>
       <p:sp>
         <p:nvSpPr>
-          <p:cNvPr id="14" name="TextBox 13"/>
+          <p:cNvPr id="17" name="TextBox 16"/>
           <p:cNvSpPr txBox="1"/>
           <p:nvPr/>
         </p:nvSpPr>
         <p:spPr>
           <a:xfrm>
-            <a:off x="1353312" y="3602736"/>
-            <a:ext cx="5029200" cy="530352"/>
+            <a:off x="1627632" y="3328416"/>
+            <a:ext cx="4206240" cy="786384"/>
           </a:xfrm>
           <a:prstGeom prst="rect">
             <a:avLst/>
@@ -6883,7 +7939,7 @@
               </a:spcAft>
             </a:pPr>
             <a:r>
-              <a:rPr sz="1200" b="0">
+              <a:rPr sz="1150" b="0">
                 <a:solidFill>
                   <a:srgbClr val="1A1A1A"/>
                 </a:solidFill>
@@ -6896,18 +7952,18 @@
       </p:sp>
       <p:sp>
         <p:nvSpPr>
-          <p:cNvPr id="15" name="Rounded Rectangle 14"/>
+          <p:cNvPr id="18" name="Rounded Rectangle 17"/>
           <p:cNvSpPr/>
           <p:nvPr/>
         </p:nvSpPr>
         <p:spPr>
           <a:xfrm>
-            <a:off x="841248" y="4206240"/>
-            <a:ext cx="5715000" cy="530352"/>
+            <a:off x="6254496" y="3328416"/>
+            <a:ext cx="5138928" cy="786384"/>
           </a:xfrm>
           <a:prstGeom prst="roundRect">
             <a:avLst>
-              <a:gd name="adj" fmla="val 6000"/>
+              <a:gd name="adj" fmla="val 7000"/>
             </a:avLst>
           </a:prstGeom>
           <a:solidFill>
@@ -6942,9 +7998,55 @@
           </a:p>
         </p:txBody>
       </p:sp>
+      <p:sp>
+        <p:nvSpPr>
+          <p:cNvPr id="19" name="Rounded Rectangle 18"/>
+          <p:cNvSpPr/>
+          <p:nvPr/>
+        </p:nvSpPr>
+        <p:spPr>
+          <a:xfrm>
+            <a:off x="6400800" y="3465576"/>
+            <a:ext cx="512064" cy="512064"/>
+          </a:xfrm>
+          <a:prstGeom prst="roundRect">
+            <a:avLst>
+              <a:gd name="adj" fmla="val 26000"/>
+            </a:avLst>
+          </a:prstGeom>
+          <a:solidFill>
+            <a:srgbClr val="EE0000"/>
+          </a:solidFill>
+          <a:ln>
+            <a:noFill/>
+          </a:ln>
+          <a:effectLst/>
+        </p:spPr>
+        <p:style>
+          <a:lnRef idx="1">
+            <a:schemeClr val="accent1"/>
+          </a:lnRef>
+          <a:fillRef idx="3">
+            <a:schemeClr val="accent1"/>
+          </a:fillRef>
+          <a:effectRef idx="2">
+            <a:schemeClr val="accent1"/>
+          </a:effectRef>
+          <a:fontRef idx="minor">
+            <a:schemeClr val="lt1"/>
+          </a:fontRef>
+        </p:style>
+        <p:txBody>
+          <a:bodyPr rtlCol="0" anchor="ctr"/>
+          <a:lstStyle/>
+          <a:p>
+            <a:pPr algn="ctr"/>
+          </a:p>
+        </p:txBody>
+      </p:sp>
       <p:pic>
         <p:nvPicPr>
-          <p:cNvPr id="16" name="Picture 15" descr="check_steel.png"/>
+          <p:cNvPr id="20" name="Picture 19" descr="check_white.png"/>
           <p:cNvPicPr>
             <a:picLocks noChangeAspect="1"/>
           </p:cNvPicPr>
@@ -6958,8 +8060,8 @@
         </p:blipFill>
         <p:spPr>
           <a:xfrm>
-            <a:off x="987552" y="4352544"/>
-            <a:ext cx="237744" cy="237744"/>
+            <a:off x="6523695" y="3588471"/>
+            <a:ext cx="266273" cy="266273"/>
           </a:xfrm>
           <a:prstGeom prst="rect">
             <a:avLst/>
@@ -6968,14 +8070,14 @@
       </p:pic>
       <p:sp>
         <p:nvSpPr>
-          <p:cNvPr id="17" name="TextBox 16"/>
+          <p:cNvPr id="21" name="TextBox 20"/>
           <p:cNvSpPr txBox="1"/>
           <p:nvPr/>
         </p:nvSpPr>
         <p:spPr>
           <a:xfrm>
-            <a:off x="1353312" y="4206240"/>
-            <a:ext cx="5029200" cy="530352"/>
+            <a:off x="7040880" y="3328416"/>
+            <a:ext cx="4206240" cy="786384"/>
           </a:xfrm>
           <a:prstGeom prst="rect">
             <a:avLst/>
@@ -7000,7 +8102,7 @@
               </a:spcAft>
             </a:pPr>
             <a:r>
-              <a:rPr sz="1200" b="0">
+              <a:rPr sz="1150" b="0">
                 <a:solidFill>
                   <a:srgbClr val="1A1A1A"/>
                 </a:solidFill>
@@ -7013,18 +8115,18 @@
       </p:sp>
       <p:sp>
         <p:nvSpPr>
-          <p:cNvPr id="18" name="Rounded Rectangle 17"/>
+          <p:cNvPr id="22" name="Rounded Rectangle 21"/>
           <p:cNvSpPr/>
           <p:nvPr/>
         </p:nvSpPr>
         <p:spPr>
           <a:xfrm>
-            <a:off x="841248" y="4809744"/>
-            <a:ext cx="5715000" cy="530352"/>
+            <a:off x="841248" y="4261104"/>
+            <a:ext cx="5138928" cy="786384"/>
           </a:xfrm>
           <a:prstGeom prst="roundRect">
             <a:avLst>
-              <a:gd name="adj" fmla="val 6000"/>
+              <a:gd name="adj" fmla="val 7000"/>
             </a:avLst>
           </a:prstGeom>
           <a:solidFill>
@@ -7059,9 +8161,55 @@
           </a:p>
         </p:txBody>
       </p:sp>
+      <p:sp>
+        <p:nvSpPr>
+          <p:cNvPr id="23" name="Rounded Rectangle 22"/>
+          <p:cNvSpPr/>
+          <p:nvPr/>
+        </p:nvSpPr>
+        <p:spPr>
+          <a:xfrm>
+            <a:off x="987552" y="4398264"/>
+            <a:ext cx="512064" cy="512064"/>
+          </a:xfrm>
+          <a:prstGeom prst="roundRect">
+            <a:avLst>
+              <a:gd name="adj" fmla="val 26000"/>
+            </a:avLst>
+          </a:prstGeom>
+          <a:solidFill>
+            <a:srgbClr val="EE0000"/>
+          </a:solidFill>
+          <a:ln>
+            <a:noFill/>
+          </a:ln>
+          <a:effectLst/>
+        </p:spPr>
+        <p:style>
+          <a:lnRef idx="1">
+            <a:schemeClr val="accent1"/>
+          </a:lnRef>
+          <a:fillRef idx="3">
+            <a:schemeClr val="accent1"/>
+          </a:fillRef>
+          <a:effectRef idx="2">
+            <a:schemeClr val="accent1"/>
+          </a:effectRef>
+          <a:fontRef idx="minor">
+            <a:schemeClr val="lt1"/>
+          </a:fontRef>
+        </p:style>
+        <p:txBody>
+          <a:bodyPr rtlCol="0" anchor="ctr"/>
+          <a:lstStyle/>
+          <a:p>
+            <a:pPr algn="ctr"/>
+          </a:p>
+        </p:txBody>
+      </p:sp>
       <p:pic>
         <p:nvPicPr>
-          <p:cNvPr id="19" name="Picture 18" descr="check_steel.png"/>
+          <p:cNvPr id="24" name="Picture 23" descr="check_white.png"/>
           <p:cNvPicPr>
             <a:picLocks noChangeAspect="1"/>
           </p:cNvPicPr>
@@ -7075,8 +8223,8 @@
         </p:blipFill>
         <p:spPr>
           <a:xfrm>
-            <a:off x="987552" y="4956048"/>
-            <a:ext cx="237744" cy="237744"/>
+            <a:off x="1110447" y="4521159"/>
+            <a:ext cx="266273" cy="266273"/>
           </a:xfrm>
           <a:prstGeom prst="rect">
             <a:avLst/>
@@ -7085,14 +8233,14 @@
       </p:pic>
       <p:sp>
         <p:nvSpPr>
-          <p:cNvPr id="20" name="TextBox 19"/>
+          <p:cNvPr id="25" name="TextBox 24"/>
           <p:cNvSpPr txBox="1"/>
           <p:nvPr/>
         </p:nvSpPr>
         <p:spPr>
           <a:xfrm>
-            <a:off x="1353312" y="4809744"/>
-            <a:ext cx="5029200" cy="530352"/>
+            <a:off x="1627632" y="4261104"/>
+            <a:ext cx="4206240" cy="786384"/>
           </a:xfrm>
           <a:prstGeom prst="rect">
             <a:avLst/>
@@ -7117,221 +8265,13 @@
               </a:spcAft>
             </a:pPr>
             <a:r>
-              <a:rPr sz="1200" b="0">
+              <a:rPr sz="1150" b="0">
                 <a:solidFill>
                   <a:srgbClr val="1A1A1A"/>
                 </a:solidFill>
                 <a:latin typeface="Red Hat Text"/>
               </a:rPr>
               <a:t>You need all three; they reinforce each other</a:t>
-            </a:r>
-          </a:p>
-        </p:txBody>
-      </p:sp>
-      <p:sp>
-        <p:nvSpPr>
-          <p:cNvPr id="21" name="Rounded Rectangle 20"/>
-          <p:cNvSpPr/>
-          <p:nvPr/>
-        </p:nvSpPr>
-        <p:spPr>
-          <a:xfrm>
-            <a:off x="6812280" y="2395728"/>
-            <a:ext cx="4538167" cy="2944368"/>
-          </a:xfrm>
-          <a:prstGeom prst="roundRect">
-            <a:avLst>
-              <a:gd name="adj" fmla="val 4000"/>
-            </a:avLst>
-          </a:prstGeom>
-          <a:solidFill>
-            <a:srgbClr val="FFFFFF"/>
-          </a:solidFill>
-          <a:ln w="15240">
-            <a:solidFill>
-              <a:srgbClr val="DDE1E6"/>
-            </a:solidFill>
-          </a:ln>
-          <a:effectLst/>
-        </p:spPr>
-        <p:style>
-          <a:lnRef idx="1">
-            <a:schemeClr val="accent1"/>
-          </a:lnRef>
-          <a:fillRef idx="3">
-            <a:schemeClr val="accent1"/>
-          </a:fillRef>
-          <a:effectRef idx="2">
-            <a:schemeClr val="accent1"/>
-          </a:effectRef>
-          <a:fontRef idx="minor">
-            <a:schemeClr val="lt1"/>
-          </a:fontRef>
-        </p:style>
-        <p:txBody>
-          <a:bodyPr rtlCol="0" anchor="ctr"/>
-          <a:lstStyle/>
-          <a:p>
-            <a:pPr algn="ctr"/>
-          </a:p>
-        </p:txBody>
-      </p:sp>
-      <p:sp>
-        <p:nvSpPr>
-          <p:cNvPr id="22" name="Rounded Rectangle 21"/>
-          <p:cNvSpPr/>
-          <p:nvPr/>
-        </p:nvSpPr>
-        <p:spPr>
-          <a:xfrm>
-            <a:off x="7013448" y="2596896"/>
-            <a:ext cx="1298448" cy="310896"/>
-          </a:xfrm>
-          <a:prstGeom prst="roundRect">
-            <a:avLst>
-              <a:gd name="adj" fmla="val 50000"/>
-            </a:avLst>
-          </a:prstGeom>
-          <a:solidFill>
-            <a:srgbClr val="FCECEC"/>
-          </a:solidFill>
-          <a:ln>
-            <a:noFill/>
-          </a:ln>
-          <a:effectLst/>
-        </p:spPr>
-        <p:style>
-          <a:lnRef idx="1">
-            <a:schemeClr val="accent1"/>
-          </a:lnRef>
-          <a:fillRef idx="3">
-            <a:schemeClr val="accent1"/>
-          </a:fillRef>
-          <a:effectRef idx="2">
-            <a:schemeClr val="accent1"/>
-          </a:effectRef>
-          <a:fontRef idx="minor">
-            <a:schemeClr val="lt1"/>
-          </a:fontRef>
-        </p:style>
-        <p:txBody>
-          <a:bodyPr rtlCol="0" anchor="ctr"/>
-          <a:lstStyle/>
-          <a:p>
-            <a:pPr algn="ctr"/>
-          </a:p>
-        </p:txBody>
-      </p:sp>
-      <p:sp>
-        <p:nvSpPr>
-          <p:cNvPr id="23" name="TextBox 22"/>
-          <p:cNvSpPr txBox="1"/>
-          <p:nvPr/>
-        </p:nvSpPr>
-        <p:spPr>
-          <a:xfrm>
-            <a:off x="7013448" y="2596896"/>
-            <a:ext cx="1298448" cy="310896"/>
-          </a:xfrm>
-          <a:prstGeom prst="rect">
-            <a:avLst/>
-          </a:prstGeom>
-          <a:noFill/>
-        </p:spPr>
-        <p:txBody>
-          <a:bodyPr wrap="none" anchor="ctr" lIns="0" rIns="0" tIns="0" bIns="0">
-            <a:spAutoFit/>
-          </a:bodyPr>
-          <a:lstStyle/>
-          <a:p>
-            <a:pPr algn="ctr">
-              <a:lnSpc>
-                <a:spcPct val="106000"/>
-              </a:lnSpc>
-              <a:spcBef>
-                <a:spcPts val="0"/>
-              </a:spcBef>
-              <a:spcAft>
-                <a:spcPts val="0"/>
-              </a:spcAft>
-            </a:pPr>
-            <a:r>
-              <a:rPr sz="850" b="1">
-                <a:solidFill>
-                  <a:srgbClr val="B80000"/>
-                </a:solidFill>
-                <a:latin typeface="Red Hat Display"/>
-              </a:rPr>
-              <a:t>MEDIA PASS</a:t>
-            </a:r>
-          </a:p>
-        </p:txBody>
-      </p:sp>
-      <p:pic>
-        <p:nvPicPr>
-          <p:cNvPr id="24" name="Picture 23" descr="eye_slate.png"/>
-          <p:cNvPicPr>
-            <a:picLocks noChangeAspect="1"/>
-          </p:cNvPicPr>
-          <p:nvPr/>
-        </p:nvPicPr>
-        <p:blipFill>
-          <a:blip r:embed="rId4"/>
-          <a:stretch>
-            <a:fillRect/>
-          </a:stretch>
-        </p:blipFill>
-        <p:spPr>
-          <a:xfrm>
-            <a:off x="8843619" y="3108960"/>
-            <a:ext cx="475488" cy="475488"/>
-          </a:xfrm>
-          <a:prstGeom prst="rect">
-            <a:avLst/>
-          </a:prstGeom>
-        </p:spPr>
-      </p:pic>
-      <p:sp>
-        <p:nvSpPr>
-          <p:cNvPr id="25" name="TextBox 24"/>
-          <p:cNvSpPr txBox="1"/>
-          <p:nvPr/>
-        </p:nvSpPr>
-        <p:spPr>
-          <a:xfrm>
-            <a:off x="7050024" y="3721608"/>
-            <a:ext cx="4062679" cy="1481328"/>
-          </a:xfrm>
-          <a:prstGeom prst="rect">
-            <a:avLst/>
-          </a:prstGeom>
-          <a:noFill/>
-        </p:spPr>
-        <p:txBody>
-          <a:bodyPr wrap="square" anchor="t" lIns="0" rIns="0" tIns="0" bIns="0">
-            <a:spAutoFit/>
-          </a:bodyPr>
-          <a:lstStyle/>
-          <a:p>
-            <a:pPr algn="l">
-              <a:lnSpc>
-                <a:spcPct val="120000"/>
-              </a:lnSpc>
-              <a:spcBef>
-                <a:spcPts val="0"/>
-              </a:spcBef>
-              <a:spcAft>
-                <a:spcPts val="0"/>
-              </a:spcAft>
-            </a:pPr>
-            <a:r>
-              <a:rPr sz="950" b="0">
-                <a:solidFill>
-                  <a:srgbClr val="8A9099"/>
-                </a:solidFill>
-                <a:latin typeface="Red Hat Text"/>
-              </a:rPr>
-              <a:t>Reuse concept diagram trusted-supply-chain-...-01 (the trust triangle / pipeline) — signature / attestation / SBOM as three labelled artifacts beside the image.</a:t>
             </a:r>
           </a:p>
         </p:txBody>
@@ -7639,11 +8579,11 @@
         <p:spPr>
           <a:xfrm>
             <a:off x="841248" y="2395728"/>
-            <a:ext cx="5715000" cy="530352"/>
+            <a:ext cx="5138928" cy="786384"/>
           </a:xfrm>
           <a:prstGeom prst="roundRect">
             <a:avLst>
-              <a:gd name="adj" fmla="val 6000"/>
+              <a:gd name="adj" fmla="val 7000"/>
             </a:avLst>
           </a:prstGeom>
           <a:solidFill>
@@ -7678,9 +8618,55 @@
           </a:p>
         </p:txBody>
       </p:sp>
+      <p:sp>
+        <p:nvSpPr>
+          <p:cNvPr id="7" name="Rounded Rectangle 6"/>
+          <p:cNvSpPr/>
+          <p:nvPr/>
+        </p:nvSpPr>
+        <p:spPr>
+          <a:xfrm>
+            <a:off x="987552" y="2532888"/>
+            <a:ext cx="512064" cy="512064"/>
+          </a:xfrm>
+          <a:prstGeom prst="roundRect">
+            <a:avLst>
+              <a:gd name="adj" fmla="val 26000"/>
+            </a:avLst>
+          </a:prstGeom>
+          <a:solidFill>
+            <a:srgbClr val="EE0000"/>
+          </a:solidFill>
+          <a:ln>
+            <a:noFill/>
+          </a:ln>
+          <a:effectLst/>
+        </p:spPr>
+        <p:style>
+          <a:lnRef idx="1">
+            <a:schemeClr val="accent1"/>
+          </a:lnRef>
+          <a:fillRef idx="3">
+            <a:schemeClr val="accent1"/>
+          </a:fillRef>
+          <a:effectRef idx="2">
+            <a:schemeClr val="accent1"/>
+          </a:effectRef>
+          <a:fontRef idx="minor">
+            <a:schemeClr val="lt1"/>
+          </a:fontRef>
+        </p:style>
+        <p:txBody>
+          <a:bodyPr rtlCol="0" anchor="ctr"/>
+          <a:lstStyle/>
+          <a:p>
+            <a:pPr algn="ctr"/>
+          </a:p>
+        </p:txBody>
+      </p:sp>
       <p:pic>
         <p:nvPicPr>
-          <p:cNvPr id="7" name="Picture 6" descr="check_steel.png"/>
+          <p:cNvPr id="8" name="Picture 7" descr="check_white.png"/>
           <p:cNvPicPr>
             <a:picLocks noChangeAspect="1"/>
           </p:cNvPicPr>
@@ -7694,8 +8680,8 @@
         </p:blipFill>
         <p:spPr>
           <a:xfrm>
-            <a:off x="987552" y="2542032"/>
-            <a:ext cx="237744" cy="237744"/>
+            <a:off x="1110447" y="2655783"/>
+            <a:ext cx="266273" cy="266273"/>
           </a:xfrm>
           <a:prstGeom prst="rect">
             <a:avLst/>
@@ -7704,14 +8690,14 @@
       </p:pic>
       <p:sp>
         <p:nvSpPr>
-          <p:cNvPr id="8" name="TextBox 7"/>
+          <p:cNvPr id="9" name="TextBox 8"/>
           <p:cNvSpPr txBox="1"/>
           <p:nvPr/>
         </p:nvSpPr>
         <p:spPr>
           <a:xfrm>
-            <a:off x="1353312" y="2395728"/>
-            <a:ext cx="5029200" cy="530352"/>
+            <a:off x="1627632" y="2395728"/>
+            <a:ext cx="4206240" cy="786384"/>
           </a:xfrm>
           <a:prstGeom prst="rect">
             <a:avLst/>
@@ -7736,7 +8722,7 @@
               </a:spcAft>
             </a:pPr>
             <a:r>
-              <a:rPr sz="1200" b="0">
+              <a:rPr sz="1150" b="0">
                 <a:solidFill>
                   <a:srgbClr val="1A1A1A"/>
                 </a:solidFill>
@@ -7749,18 +8735,18 @@
       </p:sp>
       <p:sp>
         <p:nvSpPr>
-          <p:cNvPr id="9" name="Rounded Rectangle 8"/>
+          <p:cNvPr id="10" name="Rounded Rectangle 9"/>
           <p:cNvSpPr/>
           <p:nvPr/>
         </p:nvSpPr>
         <p:spPr>
           <a:xfrm>
-            <a:off x="841248" y="2999232"/>
-            <a:ext cx="5715000" cy="530352"/>
+            <a:off x="6254496" y="2395728"/>
+            <a:ext cx="5138928" cy="786384"/>
           </a:xfrm>
           <a:prstGeom prst="roundRect">
             <a:avLst>
-              <a:gd name="adj" fmla="val 6000"/>
+              <a:gd name="adj" fmla="val 7000"/>
             </a:avLst>
           </a:prstGeom>
           <a:solidFill>
@@ -7795,9 +8781,55 @@
           </a:p>
         </p:txBody>
       </p:sp>
+      <p:sp>
+        <p:nvSpPr>
+          <p:cNvPr id="11" name="Rounded Rectangle 10"/>
+          <p:cNvSpPr/>
+          <p:nvPr/>
+        </p:nvSpPr>
+        <p:spPr>
+          <a:xfrm>
+            <a:off x="6400800" y="2532888"/>
+            <a:ext cx="512064" cy="512064"/>
+          </a:xfrm>
+          <a:prstGeom prst="roundRect">
+            <a:avLst>
+              <a:gd name="adj" fmla="val 26000"/>
+            </a:avLst>
+          </a:prstGeom>
+          <a:solidFill>
+            <a:srgbClr val="EE0000"/>
+          </a:solidFill>
+          <a:ln>
+            <a:noFill/>
+          </a:ln>
+          <a:effectLst/>
+        </p:spPr>
+        <p:style>
+          <a:lnRef idx="1">
+            <a:schemeClr val="accent1"/>
+          </a:lnRef>
+          <a:fillRef idx="3">
+            <a:schemeClr val="accent1"/>
+          </a:fillRef>
+          <a:effectRef idx="2">
+            <a:schemeClr val="accent1"/>
+          </a:effectRef>
+          <a:fontRef idx="minor">
+            <a:schemeClr val="lt1"/>
+          </a:fontRef>
+        </p:style>
+        <p:txBody>
+          <a:bodyPr rtlCol="0" anchor="ctr"/>
+          <a:lstStyle/>
+          <a:p>
+            <a:pPr algn="ctr"/>
+          </a:p>
+        </p:txBody>
+      </p:sp>
       <p:pic>
         <p:nvPicPr>
-          <p:cNvPr id="10" name="Picture 9" descr="check_steel.png"/>
+          <p:cNvPr id="12" name="Picture 11" descr="check_white.png"/>
           <p:cNvPicPr>
             <a:picLocks noChangeAspect="1"/>
           </p:cNvPicPr>
@@ -7811,8 +8843,8 @@
         </p:blipFill>
         <p:spPr>
           <a:xfrm>
-            <a:off x="987552" y="3145536"/>
-            <a:ext cx="237744" cy="237744"/>
+            <a:off x="6523695" y="2655783"/>
+            <a:ext cx="266273" cy="266273"/>
           </a:xfrm>
           <a:prstGeom prst="rect">
             <a:avLst/>
@@ -7821,14 +8853,14 @@
       </p:pic>
       <p:sp>
         <p:nvSpPr>
-          <p:cNvPr id="11" name="TextBox 10"/>
+          <p:cNvPr id="13" name="TextBox 12"/>
           <p:cNvSpPr txBox="1"/>
           <p:nvPr/>
         </p:nvSpPr>
         <p:spPr>
           <a:xfrm>
-            <a:off x="1353312" y="2999232"/>
-            <a:ext cx="5029200" cy="530352"/>
+            <a:off x="7040880" y="2395728"/>
+            <a:ext cx="4206240" cy="786384"/>
           </a:xfrm>
           <a:prstGeom prst="rect">
             <a:avLst/>
@@ -7853,7 +8885,7 @@
               </a:spcAft>
             </a:pPr>
             <a:r>
-              <a:rPr sz="1200" b="0">
+              <a:rPr sz="1150" b="0">
                 <a:solidFill>
                   <a:srgbClr val="1A1A1A"/>
                 </a:solidFill>
@@ -7866,18 +8898,18 @@
       </p:sp>
       <p:sp>
         <p:nvSpPr>
-          <p:cNvPr id="12" name="Rounded Rectangle 11"/>
+          <p:cNvPr id="14" name="Rounded Rectangle 13"/>
           <p:cNvSpPr/>
           <p:nvPr/>
         </p:nvSpPr>
         <p:spPr>
           <a:xfrm>
-            <a:off x="841248" y="3602736"/>
-            <a:ext cx="5715000" cy="530352"/>
+            <a:off x="841248" y="3328416"/>
+            <a:ext cx="5138928" cy="786384"/>
           </a:xfrm>
           <a:prstGeom prst="roundRect">
             <a:avLst>
-              <a:gd name="adj" fmla="val 6000"/>
+              <a:gd name="adj" fmla="val 7000"/>
             </a:avLst>
           </a:prstGeom>
           <a:solidFill>
@@ -7912,9 +8944,55 @@
           </a:p>
         </p:txBody>
       </p:sp>
+      <p:sp>
+        <p:nvSpPr>
+          <p:cNvPr id="15" name="Rounded Rectangle 14"/>
+          <p:cNvSpPr/>
+          <p:nvPr/>
+        </p:nvSpPr>
+        <p:spPr>
+          <a:xfrm>
+            <a:off x="987552" y="3465576"/>
+            <a:ext cx="512064" cy="512064"/>
+          </a:xfrm>
+          <a:prstGeom prst="roundRect">
+            <a:avLst>
+              <a:gd name="adj" fmla="val 26000"/>
+            </a:avLst>
+          </a:prstGeom>
+          <a:solidFill>
+            <a:srgbClr val="EE0000"/>
+          </a:solidFill>
+          <a:ln>
+            <a:noFill/>
+          </a:ln>
+          <a:effectLst/>
+        </p:spPr>
+        <p:style>
+          <a:lnRef idx="1">
+            <a:schemeClr val="accent1"/>
+          </a:lnRef>
+          <a:fillRef idx="3">
+            <a:schemeClr val="accent1"/>
+          </a:fillRef>
+          <a:effectRef idx="2">
+            <a:schemeClr val="accent1"/>
+          </a:effectRef>
+          <a:fontRef idx="minor">
+            <a:schemeClr val="lt1"/>
+          </a:fontRef>
+        </p:style>
+        <p:txBody>
+          <a:bodyPr rtlCol="0" anchor="ctr"/>
+          <a:lstStyle/>
+          <a:p>
+            <a:pPr algn="ctr"/>
+          </a:p>
+        </p:txBody>
+      </p:sp>
       <p:pic>
         <p:nvPicPr>
-          <p:cNvPr id="13" name="Picture 12" descr="check_steel.png"/>
+          <p:cNvPr id="16" name="Picture 15" descr="check_white.png"/>
           <p:cNvPicPr>
             <a:picLocks noChangeAspect="1"/>
           </p:cNvPicPr>
@@ -7928,8 +9006,8 @@
         </p:blipFill>
         <p:spPr>
           <a:xfrm>
-            <a:off x="987552" y="3749040"/>
-            <a:ext cx="237744" cy="237744"/>
+            <a:off x="1110447" y="3588471"/>
+            <a:ext cx="266273" cy="266273"/>
           </a:xfrm>
           <a:prstGeom prst="rect">
             <a:avLst/>
@@ -7938,14 +9016,14 @@
       </p:pic>
       <p:sp>
         <p:nvSpPr>
-          <p:cNvPr id="14" name="TextBox 13"/>
+          <p:cNvPr id="17" name="TextBox 16"/>
           <p:cNvSpPr txBox="1"/>
           <p:nvPr/>
         </p:nvSpPr>
         <p:spPr>
           <a:xfrm>
-            <a:off x="1353312" y="3602736"/>
-            <a:ext cx="5029200" cy="530352"/>
+            <a:off x="1627632" y="3328416"/>
+            <a:ext cx="4206240" cy="786384"/>
           </a:xfrm>
           <a:prstGeom prst="rect">
             <a:avLst/>
@@ -7970,7 +9048,7 @@
               </a:spcAft>
             </a:pPr>
             <a:r>
-              <a:rPr sz="1200" b="0">
+              <a:rPr sz="1150" b="0">
                 <a:solidFill>
                   <a:srgbClr val="1A1A1A"/>
                 </a:solidFill>
@@ -7983,18 +9061,18 @@
       </p:sp>
       <p:sp>
         <p:nvSpPr>
-          <p:cNvPr id="15" name="Rounded Rectangle 14"/>
+          <p:cNvPr id="18" name="Rounded Rectangle 17"/>
           <p:cNvSpPr/>
           <p:nvPr/>
         </p:nvSpPr>
         <p:spPr>
           <a:xfrm>
-            <a:off x="841248" y="4206240"/>
-            <a:ext cx="5715000" cy="530352"/>
+            <a:off x="6254496" y="3328416"/>
+            <a:ext cx="5138928" cy="786384"/>
           </a:xfrm>
           <a:prstGeom prst="roundRect">
             <a:avLst>
-              <a:gd name="adj" fmla="val 6000"/>
+              <a:gd name="adj" fmla="val 7000"/>
             </a:avLst>
           </a:prstGeom>
           <a:solidFill>
@@ -8029,9 +9107,55 @@
           </a:p>
         </p:txBody>
       </p:sp>
+      <p:sp>
+        <p:nvSpPr>
+          <p:cNvPr id="19" name="Rounded Rectangle 18"/>
+          <p:cNvSpPr/>
+          <p:nvPr/>
+        </p:nvSpPr>
+        <p:spPr>
+          <a:xfrm>
+            <a:off x="6400800" y="3465576"/>
+            <a:ext cx="512064" cy="512064"/>
+          </a:xfrm>
+          <a:prstGeom prst="roundRect">
+            <a:avLst>
+              <a:gd name="adj" fmla="val 26000"/>
+            </a:avLst>
+          </a:prstGeom>
+          <a:solidFill>
+            <a:srgbClr val="EE0000"/>
+          </a:solidFill>
+          <a:ln>
+            <a:noFill/>
+          </a:ln>
+          <a:effectLst/>
+        </p:spPr>
+        <p:style>
+          <a:lnRef idx="1">
+            <a:schemeClr val="accent1"/>
+          </a:lnRef>
+          <a:fillRef idx="3">
+            <a:schemeClr val="accent1"/>
+          </a:fillRef>
+          <a:effectRef idx="2">
+            <a:schemeClr val="accent1"/>
+          </a:effectRef>
+          <a:fontRef idx="minor">
+            <a:schemeClr val="lt1"/>
+          </a:fontRef>
+        </p:style>
+        <p:txBody>
+          <a:bodyPr rtlCol="0" anchor="ctr"/>
+          <a:lstStyle/>
+          <a:p>
+            <a:pPr algn="ctr"/>
+          </a:p>
+        </p:txBody>
+      </p:sp>
       <p:pic>
         <p:nvPicPr>
-          <p:cNvPr id="16" name="Picture 15" descr="check_steel.png"/>
+          <p:cNvPr id="20" name="Picture 19" descr="check_white.png"/>
           <p:cNvPicPr>
             <a:picLocks noChangeAspect="1"/>
           </p:cNvPicPr>
@@ -8045,8 +9169,8 @@
         </p:blipFill>
         <p:spPr>
           <a:xfrm>
-            <a:off x="987552" y="4352544"/>
-            <a:ext cx="237744" cy="237744"/>
+            <a:off x="6523695" y="3588471"/>
+            <a:ext cx="266273" cy="266273"/>
           </a:xfrm>
           <a:prstGeom prst="rect">
             <a:avLst/>
@@ -8055,14 +9179,14 @@
       </p:pic>
       <p:sp>
         <p:nvSpPr>
-          <p:cNvPr id="17" name="TextBox 16"/>
+          <p:cNvPr id="21" name="TextBox 20"/>
           <p:cNvSpPr txBox="1"/>
           <p:nvPr/>
         </p:nvSpPr>
         <p:spPr>
           <a:xfrm>
-            <a:off x="1353312" y="4206240"/>
-            <a:ext cx="5029200" cy="530352"/>
+            <a:off x="7040880" y="3328416"/>
+            <a:ext cx="4206240" cy="786384"/>
           </a:xfrm>
           <a:prstGeom prst="rect">
             <a:avLst/>
@@ -8087,7 +9211,7 @@
               </a:spcAft>
             </a:pPr>
             <a:r>
-              <a:rPr sz="1200" b="0">
+              <a:rPr sz="1150" b="0">
                 <a:solidFill>
                   <a:srgbClr val="1A1A1A"/>
                 </a:solidFill>
@@ -8100,18 +9224,18 @@
       </p:sp>
       <p:sp>
         <p:nvSpPr>
-          <p:cNvPr id="18" name="Rounded Rectangle 17"/>
+          <p:cNvPr id="22" name="Rounded Rectangle 21"/>
           <p:cNvSpPr/>
           <p:nvPr/>
         </p:nvSpPr>
         <p:spPr>
           <a:xfrm>
-            <a:off x="841248" y="4809744"/>
-            <a:ext cx="5715000" cy="530352"/>
+            <a:off x="841248" y="4261104"/>
+            <a:ext cx="5138928" cy="786384"/>
           </a:xfrm>
           <a:prstGeom prst="roundRect">
             <a:avLst>
-              <a:gd name="adj" fmla="val 6000"/>
+              <a:gd name="adj" fmla="val 7000"/>
             </a:avLst>
           </a:prstGeom>
           <a:solidFill>
@@ -8146,9 +9270,55 @@
           </a:p>
         </p:txBody>
       </p:sp>
+      <p:sp>
+        <p:nvSpPr>
+          <p:cNvPr id="23" name="Rounded Rectangle 22"/>
+          <p:cNvSpPr/>
+          <p:nvPr/>
+        </p:nvSpPr>
+        <p:spPr>
+          <a:xfrm>
+            <a:off x="987552" y="4398264"/>
+            <a:ext cx="512064" cy="512064"/>
+          </a:xfrm>
+          <a:prstGeom prst="roundRect">
+            <a:avLst>
+              <a:gd name="adj" fmla="val 26000"/>
+            </a:avLst>
+          </a:prstGeom>
+          <a:solidFill>
+            <a:srgbClr val="EE0000"/>
+          </a:solidFill>
+          <a:ln>
+            <a:noFill/>
+          </a:ln>
+          <a:effectLst/>
+        </p:spPr>
+        <p:style>
+          <a:lnRef idx="1">
+            <a:schemeClr val="accent1"/>
+          </a:lnRef>
+          <a:fillRef idx="3">
+            <a:schemeClr val="accent1"/>
+          </a:fillRef>
+          <a:effectRef idx="2">
+            <a:schemeClr val="accent1"/>
+          </a:effectRef>
+          <a:fontRef idx="minor">
+            <a:schemeClr val="lt1"/>
+          </a:fontRef>
+        </p:style>
+        <p:txBody>
+          <a:bodyPr rtlCol="0" anchor="ctr"/>
+          <a:lstStyle/>
+          <a:p>
+            <a:pPr algn="ctr"/>
+          </a:p>
+        </p:txBody>
+      </p:sp>
       <p:pic>
         <p:nvPicPr>
-          <p:cNvPr id="19" name="Picture 18" descr="check_steel.png"/>
+          <p:cNvPr id="24" name="Picture 23" descr="check_white.png"/>
           <p:cNvPicPr>
             <a:picLocks noChangeAspect="1"/>
           </p:cNvPicPr>
@@ -8162,8 +9332,8 @@
         </p:blipFill>
         <p:spPr>
           <a:xfrm>
-            <a:off x="987552" y="4956048"/>
-            <a:ext cx="237744" cy="237744"/>
+            <a:off x="1110447" y="4521159"/>
+            <a:ext cx="266273" cy="266273"/>
           </a:xfrm>
           <a:prstGeom prst="rect">
             <a:avLst/>
@@ -8172,14 +9342,14 @@
       </p:pic>
       <p:sp>
         <p:nvSpPr>
-          <p:cNvPr id="20" name="TextBox 19"/>
+          <p:cNvPr id="25" name="TextBox 24"/>
           <p:cNvSpPr txBox="1"/>
           <p:nvPr/>
         </p:nvSpPr>
         <p:spPr>
           <a:xfrm>
-            <a:off x="1353312" y="4809744"/>
-            <a:ext cx="5029200" cy="530352"/>
+            <a:off x="1627632" y="4261104"/>
+            <a:ext cx="4206240" cy="786384"/>
           </a:xfrm>
           <a:prstGeom prst="rect">
             <a:avLst/>
@@ -8204,221 +9374,13 @@
               </a:spcAft>
             </a:pPr>
             <a:r>
-              <a:rPr sz="1200" b="0">
+              <a:rPr sz="1150" b="0">
                 <a:solidFill>
                   <a:srgbClr val="1A1A1A"/>
                 </a:solidFill>
                 <a:latin typeface="Red Hat Text"/>
               </a:rPr>
               <a:t>Mature answer is both, not either</a:t>
-            </a:r>
-          </a:p>
-        </p:txBody>
-      </p:sp>
-      <p:sp>
-        <p:nvSpPr>
-          <p:cNvPr id="21" name="Rounded Rectangle 20"/>
-          <p:cNvSpPr/>
-          <p:nvPr/>
-        </p:nvSpPr>
-        <p:spPr>
-          <a:xfrm>
-            <a:off x="6812280" y="2395728"/>
-            <a:ext cx="4538167" cy="2944368"/>
-          </a:xfrm>
-          <a:prstGeom prst="roundRect">
-            <a:avLst>
-              <a:gd name="adj" fmla="val 4000"/>
-            </a:avLst>
-          </a:prstGeom>
-          <a:solidFill>
-            <a:srgbClr val="FFFFFF"/>
-          </a:solidFill>
-          <a:ln w="15240">
-            <a:solidFill>
-              <a:srgbClr val="DDE1E6"/>
-            </a:solidFill>
-          </a:ln>
-          <a:effectLst/>
-        </p:spPr>
-        <p:style>
-          <a:lnRef idx="1">
-            <a:schemeClr val="accent1"/>
-          </a:lnRef>
-          <a:fillRef idx="3">
-            <a:schemeClr val="accent1"/>
-          </a:fillRef>
-          <a:effectRef idx="2">
-            <a:schemeClr val="accent1"/>
-          </a:effectRef>
-          <a:fontRef idx="minor">
-            <a:schemeClr val="lt1"/>
-          </a:fontRef>
-        </p:style>
-        <p:txBody>
-          <a:bodyPr rtlCol="0" anchor="ctr"/>
-          <a:lstStyle/>
-          <a:p>
-            <a:pPr algn="ctr"/>
-          </a:p>
-        </p:txBody>
-      </p:sp>
-      <p:sp>
-        <p:nvSpPr>
-          <p:cNvPr id="22" name="Rounded Rectangle 21"/>
-          <p:cNvSpPr/>
-          <p:nvPr/>
-        </p:nvSpPr>
-        <p:spPr>
-          <a:xfrm>
-            <a:off x="7013448" y="2596896"/>
-            <a:ext cx="1298448" cy="310896"/>
-          </a:xfrm>
-          <a:prstGeom prst="roundRect">
-            <a:avLst>
-              <a:gd name="adj" fmla="val 50000"/>
-            </a:avLst>
-          </a:prstGeom>
-          <a:solidFill>
-            <a:srgbClr val="FCECEC"/>
-          </a:solidFill>
-          <a:ln>
-            <a:noFill/>
-          </a:ln>
-          <a:effectLst/>
-        </p:spPr>
-        <p:style>
-          <a:lnRef idx="1">
-            <a:schemeClr val="accent1"/>
-          </a:lnRef>
-          <a:fillRef idx="3">
-            <a:schemeClr val="accent1"/>
-          </a:fillRef>
-          <a:effectRef idx="2">
-            <a:schemeClr val="accent1"/>
-          </a:effectRef>
-          <a:fontRef idx="minor">
-            <a:schemeClr val="lt1"/>
-          </a:fontRef>
-        </p:style>
-        <p:txBody>
-          <a:bodyPr rtlCol="0" anchor="ctr"/>
-          <a:lstStyle/>
-          <a:p>
-            <a:pPr algn="ctr"/>
-          </a:p>
-        </p:txBody>
-      </p:sp>
-      <p:sp>
-        <p:nvSpPr>
-          <p:cNvPr id="23" name="TextBox 22"/>
-          <p:cNvSpPr txBox="1"/>
-          <p:nvPr/>
-        </p:nvSpPr>
-        <p:spPr>
-          <a:xfrm>
-            <a:off x="7013448" y="2596896"/>
-            <a:ext cx="1298448" cy="310896"/>
-          </a:xfrm>
-          <a:prstGeom prst="rect">
-            <a:avLst/>
-          </a:prstGeom>
-          <a:noFill/>
-        </p:spPr>
-        <p:txBody>
-          <a:bodyPr wrap="none" anchor="ctr" lIns="0" rIns="0" tIns="0" bIns="0">
-            <a:spAutoFit/>
-          </a:bodyPr>
-          <a:lstStyle/>
-          <a:p>
-            <a:pPr algn="ctr">
-              <a:lnSpc>
-                <a:spcPct val="106000"/>
-              </a:lnSpc>
-              <a:spcBef>
-                <a:spcPts val="0"/>
-              </a:spcBef>
-              <a:spcAft>
-                <a:spcPts val="0"/>
-              </a:spcAft>
-            </a:pPr>
-            <a:r>
-              <a:rPr sz="850" b="1">
-                <a:solidFill>
-                  <a:srgbClr val="B80000"/>
-                </a:solidFill>
-                <a:latin typeface="Red Hat Display"/>
-              </a:rPr>
-              <a:t>MEDIA PASS</a:t>
-            </a:r>
-          </a:p>
-        </p:txBody>
-      </p:sp>
-      <p:pic>
-        <p:nvPicPr>
-          <p:cNvPr id="24" name="Picture 23" descr="eye_slate.png"/>
-          <p:cNvPicPr>
-            <a:picLocks noChangeAspect="1"/>
-          </p:cNvPicPr>
-          <p:nvPr/>
-        </p:nvPicPr>
-        <p:blipFill>
-          <a:blip r:embed="rId4"/>
-          <a:stretch>
-            <a:fillRect/>
-          </a:stretch>
-        </p:blipFill>
-        <p:spPr>
-          <a:xfrm>
-            <a:off x="8843619" y="3108960"/>
-            <a:ext cx="475488" cy="475488"/>
-          </a:xfrm>
-          <a:prstGeom prst="rect">
-            <a:avLst/>
-          </a:prstGeom>
-        </p:spPr>
-      </p:pic>
-      <p:sp>
-        <p:nvSpPr>
-          <p:cNvPr id="25" name="TextBox 24"/>
-          <p:cNvSpPr txBox="1"/>
-          <p:nvPr/>
-        </p:nvSpPr>
-        <p:spPr>
-          <a:xfrm>
-            <a:off x="7050024" y="3721608"/>
-            <a:ext cx="4062679" cy="1481328"/>
-          </a:xfrm>
-          <a:prstGeom prst="rect">
-            <a:avLst/>
-          </a:prstGeom>
-          <a:noFill/>
-        </p:spPr>
-        <p:txBody>
-          <a:bodyPr wrap="square" anchor="t" lIns="0" rIns="0" tIns="0" bIns="0">
-            <a:spAutoFit/>
-          </a:bodyPr>
-          <a:lstStyle/>
-          <a:p>
-            <a:pPr algn="l">
-              <a:lnSpc>
-                <a:spcPct val="120000"/>
-              </a:lnSpc>
-              <a:spcBef>
-                <a:spcPts val="0"/>
-              </a:spcBef>
-              <a:spcAft>
-                <a:spcPts val="0"/>
-              </a:spcAft>
-            </a:pPr>
-            <a:r>
-              <a:rPr sz="950" b="0">
-                <a:solidFill>
-                  <a:srgbClr val="8A9099"/>
-                </a:solidFill>
-                <a:latin typeface="Red Hat Text"/>
-              </a:rPr>
-              <a:t>Two gates in series — a pipeline "scan gate" (fails a red image) and a cluster "admission gate" (refuses an unsigned image), with a caption "both, not either."</a:t>
             </a:r>
           </a:p>
         </p:txBody>
@@ -8726,11 +9688,11 @@
         <p:spPr>
           <a:xfrm>
             <a:off x="841248" y="2395728"/>
-            <a:ext cx="5715000" cy="530352"/>
+            <a:ext cx="5138928" cy="786384"/>
           </a:xfrm>
           <a:prstGeom prst="roundRect">
             <a:avLst>
-              <a:gd name="adj" fmla="val 6000"/>
+              <a:gd name="adj" fmla="val 7000"/>
             </a:avLst>
           </a:prstGeom>
           <a:solidFill>
@@ -8765,9 +9727,55 @@
           </a:p>
         </p:txBody>
       </p:sp>
+      <p:sp>
+        <p:nvSpPr>
+          <p:cNvPr id="7" name="Rounded Rectangle 6"/>
+          <p:cNvSpPr/>
+          <p:nvPr/>
+        </p:nvSpPr>
+        <p:spPr>
+          <a:xfrm>
+            <a:off x="987552" y="2532888"/>
+            <a:ext cx="512064" cy="512064"/>
+          </a:xfrm>
+          <a:prstGeom prst="roundRect">
+            <a:avLst>
+              <a:gd name="adj" fmla="val 26000"/>
+            </a:avLst>
+          </a:prstGeom>
+          <a:solidFill>
+            <a:srgbClr val="EE0000"/>
+          </a:solidFill>
+          <a:ln>
+            <a:noFill/>
+          </a:ln>
+          <a:effectLst/>
+        </p:spPr>
+        <p:style>
+          <a:lnRef idx="1">
+            <a:schemeClr val="accent1"/>
+          </a:lnRef>
+          <a:fillRef idx="3">
+            <a:schemeClr val="accent1"/>
+          </a:fillRef>
+          <a:effectRef idx="2">
+            <a:schemeClr val="accent1"/>
+          </a:effectRef>
+          <a:fontRef idx="minor">
+            <a:schemeClr val="lt1"/>
+          </a:fontRef>
+        </p:style>
+        <p:txBody>
+          <a:bodyPr rtlCol="0" anchor="ctr"/>
+          <a:lstStyle/>
+          <a:p>
+            <a:pPr algn="ctr"/>
+          </a:p>
+        </p:txBody>
+      </p:sp>
       <p:pic>
         <p:nvPicPr>
-          <p:cNvPr id="7" name="Picture 6" descr="check_steel.png"/>
+          <p:cNvPr id="8" name="Picture 7" descr="check_white.png"/>
           <p:cNvPicPr>
             <a:picLocks noChangeAspect="1"/>
           </p:cNvPicPr>
@@ -8781,8 +9789,8 @@
         </p:blipFill>
         <p:spPr>
           <a:xfrm>
-            <a:off x="987552" y="2542032"/>
-            <a:ext cx="237744" cy="237744"/>
+            <a:off x="1110447" y="2655783"/>
+            <a:ext cx="266273" cy="266273"/>
           </a:xfrm>
           <a:prstGeom prst="rect">
             <a:avLst/>
@@ -8791,14 +9799,14 @@
       </p:pic>
       <p:sp>
         <p:nvSpPr>
-          <p:cNvPr id="8" name="TextBox 7"/>
+          <p:cNvPr id="9" name="TextBox 8"/>
           <p:cNvSpPr txBox="1"/>
           <p:nvPr/>
         </p:nvSpPr>
         <p:spPr>
           <a:xfrm>
-            <a:off x="1353312" y="2395728"/>
-            <a:ext cx="5029200" cy="530352"/>
+            <a:off x="1627632" y="2395728"/>
+            <a:ext cx="4206240" cy="786384"/>
           </a:xfrm>
           <a:prstGeom prst="rect">
             <a:avLst/>
@@ -8823,7 +9831,7 @@
               </a:spcAft>
             </a:pPr>
             <a:r>
-              <a:rPr sz="1200" b="0">
+              <a:rPr sz="1150" b="0">
                 <a:solidFill>
                   <a:srgbClr val="1A1A1A"/>
                 </a:solidFill>
@@ -8836,18 +9844,18 @@
       </p:sp>
       <p:sp>
         <p:nvSpPr>
-          <p:cNvPr id="9" name="Rounded Rectangle 8"/>
+          <p:cNvPr id="10" name="Rounded Rectangle 9"/>
           <p:cNvSpPr/>
           <p:nvPr/>
         </p:nvSpPr>
         <p:spPr>
           <a:xfrm>
-            <a:off x="841248" y="2999232"/>
-            <a:ext cx="5715000" cy="530352"/>
+            <a:off x="6254496" y="2395728"/>
+            <a:ext cx="5138928" cy="786384"/>
           </a:xfrm>
           <a:prstGeom prst="roundRect">
             <a:avLst>
-              <a:gd name="adj" fmla="val 6000"/>
+              <a:gd name="adj" fmla="val 7000"/>
             </a:avLst>
           </a:prstGeom>
           <a:solidFill>
@@ -8882,9 +9890,55 @@
           </a:p>
         </p:txBody>
       </p:sp>
+      <p:sp>
+        <p:nvSpPr>
+          <p:cNvPr id="11" name="Rounded Rectangle 10"/>
+          <p:cNvSpPr/>
+          <p:nvPr/>
+        </p:nvSpPr>
+        <p:spPr>
+          <a:xfrm>
+            <a:off x="6400800" y="2532888"/>
+            <a:ext cx="512064" cy="512064"/>
+          </a:xfrm>
+          <a:prstGeom prst="roundRect">
+            <a:avLst>
+              <a:gd name="adj" fmla="val 26000"/>
+            </a:avLst>
+          </a:prstGeom>
+          <a:solidFill>
+            <a:srgbClr val="EE0000"/>
+          </a:solidFill>
+          <a:ln>
+            <a:noFill/>
+          </a:ln>
+          <a:effectLst/>
+        </p:spPr>
+        <p:style>
+          <a:lnRef idx="1">
+            <a:schemeClr val="accent1"/>
+          </a:lnRef>
+          <a:fillRef idx="3">
+            <a:schemeClr val="accent1"/>
+          </a:fillRef>
+          <a:effectRef idx="2">
+            <a:schemeClr val="accent1"/>
+          </a:effectRef>
+          <a:fontRef idx="minor">
+            <a:schemeClr val="lt1"/>
+          </a:fontRef>
+        </p:style>
+        <p:txBody>
+          <a:bodyPr rtlCol="0" anchor="ctr"/>
+          <a:lstStyle/>
+          <a:p>
+            <a:pPr algn="ctr"/>
+          </a:p>
+        </p:txBody>
+      </p:sp>
       <p:pic>
         <p:nvPicPr>
-          <p:cNvPr id="10" name="Picture 9" descr="check_steel.png"/>
+          <p:cNvPr id="12" name="Picture 11" descr="check_white.png"/>
           <p:cNvPicPr>
             <a:picLocks noChangeAspect="1"/>
           </p:cNvPicPr>
@@ -8898,8 +9952,8 @@
         </p:blipFill>
         <p:spPr>
           <a:xfrm>
-            <a:off x="987552" y="3145536"/>
-            <a:ext cx="237744" cy="237744"/>
+            <a:off x="6523695" y="2655783"/>
+            <a:ext cx="266273" cy="266273"/>
           </a:xfrm>
           <a:prstGeom prst="rect">
             <a:avLst/>
@@ -8908,14 +9962,14 @@
       </p:pic>
       <p:sp>
         <p:nvSpPr>
-          <p:cNvPr id="11" name="TextBox 10"/>
+          <p:cNvPr id="13" name="TextBox 12"/>
           <p:cNvSpPr txBox="1"/>
           <p:nvPr/>
         </p:nvSpPr>
         <p:spPr>
           <a:xfrm>
-            <a:off x="1353312" y="2999232"/>
-            <a:ext cx="5029200" cy="530352"/>
+            <a:off x="7040880" y="2395728"/>
+            <a:ext cx="4206240" cy="786384"/>
           </a:xfrm>
           <a:prstGeom prst="rect">
             <a:avLst/>
@@ -8940,7 +9994,7 @@
               </a:spcAft>
             </a:pPr>
             <a:r>
-              <a:rPr sz="1200" b="0">
+              <a:rPr sz="1150" b="0">
                 <a:solidFill>
                   <a:srgbClr val="1A1A1A"/>
                 </a:solidFill>
@@ -8953,18 +10007,18 @@
       </p:sp>
       <p:sp>
         <p:nvSpPr>
-          <p:cNvPr id="12" name="Rounded Rectangle 11"/>
+          <p:cNvPr id="14" name="Rounded Rectangle 13"/>
           <p:cNvSpPr/>
           <p:nvPr/>
         </p:nvSpPr>
         <p:spPr>
           <a:xfrm>
-            <a:off x="841248" y="3602736"/>
-            <a:ext cx="5715000" cy="530352"/>
+            <a:off x="841248" y="3328416"/>
+            <a:ext cx="5138928" cy="786384"/>
           </a:xfrm>
           <a:prstGeom prst="roundRect">
             <a:avLst>
-              <a:gd name="adj" fmla="val 6000"/>
+              <a:gd name="adj" fmla="val 7000"/>
             </a:avLst>
           </a:prstGeom>
           <a:solidFill>
@@ -8999,9 +10053,55 @@
           </a:p>
         </p:txBody>
       </p:sp>
+      <p:sp>
+        <p:nvSpPr>
+          <p:cNvPr id="15" name="Rounded Rectangle 14"/>
+          <p:cNvSpPr/>
+          <p:nvPr/>
+        </p:nvSpPr>
+        <p:spPr>
+          <a:xfrm>
+            <a:off x="987552" y="3465576"/>
+            <a:ext cx="512064" cy="512064"/>
+          </a:xfrm>
+          <a:prstGeom prst="roundRect">
+            <a:avLst>
+              <a:gd name="adj" fmla="val 26000"/>
+            </a:avLst>
+          </a:prstGeom>
+          <a:solidFill>
+            <a:srgbClr val="EE0000"/>
+          </a:solidFill>
+          <a:ln>
+            <a:noFill/>
+          </a:ln>
+          <a:effectLst/>
+        </p:spPr>
+        <p:style>
+          <a:lnRef idx="1">
+            <a:schemeClr val="accent1"/>
+          </a:lnRef>
+          <a:fillRef idx="3">
+            <a:schemeClr val="accent1"/>
+          </a:fillRef>
+          <a:effectRef idx="2">
+            <a:schemeClr val="accent1"/>
+          </a:effectRef>
+          <a:fontRef idx="minor">
+            <a:schemeClr val="lt1"/>
+          </a:fontRef>
+        </p:style>
+        <p:txBody>
+          <a:bodyPr rtlCol="0" anchor="ctr"/>
+          <a:lstStyle/>
+          <a:p>
+            <a:pPr algn="ctr"/>
+          </a:p>
+        </p:txBody>
+      </p:sp>
       <p:pic>
         <p:nvPicPr>
-          <p:cNvPr id="13" name="Picture 12" descr="check_steel.png"/>
+          <p:cNvPr id="16" name="Picture 15" descr="check_white.png"/>
           <p:cNvPicPr>
             <a:picLocks noChangeAspect="1"/>
           </p:cNvPicPr>
@@ -9015,8 +10115,8 @@
         </p:blipFill>
         <p:spPr>
           <a:xfrm>
-            <a:off x="987552" y="3749040"/>
-            <a:ext cx="237744" cy="237744"/>
+            <a:off x="1110447" y="3588471"/>
+            <a:ext cx="266273" cy="266273"/>
           </a:xfrm>
           <a:prstGeom prst="rect">
             <a:avLst/>
@@ -9025,14 +10125,14 @@
       </p:pic>
       <p:sp>
         <p:nvSpPr>
-          <p:cNvPr id="14" name="TextBox 13"/>
+          <p:cNvPr id="17" name="TextBox 16"/>
           <p:cNvSpPr txBox="1"/>
           <p:nvPr/>
         </p:nvSpPr>
         <p:spPr>
           <a:xfrm>
-            <a:off x="1353312" y="3602736"/>
-            <a:ext cx="5029200" cy="530352"/>
+            <a:off x="1627632" y="3328416"/>
+            <a:ext cx="4206240" cy="786384"/>
           </a:xfrm>
           <a:prstGeom prst="rect">
             <a:avLst/>
@@ -9057,7 +10157,7 @@
               </a:spcAft>
             </a:pPr>
             <a:r>
-              <a:rPr sz="1200" b="0">
+              <a:rPr sz="1150" b="0">
                 <a:solidFill>
                   <a:srgbClr val="1A1A1A"/>
                 </a:solidFill>
@@ -9070,18 +10170,18 @@
       </p:sp>
       <p:sp>
         <p:nvSpPr>
-          <p:cNvPr id="15" name="Rounded Rectangle 14"/>
+          <p:cNvPr id="18" name="Rounded Rectangle 17"/>
           <p:cNvSpPr/>
           <p:nvPr/>
         </p:nvSpPr>
         <p:spPr>
           <a:xfrm>
-            <a:off x="841248" y="4206240"/>
-            <a:ext cx="5715000" cy="530352"/>
+            <a:off x="6254496" y="3328416"/>
+            <a:ext cx="5138928" cy="786384"/>
           </a:xfrm>
           <a:prstGeom prst="roundRect">
             <a:avLst>
-              <a:gd name="adj" fmla="val 6000"/>
+              <a:gd name="adj" fmla="val 7000"/>
             </a:avLst>
           </a:prstGeom>
           <a:solidFill>
@@ -9116,9 +10216,55 @@
           </a:p>
         </p:txBody>
       </p:sp>
+      <p:sp>
+        <p:nvSpPr>
+          <p:cNvPr id="19" name="Rounded Rectangle 18"/>
+          <p:cNvSpPr/>
+          <p:nvPr/>
+        </p:nvSpPr>
+        <p:spPr>
+          <a:xfrm>
+            <a:off x="6400800" y="3465576"/>
+            <a:ext cx="512064" cy="512064"/>
+          </a:xfrm>
+          <a:prstGeom prst="roundRect">
+            <a:avLst>
+              <a:gd name="adj" fmla="val 26000"/>
+            </a:avLst>
+          </a:prstGeom>
+          <a:solidFill>
+            <a:srgbClr val="EE0000"/>
+          </a:solidFill>
+          <a:ln>
+            <a:noFill/>
+          </a:ln>
+          <a:effectLst/>
+        </p:spPr>
+        <p:style>
+          <a:lnRef idx="1">
+            <a:schemeClr val="accent1"/>
+          </a:lnRef>
+          <a:fillRef idx="3">
+            <a:schemeClr val="accent1"/>
+          </a:fillRef>
+          <a:effectRef idx="2">
+            <a:schemeClr val="accent1"/>
+          </a:effectRef>
+          <a:fontRef idx="minor">
+            <a:schemeClr val="lt1"/>
+          </a:fontRef>
+        </p:style>
+        <p:txBody>
+          <a:bodyPr rtlCol="0" anchor="ctr"/>
+          <a:lstStyle/>
+          <a:p>
+            <a:pPr algn="ctr"/>
+          </a:p>
+        </p:txBody>
+      </p:sp>
       <p:pic>
         <p:nvPicPr>
-          <p:cNvPr id="16" name="Picture 15" descr="check_steel.png"/>
+          <p:cNvPr id="20" name="Picture 19" descr="check_white.png"/>
           <p:cNvPicPr>
             <a:picLocks noChangeAspect="1"/>
           </p:cNvPicPr>
@@ -9132,8 +10278,8 @@
         </p:blipFill>
         <p:spPr>
           <a:xfrm>
-            <a:off x="987552" y="4352544"/>
-            <a:ext cx="237744" cy="237744"/>
+            <a:off x="6523695" y="3588471"/>
+            <a:ext cx="266273" cy="266273"/>
           </a:xfrm>
           <a:prstGeom prst="rect">
             <a:avLst/>
@@ -9142,14 +10288,14 @@
       </p:pic>
       <p:sp>
         <p:nvSpPr>
-          <p:cNvPr id="17" name="TextBox 16"/>
+          <p:cNvPr id="21" name="TextBox 20"/>
           <p:cNvSpPr txBox="1"/>
           <p:nvPr/>
         </p:nvSpPr>
         <p:spPr>
           <a:xfrm>
-            <a:off x="1353312" y="4206240"/>
-            <a:ext cx="5029200" cy="530352"/>
+            <a:off x="7040880" y="3328416"/>
+            <a:ext cx="4206240" cy="786384"/>
           </a:xfrm>
           <a:prstGeom prst="rect">
             <a:avLst/>
@@ -9174,7 +10320,7 @@
               </a:spcAft>
             </a:pPr>
             <a:r>
-              <a:rPr sz="1200" b="0">
+              <a:rPr sz="1150" b="0">
                 <a:solidFill>
                   <a:srgbClr val="1A1A1A"/>
                 </a:solidFill>
@@ -9187,18 +10333,18 @@
       </p:sp>
       <p:sp>
         <p:nvSpPr>
-          <p:cNvPr id="18" name="Rounded Rectangle 17"/>
+          <p:cNvPr id="22" name="Rounded Rectangle 21"/>
           <p:cNvSpPr/>
           <p:nvPr/>
         </p:nvSpPr>
         <p:spPr>
           <a:xfrm>
-            <a:off x="841248" y="4809744"/>
-            <a:ext cx="5715000" cy="530352"/>
+            <a:off x="841248" y="4261104"/>
+            <a:ext cx="5138928" cy="786384"/>
           </a:xfrm>
           <a:prstGeom prst="roundRect">
             <a:avLst>
-              <a:gd name="adj" fmla="val 6000"/>
+              <a:gd name="adj" fmla="val 7000"/>
             </a:avLst>
           </a:prstGeom>
           <a:solidFill>
@@ -9233,9 +10379,55 @@
           </a:p>
         </p:txBody>
       </p:sp>
+      <p:sp>
+        <p:nvSpPr>
+          <p:cNvPr id="23" name="Rounded Rectangle 22"/>
+          <p:cNvSpPr/>
+          <p:nvPr/>
+        </p:nvSpPr>
+        <p:spPr>
+          <a:xfrm>
+            <a:off x="987552" y="4398264"/>
+            <a:ext cx="512064" cy="512064"/>
+          </a:xfrm>
+          <a:prstGeom prst="roundRect">
+            <a:avLst>
+              <a:gd name="adj" fmla="val 26000"/>
+            </a:avLst>
+          </a:prstGeom>
+          <a:solidFill>
+            <a:srgbClr val="EE0000"/>
+          </a:solidFill>
+          <a:ln>
+            <a:noFill/>
+          </a:ln>
+          <a:effectLst/>
+        </p:spPr>
+        <p:style>
+          <a:lnRef idx="1">
+            <a:schemeClr val="accent1"/>
+          </a:lnRef>
+          <a:fillRef idx="3">
+            <a:schemeClr val="accent1"/>
+          </a:fillRef>
+          <a:effectRef idx="2">
+            <a:schemeClr val="accent1"/>
+          </a:effectRef>
+          <a:fontRef idx="minor">
+            <a:schemeClr val="lt1"/>
+          </a:fontRef>
+        </p:style>
+        <p:txBody>
+          <a:bodyPr rtlCol="0" anchor="ctr"/>
+          <a:lstStyle/>
+          <a:p>
+            <a:pPr algn="ctr"/>
+          </a:p>
+        </p:txBody>
+      </p:sp>
       <p:pic>
         <p:nvPicPr>
-          <p:cNvPr id="19" name="Picture 18" descr="check_steel.png"/>
+          <p:cNvPr id="24" name="Picture 23" descr="check_white.png"/>
           <p:cNvPicPr>
             <a:picLocks noChangeAspect="1"/>
           </p:cNvPicPr>
@@ -9249,8 +10441,8 @@
         </p:blipFill>
         <p:spPr>
           <a:xfrm>
-            <a:off x="987552" y="4956048"/>
-            <a:ext cx="237744" cy="237744"/>
+            <a:off x="1110447" y="4521159"/>
+            <a:ext cx="266273" cy="266273"/>
           </a:xfrm>
           <a:prstGeom prst="rect">
             <a:avLst/>
@@ -9259,14 +10451,14 @@
       </p:pic>
       <p:sp>
         <p:nvSpPr>
-          <p:cNvPr id="20" name="TextBox 19"/>
+          <p:cNvPr id="25" name="TextBox 24"/>
           <p:cNvSpPr txBox="1"/>
           <p:nvPr/>
         </p:nvSpPr>
         <p:spPr>
           <a:xfrm>
-            <a:off x="1353312" y="4809744"/>
-            <a:ext cx="5029200" cy="530352"/>
+            <a:off x="1627632" y="4261104"/>
+            <a:ext cx="4206240" cy="786384"/>
           </a:xfrm>
           <a:prstGeom prst="rect">
             <a:avLst/>
@@ -9291,221 +10483,13 @@
               </a:spcAft>
             </a:pPr>
             <a:r>
-              <a:rPr sz="1200" b="0">
+              <a:rPr sz="1150" b="0">
                 <a:solidFill>
                   <a:srgbClr val="1A1A1A"/>
                 </a:solidFill>
                 <a:latin typeface="Red Hat Text"/>
               </a:rPr>
               <a:t>Remove the dependency → green, every time</a:t>
-            </a:r>
-          </a:p>
-        </p:txBody>
-      </p:sp>
-      <p:sp>
-        <p:nvSpPr>
-          <p:cNvPr id="21" name="Rounded Rectangle 20"/>
-          <p:cNvSpPr/>
-          <p:nvPr/>
-        </p:nvSpPr>
-        <p:spPr>
-          <a:xfrm>
-            <a:off x="6812280" y="2395728"/>
-            <a:ext cx="4538167" cy="2944368"/>
-          </a:xfrm>
-          <a:prstGeom prst="roundRect">
-            <a:avLst>
-              <a:gd name="adj" fmla="val 4000"/>
-            </a:avLst>
-          </a:prstGeom>
-          <a:solidFill>
-            <a:srgbClr val="FFFFFF"/>
-          </a:solidFill>
-          <a:ln w="15240">
-            <a:solidFill>
-              <a:srgbClr val="DDE1E6"/>
-            </a:solidFill>
-          </a:ln>
-          <a:effectLst/>
-        </p:spPr>
-        <p:style>
-          <a:lnRef idx="1">
-            <a:schemeClr val="accent1"/>
-          </a:lnRef>
-          <a:fillRef idx="3">
-            <a:schemeClr val="accent1"/>
-          </a:fillRef>
-          <a:effectRef idx="2">
-            <a:schemeClr val="accent1"/>
-          </a:effectRef>
-          <a:fontRef idx="minor">
-            <a:schemeClr val="lt1"/>
-          </a:fontRef>
-        </p:style>
-        <p:txBody>
-          <a:bodyPr rtlCol="0" anchor="ctr"/>
-          <a:lstStyle/>
-          <a:p>
-            <a:pPr algn="ctr"/>
-          </a:p>
-        </p:txBody>
-      </p:sp>
-      <p:sp>
-        <p:nvSpPr>
-          <p:cNvPr id="22" name="Rounded Rectangle 21"/>
-          <p:cNvSpPr/>
-          <p:nvPr/>
-        </p:nvSpPr>
-        <p:spPr>
-          <a:xfrm>
-            <a:off x="7013448" y="2596896"/>
-            <a:ext cx="1298448" cy="310896"/>
-          </a:xfrm>
-          <a:prstGeom prst="roundRect">
-            <a:avLst>
-              <a:gd name="adj" fmla="val 50000"/>
-            </a:avLst>
-          </a:prstGeom>
-          <a:solidFill>
-            <a:srgbClr val="FCECEC"/>
-          </a:solidFill>
-          <a:ln>
-            <a:noFill/>
-          </a:ln>
-          <a:effectLst/>
-        </p:spPr>
-        <p:style>
-          <a:lnRef idx="1">
-            <a:schemeClr val="accent1"/>
-          </a:lnRef>
-          <a:fillRef idx="3">
-            <a:schemeClr val="accent1"/>
-          </a:fillRef>
-          <a:effectRef idx="2">
-            <a:schemeClr val="accent1"/>
-          </a:effectRef>
-          <a:fontRef idx="minor">
-            <a:schemeClr val="lt1"/>
-          </a:fontRef>
-        </p:style>
-        <p:txBody>
-          <a:bodyPr rtlCol="0" anchor="ctr"/>
-          <a:lstStyle/>
-          <a:p>
-            <a:pPr algn="ctr"/>
-          </a:p>
-        </p:txBody>
-      </p:sp>
-      <p:sp>
-        <p:nvSpPr>
-          <p:cNvPr id="23" name="TextBox 22"/>
-          <p:cNvSpPr txBox="1"/>
-          <p:nvPr/>
-        </p:nvSpPr>
-        <p:spPr>
-          <a:xfrm>
-            <a:off x="7013448" y="2596896"/>
-            <a:ext cx="1298448" cy="310896"/>
-          </a:xfrm>
-          <a:prstGeom prst="rect">
-            <a:avLst/>
-          </a:prstGeom>
-          <a:noFill/>
-        </p:spPr>
-        <p:txBody>
-          <a:bodyPr wrap="none" anchor="ctr" lIns="0" rIns="0" tIns="0" bIns="0">
-            <a:spAutoFit/>
-          </a:bodyPr>
-          <a:lstStyle/>
-          <a:p>
-            <a:pPr algn="ctr">
-              <a:lnSpc>
-                <a:spcPct val="106000"/>
-              </a:lnSpc>
-              <a:spcBef>
-                <a:spcPts val="0"/>
-              </a:spcBef>
-              <a:spcAft>
-                <a:spcPts val="0"/>
-              </a:spcAft>
-            </a:pPr>
-            <a:r>
-              <a:rPr sz="850" b="1">
-                <a:solidFill>
-                  <a:srgbClr val="B80000"/>
-                </a:solidFill>
-                <a:latin typeface="Red Hat Display"/>
-              </a:rPr>
-              <a:t>MEDIA PASS</a:t>
-            </a:r>
-          </a:p>
-        </p:txBody>
-      </p:sp>
-      <p:pic>
-        <p:nvPicPr>
-          <p:cNvPr id="24" name="Picture 23" descr="eye_slate.png"/>
-          <p:cNvPicPr>
-            <a:picLocks noChangeAspect="1"/>
-          </p:cNvPicPr>
-          <p:nvPr/>
-        </p:nvPicPr>
-        <p:blipFill>
-          <a:blip r:embed="rId4"/>
-          <a:stretch>
-            <a:fillRect/>
-          </a:stretch>
-        </p:blipFill>
-        <p:spPr>
-          <a:xfrm>
-            <a:off x="8843619" y="3108960"/>
-            <a:ext cx="475488" cy="475488"/>
-          </a:xfrm>
-          <a:prstGeom prst="rect">
-            <a:avLst/>
-          </a:prstGeom>
-        </p:spPr>
-      </p:pic>
-      <p:sp>
-        <p:nvSpPr>
-          <p:cNvPr id="25" name="TextBox 24"/>
-          <p:cNvSpPr txBox="1"/>
-          <p:nvPr/>
-        </p:nvSpPr>
-        <p:spPr>
-          <a:xfrm>
-            <a:off x="7050024" y="3721608"/>
-            <a:ext cx="4062679" cy="1481328"/>
-          </a:xfrm>
-          <a:prstGeom prst="rect">
-            <a:avLst/>
-          </a:prstGeom>
-          <a:noFill/>
-        </p:spPr>
-        <p:txBody>
-          <a:bodyPr wrap="square" anchor="t" lIns="0" rIns="0" tIns="0" bIns="0">
-            <a:spAutoFit/>
-          </a:bodyPr>
-          <a:lstStyle/>
-          <a:p>
-            <a:pPr algn="l">
-              <a:lnSpc>
-                <a:spcPct val="120000"/>
-              </a:lnSpc>
-              <a:spcBef>
-                <a:spcPts val="0"/>
-              </a:spcBef>
-              <a:spcAft>
-                <a:spcPts val="0"/>
-              </a:spcAft>
-            </a:pPr>
-            <a:r>
-              <a:rPr sz="950" b="0">
-                <a:solidFill>
-                  <a:srgbClr val="8A9099"/>
-                </a:solidFill>
-                <a:latin typeface="Red Hat Text"/>
-              </a:rPr>
-              <a:t>A dial labelled "gate scope" turned from "any CVE (noisy, non-deterministic)" to "one policy category (deterministic)"; a small green check beside "remove the dependency."</a:t>
             </a:r>
           </a:p>
         </p:txBody>
@@ -9813,11 +10797,11 @@
         <p:spPr>
           <a:xfrm>
             <a:off x="841248" y="2395728"/>
-            <a:ext cx="5715000" cy="530352"/>
+            <a:ext cx="5138928" cy="786384"/>
           </a:xfrm>
           <a:prstGeom prst="roundRect">
             <a:avLst>
-              <a:gd name="adj" fmla="val 6000"/>
+              <a:gd name="adj" fmla="val 7000"/>
             </a:avLst>
           </a:prstGeom>
           <a:solidFill>
@@ -9852,9 +10836,55 @@
           </a:p>
         </p:txBody>
       </p:sp>
+      <p:sp>
+        <p:nvSpPr>
+          <p:cNvPr id="7" name="Rounded Rectangle 6"/>
+          <p:cNvSpPr/>
+          <p:nvPr/>
+        </p:nvSpPr>
+        <p:spPr>
+          <a:xfrm>
+            <a:off x="987552" y="2532888"/>
+            <a:ext cx="512064" cy="512064"/>
+          </a:xfrm>
+          <a:prstGeom prst="roundRect">
+            <a:avLst>
+              <a:gd name="adj" fmla="val 26000"/>
+            </a:avLst>
+          </a:prstGeom>
+          <a:solidFill>
+            <a:srgbClr val="EE0000"/>
+          </a:solidFill>
+          <a:ln>
+            <a:noFill/>
+          </a:ln>
+          <a:effectLst/>
+        </p:spPr>
+        <p:style>
+          <a:lnRef idx="1">
+            <a:schemeClr val="accent1"/>
+          </a:lnRef>
+          <a:fillRef idx="3">
+            <a:schemeClr val="accent1"/>
+          </a:fillRef>
+          <a:effectRef idx="2">
+            <a:schemeClr val="accent1"/>
+          </a:effectRef>
+          <a:fontRef idx="minor">
+            <a:schemeClr val="lt1"/>
+          </a:fontRef>
+        </p:style>
+        <p:txBody>
+          <a:bodyPr rtlCol="0" anchor="ctr"/>
+          <a:lstStyle/>
+          <a:p>
+            <a:pPr algn="ctr"/>
+          </a:p>
+        </p:txBody>
+      </p:sp>
       <p:pic>
         <p:nvPicPr>
-          <p:cNvPr id="7" name="Picture 6" descr="check_steel.png"/>
+          <p:cNvPr id="8" name="Picture 7" descr="check_white.png"/>
           <p:cNvPicPr>
             <a:picLocks noChangeAspect="1"/>
           </p:cNvPicPr>
@@ -9868,8 +10898,8 @@
         </p:blipFill>
         <p:spPr>
           <a:xfrm>
-            <a:off x="987552" y="2542032"/>
-            <a:ext cx="237744" cy="237744"/>
+            <a:off x="1110447" y="2655783"/>
+            <a:ext cx="266273" cy="266273"/>
           </a:xfrm>
           <a:prstGeom prst="rect">
             <a:avLst/>
@@ -9878,14 +10908,14 @@
       </p:pic>
       <p:sp>
         <p:nvSpPr>
-          <p:cNvPr id="8" name="TextBox 7"/>
+          <p:cNvPr id="9" name="TextBox 8"/>
           <p:cNvSpPr txBox="1"/>
           <p:nvPr/>
         </p:nvSpPr>
         <p:spPr>
           <a:xfrm>
-            <a:off x="1353312" y="2395728"/>
-            <a:ext cx="5029200" cy="530352"/>
+            <a:off x="1627632" y="2395728"/>
+            <a:ext cx="4206240" cy="786384"/>
           </a:xfrm>
           <a:prstGeom prst="rect">
             <a:avLst/>
@@ -9910,7 +10940,7 @@
               </a:spcAft>
             </a:pPr>
             <a:r>
-              <a:rPr sz="1200" b="0">
+              <a:rPr sz="1150" b="0">
                 <a:solidFill>
                   <a:srgbClr val="1A1A1A"/>
                 </a:solidFill>
@@ -9923,18 +10953,18 @@
       </p:sp>
       <p:sp>
         <p:nvSpPr>
-          <p:cNvPr id="9" name="Rounded Rectangle 8"/>
+          <p:cNvPr id="10" name="Rounded Rectangle 9"/>
           <p:cNvSpPr/>
           <p:nvPr/>
         </p:nvSpPr>
         <p:spPr>
           <a:xfrm>
-            <a:off x="841248" y="2999232"/>
-            <a:ext cx="5715000" cy="530352"/>
+            <a:off x="6254496" y="2395728"/>
+            <a:ext cx="5138928" cy="786384"/>
           </a:xfrm>
           <a:prstGeom prst="roundRect">
             <a:avLst>
-              <a:gd name="adj" fmla="val 6000"/>
+              <a:gd name="adj" fmla="val 7000"/>
             </a:avLst>
           </a:prstGeom>
           <a:solidFill>
@@ -9969,9 +10999,55 @@
           </a:p>
         </p:txBody>
       </p:sp>
+      <p:sp>
+        <p:nvSpPr>
+          <p:cNvPr id="11" name="Rounded Rectangle 10"/>
+          <p:cNvSpPr/>
+          <p:nvPr/>
+        </p:nvSpPr>
+        <p:spPr>
+          <a:xfrm>
+            <a:off x="6400800" y="2532888"/>
+            <a:ext cx="512064" cy="512064"/>
+          </a:xfrm>
+          <a:prstGeom prst="roundRect">
+            <a:avLst>
+              <a:gd name="adj" fmla="val 26000"/>
+            </a:avLst>
+          </a:prstGeom>
+          <a:solidFill>
+            <a:srgbClr val="EE0000"/>
+          </a:solidFill>
+          <a:ln>
+            <a:noFill/>
+          </a:ln>
+          <a:effectLst/>
+        </p:spPr>
+        <p:style>
+          <a:lnRef idx="1">
+            <a:schemeClr val="accent1"/>
+          </a:lnRef>
+          <a:fillRef idx="3">
+            <a:schemeClr val="accent1"/>
+          </a:fillRef>
+          <a:effectRef idx="2">
+            <a:schemeClr val="accent1"/>
+          </a:effectRef>
+          <a:fontRef idx="minor">
+            <a:schemeClr val="lt1"/>
+          </a:fontRef>
+        </p:style>
+        <p:txBody>
+          <a:bodyPr rtlCol="0" anchor="ctr"/>
+          <a:lstStyle/>
+          <a:p>
+            <a:pPr algn="ctr"/>
+          </a:p>
+        </p:txBody>
+      </p:sp>
       <p:pic>
         <p:nvPicPr>
-          <p:cNvPr id="10" name="Picture 9" descr="check_steel.png"/>
+          <p:cNvPr id="12" name="Picture 11" descr="check_white.png"/>
           <p:cNvPicPr>
             <a:picLocks noChangeAspect="1"/>
           </p:cNvPicPr>
@@ -9985,8 +11061,8 @@
         </p:blipFill>
         <p:spPr>
           <a:xfrm>
-            <a:off x="987552" y="3145536"/>
-            <a:ext cx="237744" cy="237744"/>
+            <a:off x="6523695" y="2655783"/>
+            <a:ext cx="266273" cy="266273"/>
           </a:xfrm>
           <a:prstGeom prst="rect">
             <a:avLst/>
@@ -9995,14 +11071,14 @@
       </p:pic>
       <p:sp>
         <p:nvSpPr>
-          <p:cNvPr id="11" name="TextBox 10"/>
+          <p:cNvPr id="13" name="TextBox 12"/>
           <p:cNvSpPr txBox="1"/>
           <p:nvPr/>
         </p:nvSpPr>
         <p:spPr>
           <a:xfrm>
-            <a:off x="1353312" y="2999232"/>
-            <a:ext cx="5029200" cy="530352"/>
+            <a:off x="7040880" y="2395728"/>
+            <a:ext cx="4206240" cy="786384"/>
           </a:xfrm>
           <a:prstGeom prst="rect">
             <a:avLst/>
@@ -10027,7 +11103,7 @@
               </a:spcAft>
             </a:pPr>
             <a:r>
-              <a:rPr sz="1200" b="0">
+              <a:rPr sz="1150" b="0">
                 <a:solidFill>
                   <a:srgbClr val="1A1A1A"/>
                 </a:solidFill>
@@ -10040,18 +11116,18 @@
       </p:sp>
       <p:sp>
         <p:nvSpPr>
-          <p:cNvPr id="12" name="Rounded Rectangle 11"/>
+          <p:cNvPr id="14" name="Rounded Rectangle 13"/>
           <p:cNvSpPr/>
           <p:nvPr/>
         </p:nvSpPr>
         <p:spPr>
           <a:xfrm>
-            <a:off x="841248" y="3602736"/>
-            <a:ext cx="5715000" cy="530352"/>
+            <a:off x="841248" y="3328416"/>
+            <a:ext cx="5138928" cy="786384"/>
           </a:xfrm>
           <a:prstGeom prst="roundRect">
             <a:avLst>
-              <a:gd name="adj" fmla="val 6000"/>
+              <a:gd name="adj" fmla="val 7000"/>
             </a:avLst>
           </a:prstGeom>
           <a:solidFill>
@@ -10086,9 +11162,55 @@
           </a:p>
         </p:txBody>
       </p:sp>
+      <p:sp>
+        <p:nvSpPr>
+          <p:cNvPr id="15" name="Rounded Rectangle 14"/>
+          <p:cNvSpPr/>
+          <p:nvPr/>
+        </p:nvSpPr>
+        <p:spPr>
+          <a:xfrm>
+            <a:off x="987552" y="3465576"/>
+            <a:ext cx="512064" cy="512064"/>
+          </a:xfrm>
+          <a:prstGeom prst="roundRect">
+            <a:avLst>
+              <a:gd name="adj" fmla="val 26000"/>
+            </a:avLst>
+          </a:prstGeom>
+          <a:solidFill>
+            <a:srgbClr val="EE0000"/>
+          </a:solidFill>
+          <a:ln>
+            <a:noFill/>
+          </a:ln>
+          <a:effectLst/>
+        </p:spPr>
+        <p:style>
+          <a:lnRef idx="1">
+            <a:schemeClr val="accent1"/>
+          </a:lnRef>
+          <a:fillRef idx="3">
+            <a:schemeClr val="accent1"/>
+          </a:fillRef>
+          <a:effectRef idx="2">
+            <a:schemeClr val="accent1"/>
+          </a:effectRef>
+          <a:fontRef idx="minor">
+            <a:schemeClr val="lt1"/>
+          </a:fontRef>
+        </p:style>
+        <p:txBody>
+          <a:bodyPr rtlCol="0" anchor="ctr"/>
+          <a:lstStyle/>
+          <a:p>
+            <a:pPr algn="ctr"/>
+          </a:p>
+        </p:txBody>
+      </p:sp>
       <p:pic>
         <p:nvPicPr>
-          <p:cNvPr id="13" name="Picture 12" descr="check_steel.png"/>
+          <p:cNvPr id="16" name="Picture 15" descr="check_white.png"/>
           <p:cNvPicPr>
             <a:picLocks noChangeAspect="1"/>
           </p:cNvPicPr>
@@ -10102,8 +11224,8 @@
         </p:blipFill>
         <p:spPr>
           <a:xfrm>
-            <a:off x="987552" y="3749040"/>
-            <a:ext cx="237744" cy="237744"/>
+            <a:off x="1110447" y="3588471"/>
+            <a:ext cx="266273" cy="266273"/>
           </a:xfrm>
           <a:prstGeom prst="rect">
             <a:avLst/>
@@ -10112,14 +11234,14 @@
       </p:pic>
       <p:sp>
         <p:nvSpPr>
-          <p:cNvPr id="14" name="TextBox 13"/>
+          <p:cNvPr id="17" name="TextBox 16"/>
           <p:cNvSpPr txBox="1"/>
           <p:nvPr/>
         </p:nvSpPr>
         <p:spPr>
           <a:xfrm>
-            <a:off x="1353312" y="3602736"/>
-            <a:ext cx="5029200" cy="530352"/>
+            <a:off x="1627632" y="3328416"/>
+            <a:ext cx="4206240" cy="786384"/>
           </a:xfrm>
           <a:prstGeom prst="rect">
             <a:avLst/>
@@ -10144,7 +11266,7 @@
               </a:spcAft>
             </a:pPr>
             <a:r>
-              <a:rPr sz="1200" b="0">
+              <a:rPr sz="1150" b="0">
                 <a:solidFill>
                   <a:srgbClr val="1A1A1A"/>
                 </a:solidFill>
@@ -10157,18 +11279,18 @@
       </p:sp>
       <p:sp>
         <p:nvSpPr>
-          <p:cNvPr id="15" name="Rounded Rectangle 14"/>
+          <p:cNvPr id="18" name="Rounded Rectangle 17"/>
           <p:cNvSpPr/>
           <p:nvPr/>
         </p:nvSpPr>
         <p:spPr>
           <a:xfrm>
-            <a:off x="841248" y="4206240"/>
-            <a:ext cx="5715000" cy="530352"/>
+            <a:off x="6254496" y="3328416"/>
+            <a:ext cx="5138928" cy="786384"/>
           </a:xfrm>
           <a:prstGeom prst="roundRect">
             <a:avLst>
-              <a:gd name="adj" fmla="val 6000"/>
+              <a:gd name="adj" fmla="val 7000"/>
             </a:avLst>
           </a:prstGeom>
           <a:solidFill>
@@ -10203,9 +11325,55 @@
           </a:p>
         </p:txBody>
       </p:sp>
+      <p:sp>
+        <p:nvSpPr>
+          <p:cNvPr id="19" name="Rounded Rectangle 18"/>
+          <p:cNvSpPr/>
+          <p:nvPr/>
+        </p:nvSpPr>
+        <p:spPr>
+          <a:xfrm>
+            <a:off x="6400800" y="3465576"/>
+            <a:ext cx="512064" cy="512064"/>
+          </a:xfrm>
+          <a:prstGeom prst="roundRect">
+            <a:avLst>
+              <a:gd name="adj" fmla="val 26000"/>
+            </a:avLst>
+          </a:prstGeom>
+          <a:solidFill>
+            <a:srgbClr val="EE0000"/>
+          </a:solidFill>
+          <a:ln>
+            <a:noFill/>
+          </a:ln>
+          <a:effectLst/>
+        </p:spPr>
+        <p:style>
+          <a:lnRef idx="1">
+            <a:schemeClr val="accent1"/>
+          </a:lnRef>
+          <a:fillRef idx="3">
+            <a:schemeClr val="accent1"/>
+          </a:fillRef>
+          <a:effectRef idx="2">
+            <a:schemeClr val="accent1"/>
+          </a:effectRef>
+          <a:fontRef idx="minor">
+            <a:schemeClr val="lt1"/>
+          </a:fontRef>
+        </p:style>
+        <p:txBody>
+          <a:bodyPr rtlCol="0" anchor="ctr"/>
+          <a:lstStyle/>
+          <a:p>
+            <a:pPr algn="ctr"/>
+          </a:p>
+        </p:txBody>
+      </p:sp>
       <p:pic>
         <p:nvPicPr>
-          <p:cNvPr id="16" name="Picture 15" descr="check_steel.png"/>
+          <p:cNvPr id="20" name="Picture 19" descr="check_white.png"/>
           <p:cNvPicPr>
             <a:picLocks noChangeAspect="1"/>
           </p:cNvPicPr>
@@ -10219,8 +11387,8 @@
         </p:blipFill>
         <p:spPr>
           <a:xfrm>
-            <a:off x="987552" y="4352544"/>
-            <a:ext cx="237744" cy="237744"/>
+            <a:off x="6523695" y="3588471"/>
+            <a:ext cx="266273" cy="266273"/>
           </a:xfrm>
           <a:prstGeom prst="rect">
             <a:avLst/>
@@ -10229,14 +11397,14 @@
       </p:pic>
       <p:sp>
         <p:nvSpPr>
-          <p:cNvPr id="17" name="TextBox 16"/>
+          <p:cNvPr id="21" name="TextBox 20"/>
           <p:cNvSpPr txBox="1"/>
           <p:nvPr/>
         </p:nvSpPr>
         <p:spPr>
           <a:xfrm>
-            <a:off x="1353312" y="4206240"/>
-            <a:ext cx="5029200" cy="530352"/>
+            <a:off x="7040880" y="3328416"/>
+            <a:ext cx="4206240" cy="786384"/>
           </a:xfrm>
           <a:prstGeom prst="rect">
             <a:avLst/>
@@ -10261,7 +11429,7 @@
               </a:spcAft>
             </a:pPr>
             <a:r>
-              <a:rPr sz="1200" b="0">
+              <a:rPr sz="1150" b="0">
                 <a:solidFill>
                   <a:srgbClr val="1A1A1A"/>
                 </a:solidFill>
@@ -10274,18 +11442,18 @@
       </p:sp>
       <p:sp>
         <p:nvSpPr>
-          <p:cNvPr id="18" name="Rounded Rectangle 17"/>
+          <p:cNvPr id="22" name="Rounded Rectangle 21"/>
           <p:cNvSpPr/>
           <p:nvPr/>
         </p:nvSpPr>
         <p:spPr>
           <a:xfrm>
-            <a:off x="841248" y="4809744"/>
-            <a:ext cx="5715000" cy="530352"/>
+            <a:off x="841248" y="4261104"/>
+            <a:ext cx="5138928" cy="786384"/>
           </a:xfrm>
           <a:prstGeom prst="roundRect">
             <a:avLst>
-              <a:gd name="adj" fmla="val 6000"/>
+              <a:gd name="adj" fmla="val 7000"/>
             </a:avLst>
           </a:prstGeom>
           <a:solidFill>
@@ -10320,9 +11488,55 @@
           </a:p>
         </p:txBody>
       </p:sp>
+      <p:sp>
+        <p:nvSpPr>
+          <p:cNvPr id="23" name="Rounded Rectangle 22"/>
+          <p:cNvSpPr/>
+          <p:nvPr/>
+        </p:nvSpPr>
+        <p:spPr>
+          <a:xfrm>
+            <a:off x="987552" y="4398264"/>
+            <a:ext cx="512064" cy="512064"/>
+          </a:xfrm>
+          <a:prstGeom prst="roundRect">
+            <a:avLst>
+              <a:gd name="adj" fmla="val 26000"/>
+            </a:avLst>
+          </a:prstGeom>
+          <a:solidFill>
+            <a:srgbClr val="EE0000"/>
+          </a:solidFill>
+          <a:ln>
+            <a:noFill/>
+          </a:ln>
+          <a:effectLst/>
+        </p:spPr>
+        <p:style>
+          <a:lnRef idx="1">
+            <a:schemeClr val="accent1"/>
+          </a:lnRef>
+          <a:fillRef idx="3">
+            <a:schemeClr val="accent1"/>
+          </a:fillRef>
+          <a:effectRef idx="2">
+            <a:schemeClr val="accent1"/>
+          </a:effectRef>
+          <a:fontRef idx="minor">
+            <a:schemeClr val="lt1"/>
+          </a:fontRef>
+        </p:style>
+        <p:txBody>
+          <a:bodyPr rtlCol="0" anchor="ctr"/>
+          <a:lstStyle/>
+          <a:p>
+            <a:pPr algn="ctr"/>
+          </a:p>
+        </p:txBody>
+      </p:sp>
       <p:pic>
         <p:nvPicPr>
-          <p:cNvPr id="19" name="Picture 18" descr="check_steel.png"/>
+          <p:cNvPr id="24" name="Picture 23" descr="check_white.png"/>
           <p:cNvPicPr>
             <a:picLocks noChangeAspect="1"/>
           </p:cNvPicPr>
@@ -10336,8 +11550,8 @@
         </p:blipFill>
         <p:spPr>
           <a:xfrm>
-            <a:off x="987552" y="4956048"/>
-            <a:ext cx="237744" cy="237744"/>
+            <a:off x="1110447" y="4521159"/>
+            <a:ext cx="266273" cy="266273"/>
           </a:xfrm>
           <a:prstGeom prst="rect">
             <a:avLst/>
@@ -10346,14 +11560,14 @@
       </p:pic>
       <p:sp>
         <p:nvSpPr>
-          <p:cNvPr id="20" name="TextBox 19"/>
+          <p:cNvPr id="25" name="TextBox 24"/>
           <p:cNvSpPr txBox="1"/>
           <p:nvPr/>
         </p:nvSpPr>
         <p:spPr>
           <a:xfrm>
-            <a:off x="1353312" y="4809744"/>
-            <a:ext cx="5029200" cy="530352"/>
+            <a:off x="1627632" y="4261104"/>
+            <a:ext cx="4206240" cy="786384"/>
           </a:xfrm>
           <a:prstGeom prst="rect">
             <a:avLst/>
@@ -10378,221 +11592,13 @@
               </a:spcAft>
             </a:pPr>
             <a:r>
-              <a:rPr sz="1200" b="0">
+              <a:rPr sz="1150" b="0">
                 <a:solidFill>
                   <a:srgbClr val="1A1A1A"/>
                 </a:solidFill>
                 <a:latin typeface="Red Hat Text"/>
               </a:rPr>
               <a:t>Signature + provenance stored beside the image</a:t>
-            </a:r>
-          </a:p>
-        </p:txBody>
-      </p:sp>
-      <p:sp>
-        <p:nvSpPr>
-          <p:cNvPr id="21" name="Rounded Rectangle 20"/>
-          <p:cNvSpPr/>
-          <p:nvPr/>
-        </p:nvSpPr>
-        <p:spPr>
-          <a:xfrm>
-            <a:off x="6812280" y="2395728"/>
-            <a:ext cx="4538167" cy="2944368"/>
-          </a:xfrm>
-          <a:prstGeom prst="roundRect">
-            <a:avLst>
-              <a:gd name="adj" fmla="val 4000"/>
-            </a:avLst>
-          </a:prstGeom>
-          <a:solidFill>
-            <a:srgbClr val="FFFFFF"/>
-          </a:solidFill>
-          <a:ln w="15240">
-            <a:solidFill>
-              <a:srgbClr val="DDE1E6"/>
-            </a:solidFill>
-          </a:ln>
-          <a:effectLst/>
-        </p:spPr>
-        <p:style>
-          <a:lnRef idx="1">
-            <a:schemeClr val="accent1"/>
-          </a:lnRef>
-          <a:fillRef idx="3">
-            <a:schemeClr val="accent1"/>
-          </a:fillRef>
-          <a:effectRef idx="2">
-            <a:schemeClr val="accent1"/>
-          </a:effectRef>
-          <a:fontRef idx="minor">
-            <a:schemeClr val="lt1"/>
-          </a:fontRef>
-        </p:style>
-        <p:txBody>
-          <a:bodyPr rtlCol="0" anchor="ctr"/>
-          <a:lstStyle/>
-          <a:p>
-            <a:pPr algn="ctr"/>
-          </a:p>
-        </p:txBody>
-      </p:sp>
-      <p:sp>
-        <p:nvSpPr>
-          <p:cNvPr id="22" name="Rounded Rectangle 21"/>
-          <p:cNvSpPr/>
-          <p:nvPr/>
-        </p:nvSpPr>
-        <p:spPr>
-          <a:xfrm>
-            <a:off x="7013448" y="2596896"/>
-            <a:ext cx="1298448" cy="310896"/>
-          </a:xfrm>
-          <a:prstGeom prst="roundRect">
-            <a:avLst>
-              <a:gd name="adj" fmla="val 50000"/>
-            </a:avLst>
-          </a:prstGeom>
-          <a:solidFill>
-            <a:srgbClr val="FCECEC"/>
-          </a:solidFill>
-          <a:ln>
-            <a:noFill/>
-          </a:ln>
-          <a:effectLst/>
-        </p:spPr>
-        <p:style>
-          <a:lnRef idx="1">
-            <a:schemeClr val="accent1"/>
-          </a:lnRef>
-          <a:fillRef idx="3">
-            <a:schemeClr val="accent1"/>
-          </a:fillRef>
-          <a:effectRef idx="2">
-            <a:schemeClr val="accent1"/>
-          </a:effectRef>
-          <a:fontRef idx="minor">
-            <a:schemeClr val="lt1"/>
-          </a:fontRef>
-        </p:style>
-        <p:txBody>
-          <a:bodyPr rtlCol="0" anchor="ctr"/>
-          <a:lstStyle/>
-          <a:p>
-            <a:pPr algn="ctr"/>
-          </a:p>
-        </p:txBody>
-      </p:sp>
-      <p:sp>
-        <p:nvSpPr>
-          <p:cNvPr id="23" name="TextBox 22"/>
-          <p:cNvSpPr txBox="1"/>
-          <p:nvPr/>
-        </p:nvSpPr>
-        <p:spPr>
-          <a:xfrm>
-            <a:off x="7013448" y="2596896"/>
-            <a:ext cx="1298448" cy="310896"/>
-          </a:xfrm>
-          <a:prstGeom prst="rect">
-            <a:avLst/>
-          </a:prstGeom>
-          <a:noFill/>
-        </p:spPr>
-        <p:txBody>
-          <a:bodyPr wrap="none" anchor="ctr" lIns="0" rIns="0" tIns="0" bIns="0">
-            <a:spAutoFit/>
-          </a:bodyPr>
-          <a:lstStyle/>
-          <a:p>
-            <a:pPr algn="ctr">
-              <a:lnSpc>
-                <a:spcPct val="106000"/>
-              </a:lnSpc>
-              <a:spcBef>
-                <a:spcPts val="0"/>
-              </a:spcBef>
-              <a:spcAft>
-                <a:spcPts val="0"/>
-              </a:spcAft>
-            </a:pPr>
-            <a:r>
-              <a:rPr sz="850" b="1">
-                <a:solidFill>
-                  <a:srgbClr val="B80000"/>
-                </a:solidFill>
-                <a:latin typeface="Red Hat Display"/>
-              </a:rPr>
-              <a:t>MEDIA PASS</a:t>
-            </a:r>
-          </a:p>
-        </p:txBody>
-      </p:sp>
-      <p:pic>
-        <p:nvPicPr>
-          <p:cNvPr id="24" name="Picture 23" descr="eye_slate.png"/>
-          <p:cNvPicPr>
-            <a:picLocks noChangeAspect="1"/>
-          </p:cNvPicPr>
-          <p:nvPr/>
-        </p:nvPicPr>
-        <p:blipFill>
-          <a:blip r:embed="rId4"/>
-          <a:stretch>
-            <a:fillRect/>
-          </a:stretch>
-        </p:blipFill>
-        <p:spPr>
-          <a:xfrm>
-            <a:off x="8843619" y="3108960"/>
-            <a:ext cx="475488" cy="475488"/>
-          </a:xfrm>
-          <a:prstGeom prst="rect">
-            <a:avLst/>
-          </a:prstGeom>
-        </p:spPr>
-      </p:pic>
-      <p:sp>
-        <p:nvSpPr>
-          <p:cNvPr id="25" name="TextBox 24"/>
-          <p:cNvSpPr txBox="1"/>
-          <p:nvPr/>
-        </p:nvSpPr>
-        <p:spPr>
-          <a:xfrm>
-            <a:off x="7050024" y="3721608"/>
-            <a:ext cx="4062679" cy="1481328"/>
-          </a:xfrm>
-          <a:prstGeom prst="rect">
-            <a:avLst/>
-          </a:prstGeom>
-          <a:noFill/>
-        </p:spPr>
-        <p:txBody>
-          <a:bodyPr wrap="square" anchor="t" lIns="0" rIns="0" tIns="0" bIns="0">
-            <a:spAutoFit/>
-          </a:bodyPr>
-          <a:lstStyle/>
-          <a:p>
-            <a:pPr algn="l">
-              <a:lnSpc>
-                <a:spcPct val="120000"/>
-              </a:lnSpc>
-              <a:spcBef>
-                <a:spcPts val="0"/>
-              </a:spcBef>
-              <a:spcAft>
-                <a:spcPts val="0"/>
-              </a:spcAft>
-            </a:pPr>
-            <a:r>
-              <a:rPr sz="950" b="0">
-                <a:solidFill>
-                  <a:srgbClr val="8A9099"/>
-                </a:solidFill>
-                <a:latin typeface="Red Hat Text"/>
-              </a:rPr>
-              <a:t>A build step with a small "Chains" badge auto-attaching a .sig and .att to the image icon; a side note "key-based (lab) vs keyless / RHTAS (enterprise)".</a:t>
             </a:r>
           </a:p>
         </p:txBody>
@@ -10900,11 +11906,11 @@
         <p:spPr>
           <a:xfrm>
             <a:off x="841248" y="2395728"/>
-            <a:ext cx="5715000" cy="530352"/>
+            <a:ext cx="5138928" cy="786384"/>
           </a:xfrm>
           <a:prstGeom prst="roundRect">
             <a:avLst>
-              <a:gd name="adj" fmla="val 6000"/>
+              <a:gd name="adj" fmla="val 7000"/>
             </a:avLst>
           </a:prstGeom>
           <a:solidFill>
@@ -10939,9 +11945,55 @@
           </a:p>
         </p:txBody>
       </p:sp>
+      <p:sp>
+        <p:nvSpPr>
+          <p:cNvPr id="7" name="Rounded Rectangle 6"/>
+          <p:cNvSpPr/>
+          <p:nvPr/>
+        </p:nvSpPr>
+        <p:spPr>
+          <a:xfrm>
+            <a:off x="987552" y="2532888"/>
+            <a:ext cx="512064" cy="512064"/>
+          </a:xfrm>
+          <a:prstGeom prst="roundRect">
+            <a:avLst>
+              <a:gd name="adj" fmla="val 26000"/>
+            </a:avLst>
+          </a:prstGeom>
+          <a:solidFill>
+            <a:srgbClr val="EE0000"/>
+          </a:solidFill>
+          <a:ln>
+            <a:noFill/>
+          </a:ln>
+          <a:effectLst/>
+        </p:spPr>
+        <p:style>
+          <a:lnRef idx="1">
+            <a:schemeClr val="accent1"/>
+          </a:lnRef>
+          <a:fillRef idx="3">
+            <a:schemeClr val="accent1"/>
+          </a:fillRef>
+          <a:effectRef idx="2">
+            <a:schemeClr val="accent1"/>
+          </a:effectRef>
+          <a:fontRef idx="minor">
+            <a:schemeClr val="lt1"/>
+          </a:fontRef>
+        </p:style>
+        <p:txBody>
+          <a:bodyPr rtlCol="0" anchor="ctr"/>
+          <a:lstStyle/>
+          <a:p>
+            <a:pPr algn="ctr"/>
+          </a:p>
+        </p:txBody>
+      </p:sp>
       <p:pic>
         <p:nvPicPr>
-          <p:cNvPr id="7" name="Picture 6" descr="check_steel.png"/>
+          <p:cNvPr id="8" name="Picture 7" descr="check_white.png"/>
           <p:cNvPicPr>
             <a:picLocks noChangeAspect="1"/>
           </p:cNvPicPr>
@@ -10955,8 +12007,8 @@
         </p:blipFill>
         <p:spPr>
           <a:xfrm>
-            <a:off x="987552" y="2542032"/>
-            <a:ext cx="237744" cy="237744"/>
+            <a:off x="1110447" y="2655783"/>
+            <a:ext cx="266273" cy="266273"/>
           </a:xfrm>
           <a:prstGeom prst="rect">
             <a:avLst/>
@@ -10965,14 +12017,14 @@
       </p:pic>
       <p:sp>
         <p:nvSpPr>
-          <p:cNvPr id="8" name="TextBox 7"/>
+          <p:cNvPr id="9" name="TextBox 8"/>
           <p:cNvSpPr txBox="1"/>
           <p:nvPr/>
         </p:nvSpPr>
         <p:spPr>
           <a:xfrm>
-            <a:off x="1353312" y="2395728"/>
-            <a:ext cx="5029200" cy="530352"/>
+            <a:off x="1627632" y="2395728"/>
+            <a:ext cx="4206240" cy="786384"/>
           </a:xfrm>
           <a:prstGeom prst="rect">
             <a:avLst/>
@@ -10997,7 +12049,7 @@
               </a:spcAft>
             </a:pPr>
             <a:r>
-              <a:rPr sz="1200" b="0">
+              <a:rPr sz="1150" b="0">
                 <a:solidFill>
                   <a:srgbClr val="1A1A1A"/>
                 </a:solidFill>
@@ -11010,18 +12062,18 @@
       </p:sp>
       <p:sp>
         <p:nvSpPr>
-          <p:cNvPr id="9" name="Rounded Rectangle 8"/>
+          <p:cNvPr id="10" name="Rounded Rectangle 9"/>
           <p:cNvSpPr/>
           <p:nvPr/>
         </p:nvSpPr>
         <p:spPr>
           <a:xfrm>
-            <a:off x="841248" y="2999232"/>
-            <a:ext cx="5715000" cy="530352"/>
+            <a:off x="6254496" y="2395728"/>
+            <a:ext cx="5138928" cy="786384"/>
           </a:xfrm>
           <a:prstGeom prst="roundRect">
             <a:avLst>
-              <a:gd name="adj" fmla="val 6000"/>
+              <a:gd name="adj" fmla="val 7000"/>
             </a:avLst>
           </a:prstGeom>
           <a:solidFill>
@@ -11056,9 +12108,55 @@
           </a:p>
         </p:txBody>
       </p:sp>
+      <p:sp>
+        <p:nvSpPr>
+          <p:cNvPr id="11" name="Rounded Rectangle 10"/>
+          <p:cNvSpPr/>
+          <p:nvPr/>
+        </p:nvSpPr>
+        <p:spPr>
+          <a:xfrm>
+            <a:off x="6400800" y="2532888"/>
+            <a:ext cx="512064" cy="512064"/>
+          </a:xfrm>
+          <a:prstGeom prst="roundRect">
+            <a:avLst>
+              <a:gd name="adj" fmla="val 26000"/>
+            </a:avLst>
+          </a:prstGeom>
+          <a:solidFill>
+            <a:srgbClr val="EE0000"/>
+          </a:solidFill>
+          <a:ln>
+            <a:noFill/>
+          </a:ln>
+          <a:effectLst/>
+        </p:spPr>
+        <p:style>
+          <a:lnRef idx="1">
+            <a:schemeClr val="accent1"/>
+          </a:lnRef>
+          <a:fillRef idx="3">
+            <a:schemeClr val="accent1"/>
+          </a:fillRef>
+          <a:effectRef idx="2">
+            <a:schemeClr val="accent1"/>
+          </a:effectRef>
+          <a:fontRef idx="minor">
+            <a:schemeClr val="lt1"/>
+          </a:fontRef>
+        </p:style>
+        <p:txBody>
+          <a:bodyPr rtlCol="0" anchor="ctr"/>
+          <a:lstStyle/>
+          <a:p>
+            <a:pPr algn="ctr"/>
+          </a:p>
+        </p:txBody>
+      </p:sp>
       <p:pic>
         <p:nvPicPr>
-          <p:cNvPr id="10" name="Picture 9" descr="check_steel.png"/>
+          <p:cNvPr id="12" name="Picture 11" descr="check_white.png"/>
           <p:cNvPicPr>
             <a:picLocks noChangeAspect="1"/>
           </p:cNvPicPr>
@@ -11072,8 +12170,8 @@
         </p:blipFill>
         <p:spPr>
           <a:xfrm>
-            <a:off x="987552" y="3145536"/>
-            <a:ext cx="237744" cy="237744"/>
+            <a:off x="6523695" y="2655783"/>
+            <a:ext cx="266273" cy="266273"/>
           </a:xfrm>
           <a:prstGeom prst="rect">
             <a:avLst/>
@@ -11082,14 +12180,14 @@
       </p:pic>
       <p:sp>
         <p:nvSpPr>
-          <p:cNvPr id="11" name="TextBox 10"/>
+          <p:cNvPr id="13" name="TextBox 12"/>
           <p:cNvSpPr txBox="1"/>
           <p:nvPr/>
         </p:nvSpPr>
         <p:spPr>
           <a:xfrm>
-            <a:off x="1353312" y="2999232"/>
-            <a:ext cx="5029200" cy="530352"/>
+            <a:off x="7040880" y="2395728"/>
+            <a:ext cx="4206240" cy="786384"/>
           </a:xfrm>
           <a:prstGeom prst="rect">
             <a:avLst/>
@@ -11114,7 +12212,7 @@
               </a:spcAft>
             </a:pPr>
             <a:r>
-              <a:rPr sz="1200" b="0">
+              <a:rPr sz="1150" b="0">
                 <a:solidFill>
                   <a:srgbClr val="1A1A1A"/>
                 </a:solidFill>
@@ -11127,18 +12225,18 @@
       </p:sp>
       <p:sp>
         <p:nvSpPr>
-          <p:cNvPr id="12" name="Rounded Rectangle 11"/>
+          <p:cNvPr id="14" name="Rounded Rectangle 13"/>
           <p:cNvSpPr/>
           <p:nvPr/>
         </p:nvSpPr>
         <p:spPr>
           <a:xfrm>
-            <a:off x="841248" y="3602736"/>
-            <a:ext cx="5715000" cy="530352"/>
+            <a:off x="841248" y="3328416"/>
+            <a:ext cx="5138928" cy="786384"/>
           </a:xfrm>
           <a:prstGeom prst="roundRect">
             <a:avLst>
-              <a:gd name="adj" fmla="val 6000"/>
+              <a:gd name="adj" fmla="val 7000"/>
             </a:avLst>
           </a:prstGeom>
           <a:solidFill>
@@ -11173,9 +12271,55 @@
           </a:p>
         </p:txBody>
       </p:sp>
+      <p:sp>
+        <p:nvSpPr>
+          <p:cNvPr id="15" name="Rounded Rectangle 14"/>
+          <p:cNvSpPr/>
+          <p:nvPr/>
+        </p:nvSpPr>
+        <p:spPr>
+          <a:xfrm>
+            <a:off x="987552" y="3465576"/>
+            <a:ext cx="512064" cy="512064"/>
+          </a:xfrm>
+          <a:prstGeom prst="roundRect">
+            <a:avLst>
+              <a:gd name="adj" fmla="val 26000"/>
+            </a:avLst>
+          </a:prstGeom>
+          <a:solidFill>
+            <a:srgbClr val="EE0000"/>
+          </a:solidFill>
+          <a:ln>
+            <a:noFill/>
+          </a:ln>
+          <a:effectLst/>
+        </p:spPr>
+        <p:style>
+          <a:lnRef idx="1">
+            <a:schemeClr val="accent1"/>
+          </a:lnRef>
+          <a:fillRef idx="3">
+            <a:schemeClr val="accent1"/>
+          </a:fillRef>
+          <a:effectRef idx="2">
+            <a:schemeClr val="accent1"/>
+          </a:effectRef>
+          <a:fontRef idx="minor">
+            <a:schemeClr val="lt1"/>
+          </a:fontRef>
+        </p:style>
+        <p:txBody>
+          <a:bodyPr rtlCol="0" anchor="ctr"/>
+          <a:lstStyle/>
+          <a:p>
+            <a:pPr algn="ctr"/>
+          </a:p>
+        </p:txBody>
+      </p:sp>
       <p:pic>
         <p:nvPicPr>
-          <p:cNvPr id="13" name="Picture 12" descr="check_steel.png"/>
+          <p:cNvPr id="16" name="Picture 15" descr="check_white.png"/>
           <p:cNvPicPr>
             <a:picLocks noChangeAspect="1"/>
           </p:cNvPicPr>
@@ -11189,8 +12333,8 @@
         </p:blipFill>
         <p:spPr>
           <a:xfrm>
-            <a:off x="987552" y="3749040"/>
-            <a:ext cx="237744" cy="237744"/>
+            <a:off x="1110447" y="3588471"/>
+            <a:ext cx="266273" cy="266273"/>
           </a:xfrm>
           <a:prstGeom prst="rect">
             <a:avLst/>
@@ -11199,14 +12343,14 @@
       </p:pic>
       <p:sp>
         <p:nvSpPr>
-          <p:cNvPr id="14" name="TextBox 13"/>
+          <p:cNvPr id="17" name="TextBox 16"/>
           <p:cNvSpPr txBox="1"/>
           <p:nvPr/>
         </p:nvSpPr>
         <p:spPr>
           <a:xfrm>
-            <a:off x="1353312" y="3602736"/>
-            <a:ext cx="5029200" cy="530352"/>
+            <a:off x="1627632" y="3328416"/>
+            <a:ext cx="4206240" cy="786384"/>
           </a:xfrm>
           <a:prstGeom prst="rect">
             <a:avLst/>
@@ -11231,7 +12375,7 @@
               </a:spcAft>
             </a:pPr>
             <a:r>
-              <a:rPr sz="1200" b="0">
+              <a:rPr sz="1150" b="0">
                 <a:solidFill>
                   <a:srgbClr val="1A1A1A"/>
                 </a:solidFill>
@@ -11244,18 +12388,18 @@
       </p:sp>
       <p:sp>
         <p:nvSpPr>
-          <p:cNvPr id="15" name="Rounded Rectangle 14"/>
+          <p:cNvPr id="18" name="Rounded Rectangle 17"/>
           <p:cNvSpPr/>
           <p:nvPr/>
         </p:nvSpPr>
         <p:spPr>
           <a:xfrm>
-            <a:off x="841248" y="4206240"/>
-            <a:ext cx="5715000" cy="530352"/>
+            <a:off x="6254496" y="3328416"/>
+            <a:ext cx="5138928" cy="786384"/>
           </a:xfrm>
           <a:prstGeom prst="roundRect">
             <a:avLst>
-              <a:gd name="adj" fmla="val 6000"/>
+              <a:gd name="adj" fmla="val 7000"/>
             </a:avLst>
           </a:prstGeom>
           <a:solidFill>
@@ -11290,9 +12434,55 @@
           </a:p>
         </p:txBody>
       </p:sp>
+      <p:sp>
+        <p:nvSpPr>
+          <p:cNvPr id="19" name="Rounded Rectangle 18"/>
+          <p:cNvSpPr/>
+          <p:nvPr/>
+        </p:nvSpPr>
+        <p:spPr>
+          <a:xfrm>
+            <a:off x="6400800" y="3465576"/>
+            <a:ext cx="512064" cy="512064"/>
+          </a:xfrm>
+          <a:prstGeom prst="roundRect">
+            <a:avLst>
+              <a:gd name="adj" fmla="val 26000"/>
+            </a:avLst>
+          </a:prstGeom>
+          <a:solidFill>
+            <a:srgbClr val="EE0000"/>
+          </a:solidFill>
+          <a:ln>
+            <a:noFill/>
+          </a:ln>
+          <a:effectLst/>
+        </p:spPr>
+        <p:style>
+          <a:lnRef idx="1">
+            <a:schemeClr val="accent1"/>
+          </a:lnRef>
+          <a:fillRef idx="3">
+            <a:schemeClr val="accent1"/>
+          </a:fillRef>
+          <a:effectRef idx="2">
+            <a:schemeClr val="accent1"/>
+          </a:effectRef>
+          <a:fontRef idx="minor">
+            <a:schemeClr val="lt1"/>
+          </a:fontRef>
+        </p:style>
+        <p:txBody>
+          <a:bodyPr rtlCol="0" anchor="ctr"/>
+          <a:lstStyle/>
+          <a:p>
+            <a:pPr algn="ctr"/>
+          </a:p>
+        </p:txBody>
+      </p:sp>
       <p:pic>
         <p:nvPicPr>
-          <p:cNvPr id="16" name="Picture 15" descr="check_steel.png"/>
+          <p:cNvPr id="20" name="Picture 19" descr="check_white.png"/>
           <p:cNvPicPr>
             <a:picLocks noChangeAspect="1"/>
           </p:cNvPicPr>
@@ -11306,8 +12496,8 @@
         </p:blipFill>
         <p:spPr>
           <a:xfrm>
-            <a:off x="987552" y="4352544"/>
-            <a:ext cx="237744" cy="237744"/>
+            <a:off x="6523695" y="3588471"/>
+            <a:ext cx="266273" cy="266273"/>
           </a:xfrm>
           <a:prstGeom prst="rect">
             <a:avLst/>
@@ -11316,14 +12506,14 @@
       </p:pic>
       <p:sp>
         <p:nvSpPr>
-          <p:cNvPr id="17" name="TextBox 16"/>
+          <p:cNvPr id="21" name="TextBox 20"/>
           <p:cNvSpPr txBox="1"/>
           <p:nvPr/>
         </p:nvSpPr>
         <p:spPr>
           <a:xfrm>
-            <a:off x="1353312" y="4206240"/>
-            <a:ext cx="5029200" cy="530352"/>
+            <a:off x="7040880" y="3328416"/>
+            <a:ext cx="4206240" cy="786384"/>
           </a:xfrm>
           <a:prstGeom prst="rect">
             <a:avLst/>
@@ -11348,7 +12538,7 @@
               </a:spcAft>
             </a:pPr>
             <a:r>
-              <a:rPr sz="1200" b="0">
+              <a:rPr sz="1150" b="0">
                 <a:solidFill>
                   <a:srgbClr val="1A1A1A"/>
                 </a:solidFill>
@@ -11361,18 +12551,18 @@
       </p:sp>
       <p:sp>
         <p:nvSpPr>
-          <p:cNvPr id="18" name="Rounded Rectangle 17"/>
+          <p:cNvPr id="22" name="Rounded Rectangle 21"/>
           <p:cNvSpPr/>
           <p:nvPr/>
         </p:nvSpPr>
         <p:spPr>
           <a:xfrm>
-            <a:off x="841248" y="4809744"/>
-            <a:ext cx="5715000" cy="530352"/>
+            <a:off x="841248" y="4261104"/>
+            <a:ext cx="5138928" cy="786384"/>
           </a:xfrm>
           <a:prstGeom prst="roundRect">
             <a:avLst>
-              <a:gd name="adj" fmla="val 6000"/>
+              <a:gd name="adj" fmla="val 7000"/>
             </a:avLst>
           </a:prstGeom>
           <a:solidFill>
@@ -11407,9 +12597,55 @@
           </a:p>
         </p:txBody>
       </p:sp>
+      <p:sp>
+        <p:nvSpPr>
+          <p:cNvPr id="23" name="Rounded Rectangle 22"/>
+          <p:cNvSpPr/>
+          <p:nvPr/>
+        </p:nvSpPr>
+        <p:spPr>
+          <a:xfrm>
+            <a:off x="987552" y="4398264"/>
+            <a:ext cx="512064" cy="512064"/>
+          </a:xfrm>
+          <a:prstGeom prst="roundRect">
+            <a:avLst>
+              <a:gd name="adj" fmla="val 26000"/>
+            </a:avLst>
+          </a:prstGeom>
+          <a:solidFill>
+            <a:srgbClr val="EE0000"/>
+          </a:solidFill>
+          <a:ln>
+            <a:noFill/>
+          </a:ln>
+          <a:effectLst/>
+        </p:spPr>
+        <p:style>
+          <a:lnRef idx="1">
+            <a:schemeClr val="accent1"/>
+          </a:lnRef>
+          <a:fillRef idx="3">
+            <a:schemeClr val="accent1"/>
+          </a:fillRef>
+          <a:effectRef idx="2">
+            <a:schemeClr val="accent1"/>
+          </a:effectRef>
+          <a:fontRef idx="minor">
+            <a:schemeClr val="lt1"/>
+          </a:fontRef>
+        </p:style>
+        <p:txBody>
+          <a:bodyPr rtlCol="0" anchor="ctr"/>
+          <a:lstStyle/>
+          <a:p>
+            <a:pPr algn="ctr"/>
+          </a:p>
+        </p:txBody>
+      </p:sp>
       <p:pic>
         <p:nvPicPr>
-          <p:cNvPr id="19" name="Picture 18" descr="check_steel.png"/>
+          <p:cNvPr id="24" name="Picture 23" descr="check_white.png"/>
           <p:cNvPicPr>
             <a:picLocks noChangeAspect="1"/>
           </p:cNvPicPr>
@@ -11423,8 +12659,8 @@
         </p:blipFill>
         <p:spPr>
           <a:xfrm>
-            <a:off x="987552" y="4956048"/>
-            <a:ext cx="237744" cy="237744"/>
+            <a:off x="1110447" y="4521159"/>
+            <a:ext cx="266273" cy="266273"/>
           </a:xfrm>
           <a:prstGeom prst="rect">
             <a:avLst/>
@@ -11433,14 +12669,14 @@
       </p:pic>
       <p:sp>
         <p:nvSpPr>
-          <p:cNvPr id="20" name="TextBox 19"/>
+          <p:cNvPr id="25" name="TextBox 24"/>
           <p:cNvSpPr txBox="1"/>
           <p:nvPr/>
         </p:nvSpPr>
         <p:spPr>
           <a:xfrm>
-            <a:off x="1353312" y="4809744"/>
-            <a:ext cx="5029200" cy="530352"/>
+            <a:off x="1627632" y="4261104"/>
+            <a:ext cx="4206240" cy="786384"/>
           </a:xfrm>
           <a:prstGeom prst="rect">
             <a:avLst/>
@@ -11465,221 +12701,13 @@
               </a:spcAft>
             </a:pPr>
             <a:r>
-              <a:rPr sz="1200" b="0">
+              <a:rPr sz="1150" b="0">
                 <a:solidFill>
                   <a:srgbClr val="1A1A1A"/>
                 </a:solidFill>
                 <a:latin typeface="Red Hat Text"/>
               </a:rPr>
               <a:t>Watch the cluster refuse an unsigned image</a:t>
-            </a:r>
-          </a:p>
-        </p:txBody>
-      </p:sp>
-      <p:sp>
-        <p:nvSpPr>
-          <p:cNvPr id="21" name="Rounded Rectangle 20"/>
-          <p:cNvSpPr/>
-          <p:nvPr/>
-        </p:nvSpPr>
-        <p:spPr>
-          <a:xfrm>
-            <a:off x="6812280" y="2395728"/>
-            <a:ext cx="4538167" cy="2944368"/>
-          </a:xfrm>
-          <a:prstGeom prst="roundRect">
-            <a:avLst>
-              <a:gd name="adj" fmla="val 4000"/>
-            </a:avLst>
-          </a:prstGeom>
-          <a:solidFill>
-            <a:srgbClr val="FFFFFF"/>
-          </a:solidFill>
-          <a:ln w="15240">
-            <a:solidFill>
-              <a:srgbClr val="DDE1E6"/>
-            </a:solidFill>
-          </a:ln>
-          <a:effectLst/>
-        </p:spPr>
-        <p:style>
-          <a:lnRef idx="1">
-            <a:schemeClr val="accent1"/>
-          </a:lnRef>
-          <a:fillRef idx="3">
-            <a:schemeClr val="accent1"/>
-          </a:fillRef>
-          <a:effectRef idx="2">
-            <a:schemeClr val="accent1"/>
-          </a:effectRef>
-          <a:fontRef idx="minor">
-            <a:schemeClr val="lt1"/>
-          </a:fontRef>
-        </p:style>
-        <p:txBody>
-          <a:bodyPr rtlCol="0" anchor="ctr"/>
-          <a:lstStyle/>
-          <a:p>
-            <a:pPr algn="ctr"/>
-          </a:p>
-        </p:txBody>
-      </p:sp>
-      <p:sp>
-        <p:nvSpPr>
-          <p:cNvPr id="22" name="Rounded Rectangle 21"/>
-          <p:cNvSpPr/>
-          <p:nvPr/>
-        </p:nvSpPr>
-        <p:spPr>
-          <a:xfrm>
-            <a:off x="7013448" y="2596896"/>
-            <a:ext cx="1298448" cy="310896"/>
-          </a:xfrm>
-          <a:prstGeom prst="roundRect">
-            <a:avLst>
-              <a:gd name="adj" fmla="val 50000"/>
-            </a:avLst>
-          </a:prstGeom>
-          <a:solidFill>
-            <a:srgbClr val="FCECEC"/>
-          </a:solidFill>
-          <a:ln>
-            <a:noFill/>
-          </a:ln>
-          <a:effectLst/>
-        </p:spPr>
-        <p:style>
-          <a:lnRef idx="1">
-            <a:schemeClr val="accent1"/>
-          </a:lnRef>
-          <a:fillRef idx="3">
-            <a:schemeClr val="accent1"/>
-          </a:fillRef>
-          <a:effectRef idx="2">
-            <a:schemeClr val="accent1"/>
-          </a:effectRef>
-          <a:fontRef idx="minor">
-            <a:schemeClr val="lt1"/>
-          </a:fontRef>
-        </p:style>
-        <p:txBody>
-          <a:bodyPr rtlCol="0" anchor="ctr"/>
-          <a:lstStyle/>
-          <a:p>
-            <a:pPr algn="ctr"/>
-          </a:p>
-        </p:txBody>
-      </p:sp>
-      <p:sp>
-        <p:nvSpPr>
-          <p:cNvPr id="23" name="TextBox 22"/>
-          <p:cNvSpPr txBox="1"/>
-          <p:nvPr/>
-        </p:nvSpPr>
-        <p:spPr>
-          <a:xfrm>
-            <a:off x="7013448" y="2596896"/>
-            <a:ext cx="1298448" cy="310896"/>
-          </a:xfrm>
-          <a:prstGeom prst="rect">
-            <a:avLst/>
-          </a:prstGeom>
-          <a:noFill/>
-        </p:spPr>
-        <p:txBody>
-          <a:bodyPr wrap="none" anchor="ctr" lIns="0" rIns="0" tIns="0" bIns="0">
-            <a:spAutoFit/>
-          </a:bodyPr>
-          <a:lstStyle/>
-          <a:p>
-            <a:pPr algn="ctr">
-              <a:lnSpc>
-                <a:spcPct val="106000"/>
-              </a:lnSpc>
-              <a:spcBef>
-                <a:spcPts val="0"/>
-              </a:spcBef>
-              <a:spcAft>
-                <a:spcPts val="0"/>
-              </a:spcAft>
-            </a:pPr>
-            <a:r>
-              <a:rPr sz="850" b="1">
-                <a:solidFill>
-                  <a:srgbClr val="B80000"/>
-                </a:solidFill>
-                <a:latin typeface="Red Hat Display"/>
-              </a:rPr>
-              <a:t>MEDIA PASS</a:t>
-            </a:r>
-          </a:p>
-        </p:txBody>
-      </p:sp>
-      <p:pic>
-        <p:nvPicPr>
-          <p:cNvPr id="24" name="Picture 23" descr="eye_slate.png"/>
-          <p:cNvPicPr>
-            <a:picLocks noChangeAspect="1"/>
-          </p:cNvPicPr>
-          <p:nvPr/>
-        </p:nvPicPr>
-        <p:blipFill>
-          <a:blip r:embed="rId4"/>
-          <a:stretch>
-            <a:fillRect/>
-          </a:stretch>
-        </p:blipFill>
-        <p:spPr>
-          <a:xfrm>
-            <a:off x="8843619" y="3108960"/>
-            <a:ext cx="475488" cy="475488"/>
-          </a:xfrm>
-          <a:prstGeom prst="rect">
-            <a:avLst/>
-          </a:prstGeom>
-        </p:spPr>
-      </p:pic>
-      <p:sp>
-        <p:nvSpPr>
-          <p:cNvPr id="25" name="TextBox 24"/>
-          <p:cNvSpPr txBox="1"/>
-          <p:nvPr/>
-        </p:nvSpPr>
-        <p:spPr>
-          <a:xfrm>
-            <a:off x="7050024" y="3721608"/>
-            <a:ext cx="4062679" cy="1481328"/>
-          </a:xfrm>
-          <a:prstGeom prst="rect">
-            <a:avLst/>
-          </a:prstGeom>
-          <a:noFill/>
-        </p:spPr>
-        <p:txBody>
-          <a:bodyPr wrap="square" anchor="t" lIns="0" rIns="0" tIns="0" bIns="0">
-            <a:spAutoFit/>
-          </a:bodyPr>
-          <a:lstStyle/>
-          <a:p>
-            <a:pPr algn="l">
-              <a:lnSpc>
-                <a:spcPct val="120000"/>
-              </a:lnSpc>
-              <a:spcBef>
-                <a:spcPts val="0"/>
-              </a:spcBef>
-              <a:spcAft>
-                <a:spcPts val="0"/>
-              </a:spcAft>
-            </a:pPr>
-            <a:r>
-              <a:rPr sz="950" b="0">
-                <a:solidFill>
-                  <a:srgbClr val="8A9099"/>
-                </a:solidFill>
-                <a:latin typeface="Red Hat Text"/>
-              </a:rPr>
-              <a:t>Numbered arc strip: gate refuses seeded → verify signed :latest → read provenance → keyless sign → Rekor entry → admission refuses unsigned.</a:t>
             </a:r>
           </a:p>
         </p:txBody>
@@ -11987,11 +13015,11 @@
         <p:spPr>
           <a:xfrm>
             <a:off x="841248" y="2395728"/>
-            <a:ext cx="5715000" cy="530352"/>
+            <a:ext cx="5138928" cy="786384"/>
           </a:xfrm>
           <a:prstGeom prst="roundRect">
             <a:avLst>
-              <a:gd name="adj" fmla="val 6000"/>
+              <a:gd name="adj" fmla="val 7000"/>
             </a:avLst>
           </a:prstGeom>
           <a:solidFill>
@@ -12026,9 +13054,55 @@
           </a:p>
         </p:txBody>
       </p:sp>
+      <p:sp>
+        <p:nvSpPr>
+          <p:cNvPr id="7" name="Rounded Rectangle 6"/>
+          <p:cNvSpPr/>
+          <p:nvPr/>
+        </p:nvSpPr>
+        <p:spPr>
+          <a:xfrm>
+            <a:off x="987552" y="2532888"/>
+            <a:ext cx="512064" cy="512064"/>
+          </a:xfrm>
+          <a:prstGeom prst="roundRect">
+            <a:avLst>
+              <a:gd name="adj" fmla="val 26000"/>
+            </a:avLst>
+          </a:prstGeom>
+          <a:solidFill>
+            <a:srgbClr val="EE0000"/>
+          </a:solidFill>
+          <a:ln>
+            <a:noFill/>
+          </a:ln>
+          <a:effectLst/>
+        </p:spPr>
+        <p:style>
+          <a:lnRef idx="1">
+            <a:schemeClr val="accent1"/>
+          </a:lnRef>
+          <a:fillRef idx="3">
+            <a:schemeClr val="accent1"/>
+          </a:fillRef>
+          <a:effectRef idx="2">
+            <a:schemeClr val="accent1"/>
+          </a:effectRef>
+          <a:fontRef idx="minor">
+            <a:schemeClr val="lt1"/>
+          </a:fontRef>
+        </p:style>
+        <p:txBody>
+          <a:bodyPr rtlCol="0" anchor="ctr"/>
+          <a:lstStyle/>
+          <a:p>
+            <a:pPr algn="ctr"/>
+          </a:p>
+        </p:txBody>
+      </p:sp>
       <p:pic>
         <p:nvPicPr>
-          <p:cNvPr id="7" name="Picture 6" descr="check_steel.png"/>
+          <p:cNvPr id="8" name="Picture 7" descr="check_white.png"/>
           <p:cNvPicPr>
             <a:picLocks noChangeAspect="1"/>
           </p:cNvPicPr>
@@ -12042,8 +13116,8 @@
         </p:blipFill>
         <p:spPr>
           <a:xfrm>
-            <a:off x="987552" y="2542032"/>
-            <a:ext cx="237744" cy="237744"/>
+            <a:off x="1110447" y="2655783"/>
+            <a:ext cx="266273" cy="266273"/>
           </a:xfrm>
           <a:prstGeom prst="rect">
             <a:avLst/>
@@ -12052,14 +13126,14 @@
       </p:pic>
       <p:sp>
         <p:nvSpPr>
-          <p:cNvPr id="8" name="TextBox 7"/>
+          <p:cNvPr id="9" name="TextBox 8"/>
           <p:cNvSpPr txBox="1"/>
           <p:nvPr/>
         </p:nvSpPr>
         <p:spPr>
           <a:xfrm>
-            <a:off x="1353312" y="2395728"/>
-            <a:ext cx="5029200" cy="530352"/>
+            <a:off x="1627632" y="2395728"/>
+            <a:ext cx="4206240" cy="786384"/>
           </a:xfrm>
           <a:prstGeom prst="rect">
             <a:avLst/>
@@ -12084,7 +13158,7 @@
               </a:spcAft>
             </a:pPr>
             <a:r>
-              <a:rPr sz="1200" b="0">
+              <a:rPr sz="1150" b="0">
                 <a:solidFill>
                   <a:srgbClr val="1A1A1A"/>
                 </a:solidFill>
@@ -12097,18 +13171,18 @@
       </p:sp>
       <p:sp>
         <p:nvSpPr>
-          <p:cNvPr id="9" name="Rounded Rectangle 8"/>
+          <p:cNvPr id="10" name="Rounded Rectangle 9"/>
           <p:cNvSpPr/>
           <p:nvPr/>
         </p:nvSpPr>
         <p:spPr>
           <a:xfrm>
-            <a:off x="841248" y="2999232"/>
-            <a:ext cx="5715000" cy="530352"/>
+            <a:off x="6254496" y="2395728"/>
+            <a:ext cx="5138928" cy="786384"/>
           </a:xfrm>
           <a:prstGeom prst="roundRect">
             <a:avLst>
-              <a:gd name="adj" fmla="val 6000"/>
+              <a:gd name="adj" fmla="val 7000"/>
             </a:avLst>
           </a:prstGeom>
           <a:solidFill>
@@ -12143,9 +13217,55 @@
           </a:p>
         </p:txBody>
       </p:sp>
+      <p:sp>
+        <p:nvSpPr>
+          <p:cNvPr id="11" name="Rounded Rectangle 10"/>
+          <p:cNvSpPr/>
+          <p:nvPr/>
+        </p:nvSpPr>
+        <p:spPr>
+          <a:xfrm>
+            <a:off x="6400800" y="2532888"/>
+            <a:ext cx="512064" cy="512064"/>
+          </a:xfrm>
+          <a:prstGeom prst="roundRect">
+            <a:avLst>
+              <a:gd name="adj" fmla="val 26000"/>
+            </a:avLst>
+          </a:prstGeom>
+          <a:solidFill>
+            <a:srgbClr val="EE0000"/>
+          </a:solidFill>
+          <a:ln>
+            <a:noFill/>
+          </a:ln>
+          <a:effectLst/>
+        </p:spPr>
+        <p:style>
+          <a:lnRef idx="1">
+            <a:schemeClr val="accent1"/>
+          </a:lnRef>
+          <a:fillRef idx="3">
+            <a:schemeClr val="accent1"/>
+          </a:fillRef>
+          <a:effectRef idx="2">
+            <a:schemeClr val="accent1"/>
+          </a:effectRef>
+          <a:fontRef idx="minor">
+            <a:schemeClr val="lt1"/>
+          </a:fontRef>
+        </p:style>
+        <p:txBody>
+          <a:bodyPr rtlCol="0" anchor="ctr"/>
+          <a:lstStyle/>
+          <a:p>
+            <a:pPr algn="ctr"/>
+          </a:p>
+        </p:txBody>
+      </p:sp>
       <p:pic>
         <p:nvPicPr>
-          <p:cNvPr id="10" name="Picture 9" descr="check_steel.png"/>
+          <p:cNvPr id="12" name="Picture 11" descr="check_white.png"/>
           <p:cNvPicPr>
             <a:picLocks noChangeAspect="1"/>
           </p:cNvPicPr>
@@ -12159,8 +13279,8 @@
         </p:blipFill>
         <p:spPr>
           <a:xfrm>
-            <a:off x="987552" y="3145536"/>
-            <a:ext cx="237744" cy="237744"/>
+            <a:off x="6523695" y="2655783"/>
+            <a:ext cx="266273" cy="266273"/>
           </a:xfrm>
           <a:prstGeom prst="rect">
             <a:avLst/>
@@ -12169,14 +13289,14 @@
       </p:pic>
       <p:sp>
         <p:nvSpPr>
-          <p:cNvPr id="11" name="TextBox 10"/>
+          <p:cNvPr id="13" name="TextBox 12"/>
           <p:cNvSpPr txBox="1"/>
           <p:nvPr/>
         </p:nvSpPr>
         <p:spPr>
           <a:xfrm>
-            <a:off x="1353312" y="2999232"/>
-            <a:ext cx="5029200" cy="530352"/>
+            <a:off x="7040880" y="2395728"/>
+            <a:ext cx="4206240" cy="786384"/>
           </a:xfrm>
           <a:prstGeom prst="rect">
             <a:avLst/>
@@ -12201,7 +13321,7 @@
               </a:spcAft>
             </a:pPr>
             <a:r>
-              <a:rPr sz="1200" b="0">
+              <a:rPr sz="1150" b="0">
                 <a:solidFill>
                   <a:srgbClr val="1A1A1A"/>
                 </a:solidFill>
@@ -12214,18 +13334,18 @@
       </p:sp>
       <p:sp>
         <p:nvSpPr>
-          <p:cNvPr id="12" name="Rounded Rectangle 11"/>
+          <p:cNvPr id="14" name="Rounded Rectangle 13"/>
           <p:cNvSpPr/>
           <p:nvPr/>
         </p:nvSpPr>
         <p:spPr>
           <a:xfrm>
-            <a:off x="841248" y="3602736"/>
-            <a:ext cx="5715000" cy="530352"/>
+            <a:off x="841248" y="3328416"/>
+            <a:ext cx="5138928" cy="786384"/>
           </a:xfrm>
           <a:prstGeom prst="roundRect">
             <a:avLst>
-              <a:gd name="adj" fmla="val 6000"/>
+              <a:gd name="adj" fmla="val 7000"/>
             </a:avLst>
           </a:prstGeom>
           <a:solidFill>
@@ -12260,9 +13380,55 @@
           </a:p>
         </p:txBody>
       </p:sp>
+      <p:sp>
+        <p:nvSpPr>
+          <p:cNvPr id="15" name="Rounded Rectangle 14"/>
+          <p:cNvSpPr/>
+          <p:nvPr/>
+        </p:nvSpPr>
+        <p:spPr>
+          <a:xfrm>
+            <a:off x="987552" y="3465576"/>
+            <a:ext cx="512064" cy="512064"/>
+          </a:xfrm>
+          <a:prstGeom prst="roundRect">
+            <a:avLst>
+              <a:gd name="adj" fmla="val 26000"/>
+            </a:avLst>
+          </a:prstGeom>
+          <a:solidFill>
+            <a:srgbClr val="EE0000"/>
+          </a:solidFill>
+          <a:ln>
+            <a:noFill/>
+          </a:ln>
+          <a:effectLst/>
+        </p:spPr>
+        <p:style>
+          <a:lnRef idx="1">
+            <a:schemeClr val="accent1"/>
+          </a:lnRef>
+          <a:fillRef idx="3">
+            <a:schemeClr val="accent1"/>
+          </a:fillRef>
+          <a:effectRef idx="2">
+            <a:schemeClr val="accent1"/>
+          </a:effectRef>
+          <a:fontRef idx="minor">
+            <a:schemeClr val="lt1"/>
+          </a:fontRef>
+        </p:style>
+        <p:txBody>
+          <a:bodyPr rtlCol="0" anchor="ctr"/>
+          <a:lstStyle/>
+          <a:p>
+            <a:pPr algn="ctr"/>
+          </a:p>
+        </p:txBody>
+      </p:sp>
       <p:pic>
         <p:nvPicPr>
-          <p:cNvPr id="13" name="Picture 12" descr="check_steel.png"/>
+          <p:cNvPr id="16" name="Picture 15" descr="check_white.png"/>
           <p:cNvPicPr>
             <a:picLocks noChangeAspect="1"/>
           </p:cNvPicPr>
@@ -12276,8 +13442,8 @@
         </p:blipFill>
         <p:spPr>
           <a:xfrm>
-            <a:off x="987552" y="3749040"/>
-            <a:ext cx="237744" cy="237744"/>
+            <a:off x="1110447" y="3588471"/>
+            <a:ext cx="266273" cy="266273"/>
           </a:xfrm>
           <a:prstGeom prst="rect">
             <a:avLst/>
@@ -12286,14 +13452,14 @@
       </p:pic>
       <p:sp>
         <p:nvSpPr>
-          <p:cNvPr id="14" name="TextBox 13"/>
+          <p:cNvPr id="17" name="TextBox 16"/>
           <p:cNvSpPr txBox="1"/>
           <p:nvPr/>
         </p:nvSpPr>
         <p:spPr>
           <a:xfrm>
-            <a:off x="1353312" y="3602736"/>
-            <a:ext cx="5029200" cy="530352"/>
+            <a:off x="1627632" y="3328416"/>
+            <a:ext cx="4206240" cy="786384"/>
           </a:xfrm>
           <a:prstGeom prst="rect">
             <a:avLst/>
@@ -12318,7 +13484,7 @@
               </a:spcAft>
             </a:pPr>
             <a:r>
-              <a:rPr sz="1200" b="0">
+              <a:rPr sz="1150" b="0">
                 <a:solidFill>
                   <a:srgbClr val="1A1A1A"/>
                 </a:solidFill>
@@ -12331,18 +13497,18 @@
       </p:sp>
       <p:sp>
         <p:nvSpPr>
-          <p:cNvPr id="15" name="Rounded Rectangle 14"/>
+          <p:cNvPr id="18" name="Rounded Rectangle 17"/>
           <p:cNvSpPr/>
           <p:nvPr/>
         </p:nvSpPr>
         <p:spPr>
           <a:xfrm>
-            <a:off x="841248" y="4206240"/>
-            <a:ext cx="5715000" cy="530352"/>
+            <a:off x="6254496" y="3328416"/>
+            <a:ext cx="5138928" cy="786384"/>
           </a:xfrm>
           <a:prstGeom prst="roundRect">
             <a:avLst>
-              <a:gd name="adj" fmla="val 6000"/>
+              <a:gd name="adj" fmla="val 7000"/>
             </a:avLst>
           </a:prstGeom>
           <a:solidFill>
@@ -12377,9 +13543,55 @@
           </a:p>
         </p:txBody>
       </p:sp>
+      <p:sp>
+        <p:nvSpPr>
+          <p:cNvPr id="19" name="Rounded Rectangle 18"/>
+          <p:cNvSpPr/>
+          <p:nvPr/>
+        </p:nvSpPr>
+        <p:spPr>
+          <a:xfrm>
+            <a:off x="6400800" y="3465576"/>
+            <a:ext cx="512064" cy="512064"/>
+          </a:xfrm>
+          <a:prstGeom prst="roundRect">
+            <a:avLst>
+              <a:gd name="adj" fmla="val 26000"/>
+            </a:avLst>
+          </a:prstGeom>
+          <a:solidFill>
+            <a:srgbClr val="EE0000"/>
+          </a:solidFill>
+          <a:ln>
+            <a:noFill/>
+          </a:ln>
+          <a:effectLst/>
+        </p:spPr>
+        <p:style>
+          <a:lnRef idx="1">
+            <a:schemeClr val="accent1"/>
+          </a:lnRef>
+          <a:fillRef idx="3">
+            <a:schemeClr val="accent1"/>
+          </a:fillRef>
+          <a:effectRef idx="2">
+            <a:schemeClr val="accent1"/>
+          </a:effectRef>
+          <a:fontRef idx="minor">
+            <a:schemeClr val="lt1"/>
+          </a:fontRef>
+        </p:style>
+        <p:txBody>
+          <a:bodyPr rtlCol="0" anchor="ctr"/>
+          <a:lstStyle/>
+          <a:p>
+            <a:pPr algn="ctr"/>
+          </a:p>
+        </p:txBody>
+      </p:sp>
       <p:pic>
         <p:nvPicPr>
-          <p:cNvPr id="16" name="Picture 15" descr="check_steel.png"/>
+          <p:cNvPr id="20" name="Picture 19" descr="check_white.png"/>
           <p:cNvPicPr>
             <a:picLocks noChangeAspect="1"/>
           </p:cNvPicPr>
@@ -12393,8 +13605,8 @@
         </p:blipFill>
         <p:spPr>
           <a:xfrm>
-            <a:off x="987552" y="4352544"/>
-            <a:ext cx="237744" cy="237744"/>
+            <a:off x="6523695" y="3588471"/>
+            <a:ext cx="266273" cy="266273"/>
           </a:xfrm>
           <a:prstGeom prst="rect">
             <a:avLst/>
@@ -12403,14 +13615,14 @@
       </p:pic>
       <p:sp>
         <p:nvSpPr>
-          <p:cNvPr id="17" name="TextBox 16"/>
+          <p:cNvPr id="21" name="TextBox 20"/>
           <p:cNvSpPr txBox="1"/>
           <p:nvPr/>
         </p:nvSpPr>
         <p:spPr>
           <a:xfrm>
-            <a:off x="1353312" y="4206240"/>
-            <a:ext cx="5029200" cy="530352"/>
+            <a:off x="7040880" y="3328416"/>
+            <a:ext cx="4206240" cy="786384"/>
           </a:xfrm>
           <a:prstGeom prst="rect">
             <a:avLst/>
@@ -12435,7 +13647,7 @@
               </a:spcAft>
             </a:pPr>
             <a:r>
-              <a:rPr sz="1200" b="0">
+              <a:rPr sz="1150" b="0">
                 <a:solidFill>
                   <a:srgbClr val="1A1A1A"/>
                 </a:solidFill>
@@ -12448,18 +13660,18 @@
       </p:sp>
       <p:sp>
         <p:nvSpPr>
-          <p:cNvPr id="18" name="Rounded Rectangle 17"/>
+          <p:cNvPr id="22" name="Rounded Rectangle 21"/>
           <p:cNvSpPr/>
           <p:nvPr/>
         </p:nvSpPr>
         <p:spPr>
           <a:xfrm>
-            <a:off x="841248" y="4809744"/>
-            <a:ext cx="5715000" cy="530352"/>
+            <a:off x="841248" y="4261104"/>
+            <a:ext cx="5138928" cy="786384"/>
           </a:xfrm>
           <a:prstGeom prst="roundRect">
             <a:avLst>
-              <a:gd name="adj" fmla="val 6000"/>
+              <a:gd name="adj" fmla="val 7000"/>
             </a:avLst>
           </a:prstGeom>
           <a:solidFill>
@@ -12494,9 +13706,55 @@
           </a:p>
         </p:txBody>
       </p:sp>
+      <p:sp>
+        <p:nvSpPr>
+          <p:cNvPr id="23" name="Rounded Rectangle 22"/>
+          <p:cNvSpPr/>
+          <p:nvPr/>
+        </p:nvSpPr>
+        <p:spPr>
+          <a:xfrm>
+            <a:off x="987552" y="4398264"/>
+            <a:ext cx="512064" cy="512064"/>
+          </a:xfrm>
+          <a:prstGeom prst="roundRect">
+            <a:avLst>
+              <a:gd name="adj" fmla="val 26000"/>
+            </a:avLst>
+          </a:prstGeom>
+          <a:solidFill>
+            <a:srgbClr val="EE0000"/>
+          </a:solidFill>
+          <a:ln>
+            <a:noFill/>
+          </a:ln>
+          <a:effectLst/>
+        </p:spPr>
+        <p:style>
+          <a:lnRef idx="1">
+            <a:schemeClr val="accent1"/>
+          </a:lnRef>
+          <a:fillRef idx="3">
+            <a:schemeClr val="accent1"/>
+          </a:fillRef>
+          <a:effectRef idx="2">
+            <a:schemeClr val="accent1"/>
+          </a:effectRef>
+          <a:fontRef idx="minor">
+            <a:schemeClr val="lt1"/>
+          </a:fontRef>
+        </p:style>
+        <p:txBody>
+          <a:bodyPr rtlCol="0" anchor="ctr"/>
+          <a:lstStyle/>
+          <a:p>
+            <a:pPr algn="ctr"/>
+          </a:p>
+        </p:txBody>
+      </p:sp>
       <p:pic>
         <p:nvPicPr>
-          <p:cNvPr id="19" name="Picture 18" descr="check_steel.png"/>
+          <p:cNvPr id="24" name="Picture 23" descr="check_white.png"/>
           <p:cNvPicPr>
             <a:picLocks noChangeAspect="1"/>
           </p:cNvPicPr>
@@ -12510,8 +13768,8 @@
         </p:blipFill>
         <p:spPr>
           <a:xfrm>
-            <a:off x="987552" y="4956048"/>
-            <a:ext cx="237744" cy="237744"/>
+            <a:off x="1110447" y="4521159"/>
+            <a:ext cx="266273" cy="266273"/>
           </a:xfrm>
           <a:prstGeom prst="rect">
             <a:avLst/>
@@ -12520,14 +13778,14 @@
       </p:pic>
       <p:sp>
         <p:nvSpPr>
-          <p:cNvPr id="20" name="TextBox 19"/>
+          <p:cNvPr id="25" name="TextBox 24"/>
           <p:cNvSpPr txBox="1"/>
           <p:nvPr/>
         </p:nvSpPr>
         <p:spPr>
           <a:xfrm>
-            <a:off x="1353312" y="4809744"/>
-            <a:ext cx="5029200" cy="530352"/>
+            <a:off x="1627632" y="4261104"/>
+            <a:ext cx="4206240" cy="786384"/>
           </a:xfrm>
           <a:prstGeom prst="rect">
             <a:avLst/>
@@ -12552,221 +13810,13 @@
               </a:spcAft>
             </a:pPr>
             <a:r>
-              <a:rPr sz="1200" b="0">
+              <a:rPr sz="1150" b="0">
                 <a:solidFill>
                   <a:srgbClr val="1A1A1A"/>
                 </a:solidFill>
                 <a:latin typeface="Red Hat Text"/>
               </a:rPr>
               <a:t>Don't sign images you never verify</a:t>
-            </a:r>
-          </a:p>
-        </p:txBody>
-      </p:sp>
-      <p:sp>
-        <p:nvSpPr>
-          <p:cNvPr id="21" name="Rounded Rectangle 20"/>
-          <p:cNvSpPr/>
-          <p:nvPr/>
-        </p:nvSpPr>
-        <p:spPr>
-          <a:xfrm>
-            <a:off x="6812280" y="2395728"/>
-            <a:ext cx="4538167" cy="2944368"/>
-          </a:xfrm>
-          <a:prstGeom prst="roundRect">
-            <a:avLst>
-              <a:gd name="adj" fmla="val 4000"/>
-            </a:avLst>
-          </a:prstGeom>
-          <a:solidFill>
-            <a:srgbClr val="FFFFFF"/>
-          </a:solidFill>
-          <a:ln w="15240">
-            <a:solidFill>
-              <a:srgbClr val="DDE1E6"/>
-            </a:solidFill>
-          </a:ln>
-          <a:effectLst/>
-        </p:spPr>
-        <p:style>
-          <a:lnRef idx="1">
-            <a:schemeClr val="accent1"/>
-          </a:lnRef>
-          <a:fillRef idx="3">
-            <a:schemeClr val="accent1"/>
-          </a:fillRef>
-          <a:effectRef idx="2">
-            <a:schemeClr val="accent1"/>
-          </a:effectRef>
-          <a:fontRef idx="minor">
-            <a:schemeClr val="lt1"/>
-          </a:fontRef>
-        </p:style>
-        <p:txBody>
-          <a:bodyPr rtlCol="0" anchor="ctr"/>
-          <a:lstStyle/>
-          <a:p>
-            <a:pPr algn="ctr"/>
-          </a:p>
-        </p:txBody>
-      </p:sp>
-      <p:sp>
-        <p:nvSpPr>
-          <p:cNvPr id="22" name="Rounded Rectangle 21"/>
-          <p:cNvSpPr/>
-          <p:nvPr/>
-        </p:nvSpPr>
-        <p:spPr>
-          <a:xfrm>
-            <a:off x="7013448" y="2596896"/>
-            <a:ext cx="1298448" cy="310896"/>
-          </a:xfrm>
-          <a:prstGeom prst="roundRect">
-            <a:avLst>
-              <a:gd name="adj" fmla="val 50000"/>
-            </a:avLst>
-          </a:prstGeom>
-          <a:solidFill>
-            <a:srgbClr val="FCECEC"/>
-          </a:solidFill>
-          <a:ln>
-            <a:noFill/>
-          </a:ln>
-          <a:effectLst/>
-        </p:spPr>
-        <p:style>
-          <a:lnRef idx="1">
-            <a:schemeClr val="accent1"/>
-          </a:lnRef>
-          <a:fillRef idx="3">
-            <a:schemeClr val="accent1"/>
-          </a:fillRef>
-          <a:effectRef idx="2">
-            <a:schemeClr val="accent1"/>
-          </a:effectRef>
-          <a:fontRef idx="minor">
-            <a:schemeClr val="lt1"/>
-          </a:fontRef>
-        </p:style>
-        <p:txBody>
-          <a:bodyPr rtlCol="0" anchor="ctr"/>
-          <a:lstStyle/>
-          <a:p>
-            <a:pPr algn="ctr"/>
-          </a:p>
-        </p:txBody>
-      </p:sp>
-      <p:sp>
-        <p:nvSpPr>
-          <p:cNvPr id="23" name="TextBox 22"/>
-          <p:cNvSpPr txBox="1"/>
-          <p:nvPr/>
-        </p:nvSpPr>
-        <p:spPr>
-          <a:xfrm>
-            <a:off x="7013448" y="2596896"/>
-            <a:ext cx="1298448" cy="310896"/>
-          </a:xfrm>
-          <a:prstGeom prst="rect">
-            <a:avLst/>
-          </a:prstGeom>
-          <a:noFill/>
-        </p:spPr>
-        <p:txBody>
-          <a:bodyPr wrap="none" anchor="ctr" lIns="0" rIns="0" tIns="0" bIns="0">
-            <a:spAutoFit/>
-          </a:bodyPr>
-          <a:lstStyle/>
-          <a:p>
-            <a:pPr algn="ctr">
-              <a:lnSpc>
-                <a:spcPct val="106000"/>
-              </a:lnSpc>
-              <a:spcBef>
-                <a:spcPts val="0"/>
-              </a:spcBef>
-              <a:spcAft>
-                <a:spcPts val="0"/>
-              </a:spcAft>
-            </a:pPr>
-            <a:r>
-              <a:rPr sz="850" b="1">
-                <a:solidFill>
-                  <a:srgbClr val="B80000"/>
-                </a:solidFill>
-                <a:latin typeface="Red Hat Display"/>
-              </a:rPr>
-              <a:t>MEDIA PASS</a:t>
-            </a:r>
-          </a:p>
-        </p:txBody>
-      </p:sp>
-      <p:pic>
-        <p:nvPicPr>
-          <p:cNvPr id="24" name="Picture 23" descr="eye_slate.png"/>
-          <p:cNvPicPr>
-            <a:picLocks noChangeAspect="1"/>
-          </p:cNvPicPr>
-          <p:nvPr/>
-        </p:nvPicPr>
-        <p:blipFill>
-          <a:blip r:embed="rId4"/>
-          <a:stretch>
-            <a:fillRect/>
-          </a:stretch>
-        </p:blipFill>
-        <p:spPr>
-          <a:xfrm>
-            <a:off x="8843619" y="3108960"/>
-            <a:ext cx="475488" cy="475488"/>
-          </a:xfrm>
-          <a:prstGeom prst="rect">
-            <a:avLst/>
-          </a:prstGeom>
-        </p:spPr>
-      </p:pic>
-      <p:sp>
-        <p:nvSpPr>
-          <p:cNvPr id="25" name="TextBox 24"/>
-          <p:cNvSpPr txBox="1"/>
-          <p:nvPr/>
-        </p:nvSpPr>
-        <p:spPr>
-          <a:xfrm>
-            <a:off x="7050024" y="3721608"/>
-            <a:ext cx="4062679" cy="1481328"/>
-          </a:xfrm>
-          <a:prstGeom prst="rect">
-            <a:avLst/>
-          </a:prstGeom>
-          <a:noFill/>
-        </p:spPr>
-        <p:txBody>
-          <a:bodyPr wrap="square" anchor="t" lIns="0" rIns="0" tIns="0" bIns="0">
-            <a:spAutoFit/>
-          </a:bodyPr>
-          <a:lstStyle/>
-          <a:p>
-            <a:pPr algn="l">
-              <a:lnSpc>
-                <a:spcPct val="120000"/>
-              </a:lnSpc>
-              <a:spcBef>
-                <a:spcPts val="0"/>
-              </a:spcBef>
-              <a:spcAft>
-                <a:spcPts val="0"/>
-              </a:spcAft>
-            </a:pPr>
-            <a:r>
-              <a:rPr sz="950" b="0">
-                <a:solidFill>
-                  <a:srgbClr val="8A9099"/>
-                </a:solidFill>
-                <a:latin typeface="Red Hat Text"/>
-              </a:rPr>
-              <a:t>Two-column card "query / fire drill" and "signed + enforced / signed + ignored", with a footnote pointer to the GitOps and Registry-governance modules.</a:t>
             </a:r>
           </a:p>
         </p:txBody>
